--- a/defense/南枝大学_答辩演示.pptx
+++ b/defense/南枝大学_答辩演示.pptx
@@ -5,28 +5,28 @@
     <p:sldMasterId id="2147483648" r:id="rId1"/>
   </p:sldMasterIdLst>
   <p:sldIdLst>
-    <p:sldId id="256" r:id="rId2"/>
-    <p:sldId id="257" r:id="rId3"/>
-    <p:sldId id="258" r:id="rId4"/>
-    <p:sldId id="259" r:id="rId5"/>
-    <p:sldId id="260" r:id="rId6"/>
-    <p:sldId id="261" r:id="rId7"/>
-    <p:sldId id="262" r:id="rId8"/>
-    <p:sldId id="263" r:id="rId9"/>
-    <p:sldId id="264" r:id="rId10"/>
-    <p:sldId id="265" r:id="rId11"/>
-    <p:sldId id="266" r:id="rId12"/>
-    <p:sldId id="267" r:id="rId13"/>
-    <p:sldId id="268" r:id="rId14"/>
-    <p:sldId id="269" r:id="rId15"/>
+    <p:sldId id="256" r:id="rId7"/>
+    <p:sldId id="257" r:id="rId9"/>
+    <p:sldId id="258" r:id="rId10"/>
+    <p:sldId id="259" r:id="rId11"/>
+    <p:sldId id="260" r:id="rId12"/>
+    <p:sldId id="261" r:id="rId13"/>
+    <p:sldId id="262" r:id="rId14"/>
+    <p:sldId id="263" r:id="rId15"/>
+    <p:sldId id="264" r:id="rId16"/>
+    <p:sldId id="265" r:id="rId17"/>
+    <p:sldId id="266" r:id="rId18"/>
+    <p:sldId id="267" r:id="rId19"/>
+    <p:sldId id="268" r:id="rId20"/>
+    <p:sldId id="269" r:id="rId21"/>
   </p:sldIdLst>
-  <p:notesMasterIdLst>
-    <p:notesMasterId r:id="rId16"/>
-  </p:notesMasterIdLst>
-  <p:sldSz cx="12191695" cy="6858000"/>
-  <p:notesSz cx="6858000" cy="12191695"/>
+  <p:sldSz cx="12191969" cy="6858000" type="screen4x3"/>
+  <p:notesSz cx="6858000" cy="9144000"/>
   <p:defaultTextStyle>
-    <a:lvl1pPr marL="0" algn="l" defTabSz="914400" rtl="0" eaLnBrk="1" latinLnBrk="0" hangingPunct="1">
+    <a:defPPr>
+      <a:defRPr lang="en-US"/>
+    </a:defPPr>
+    <a:lvl1pPr marL="0" algn="l" defTabSz="457200" rtl="0" eaLnBrk="1" latinLnBrk="0" hangingPunct="1">
       <a:defRPr sz="1800" kern="1200">
         <a:solidFill>
           <a:schemeClr val="tx1"/>
@@ -36,7 +36,7 @@
         <a:cs typeface="+mn-cs"/>
       </a:defRPr>
     </a:lvl1pPr>
-    <a:lvl2pPr marL="457200" algn="l" defTabSz="914400" rtl="0" eaLnBrk="1" latinLnBrk="0" hangingPunct="1">
+    <a:lvl2pPr marL="457200" algn="l" defTabSz="457200" rtl="0" eaLnBrk="1" latinLnBrk="0" hangingPunct="1">
       <a:defRPr sz="1800" kern="1200">
         <a:solidFill>
           <a:schemeClr val="tx1"/>
@@ -46,7 +46,7 @@
         <a:cs typeface="+mn-cs"/>
       </a:defRPr>
     </a:lvl2pPr>
-    <a:lvl3pPr marL="914400" algn="l" defTabSz="914400" rtl="0" eaLnBrk="1" latinLnBrk="0" hangingPunct="1">
+    <a:lvl3pPr marL="914400" algn="l" defTabSz="457200" rtl="0" eaLnBrk="1" latinLnBrk="0" hangingPunct="1">
       <a:defRPr sz="1800" kern="1200">
         <a:solidFill>
           <a:schemeClr val="tx1"/>
@@ -56,7 +56,7 @@
         <a:cs typeface="+mn-cs"/>
       </a:defRPr>
     </a:lvl3pPr>
-    <a:lvl4pPr marL="1371600" algn="l" defTabSz="914400" rtl="0" eaLnBrk="1" latinLnBrk="0" hangingPunct="1">
+    <a:lvl4pPr marL="1371600" algn="l" defTabSz="457200" rtl="0" eaLnBrk="1" latinLnBrk="0" hangingPunct="1">
       <a:defRPr sz="1800" kern="1200">
         <a:solidFill>
           <a:schemeClr val="tx1"/>
@@ -66,7 +66,7 @@
         <a:cs typeface="+mn-cs"/>
       </a:defRPr>
     </a:lvl4pPr>
-    <a:lvl5pPr marL="1828800" algn="l" defTabSz="914400" rtl="0" eaLnBrk="1" latinLnBrk="0" hangingPunct="1">
+    <a:lvl5pPr marL="1828800" algn="l" defTabSz="457200" rtl="0" eaLnBrk="1" latinLnBrk="0" hangingPunct="1">
       <a:defRPr sz="1800" kern="1200">
         <a:solidFill>
           <a:schemeClr val="tx1"/>
@@ -76,7 +76,7 @@
         <a:cs typeface="+mn-cs"/>
       </a:defRPr>
     </a:lvl5pPr>
-    <a:lvl6pPr marL="2286000" algn="l" defTabSz="914400" rtl="0" eaLnBrk="1" latinLnBrk="0" hangingPunct="1">
+    <a:lvl6pPr marL="2286000" algn="l" defTabSz="457200" rtl="0" eaLnBrk="1" latinLnBrk="0" hangingPunct="1">
       <a:defRPr sz="1800" kern="1200">
         <a:solidFill>
           <a:schemeClr val="tx1"/>
@@ -86,7 +86,7 @@
         <a:cs typeface="+mn-cs"/>
       </a:defRPr>
     </a:lvl6pPr>
-    <a:lvl7pPr marL="2743200" algn="l" defTabSz="914400" rtl="0" eaLnBrk="1" latinLnBrk="0" hangingPunct="1">
+    <a:lvl7pPr marL="2743200" algn="l" defTabSz="457200" rtl="0" eaLnBrk="1" latinLnBrk="0" hangingPunct="1">
       <a:defRPr sz="1800" kern="1200">
         <a:solidFill>
           <a:schemeClr val="tx1"/>
@@ -96,7 +96,7 @@
         <a:cs typeface="+mn-cs"/>
       </a:defRPr>
     </a:lvl7pPr>
-    <a:lvl8pPr marL="3200400" algn="l" defTabSz="914400" rtl="0" eaLnBrk="1" latinLnBrk="0" hangingPunct="1">
+    <a:lvl8pPr marL="3200400" algn="l" defTabSz="457200" rtl="0" eaLnBrk="1" latinLnBrk="0" hangingPunct="1">
       <a:defRPr sz="1800" kern="1200">
         <a:solidFill>
           <a:schemeClr val="tx1"/>
@@ -106,7 +106,7 @@
         <a:cs typeface="+mn-cs"/>
       </a:defRPr>
     </a:lvl8pPr>
-    <a:lvl9pPr marL="3657600" algn="l" defTabSz="914400" rtl="0" eaLnBrk="1" latinLnBrk="0" hangingPunct="1">
+    <a:lvl9pPr marL="3657600" algn="l" defTabSz="457200" rtl="0" eaLnBrk="1" latinLnBrk="0" hangingPunct="1">
       <a:defRPr sz="1800" kern="1200">
         <a:solidFill>
           <a:schemeClr val="tx1"/>
@@ -121,7 +121,7 @@
 </file>
 
 <file path=ppt/notesMasters/notesMaster1.xml><?xml version="1.0" encoding="utf-8"?>
-<p:notesMaster xmlns:a="http://schemas.openxmlformats.org/drawingml/2006/main" xmlns:r="http://schemas.openxmlformats.org/officeDocument/2006/relationships" xmlns:p="http://schemas.openxmlformats.org/presentationml/2006/main">
+<p:notesMaster xmlns:a="http://schemas.openxmlformats.org/drawingml/2006/main" xmlns:p="http://schemas.openxmlformats.org/presentationml/2006/main" xmlns:r="http://schemas.openxmlformats.org/officeDocument/2006/relationships">
   <p:cSld>
     <p:bg>
       <p:bgRef idx="1001">
@@ -155,7 +155,7 @@
         <p:spPr>
           <a:xfrm>
             <a:off x="0" y="0"/>
-            <a:ext cx="2971800" cy="458788"/>
+            <a:ext cx="2971800" cy="457200"/>
           </a:xfrm>
           <a:prstGeom prst="rect">
             <a:avLst/>
@@ -186,7 +186,7 @@
         <p:spPr>
           <a:xfrm>
             <a:off x="3884613" y="0"/>
-            <a:ext cx="2971800" cy="458788"/>
+            <a:ext cx="2971800" cy="457200"/>
           </a:xfrm>
           <a:prstGeom prst="rect">
             <a:avLst/>
@@ -200,9 +200,9 @@
             </a:lvl1pPr>
           </a:lstStyle>
           <a:p>
-            <a:fld id="{5282F153-3F37-0F45-9E97-73ACFA13230C}" type="datetimeFigureOut">
-              <a:rPr lang="en-US"/>
-              <a:t>7/23/19</a:t>
+            <a:fld id="{0F89C1C7-3DCD-1040-A9CF-14679D8B5DDD}" type="datetimeFigureOut">
+              <a:rPr lang="en-US" smtClean="0"/>
+              <a:t>10/17/16</a:t>
             </a:fld>
             <a:endParaRPr lang="en-US"/>
           </a:p>
@@ -220,8 +220,8 @@
         </p:nvSpPr>
         <p:spPr>
           <a:xfrm>
-            <a:off x="685800" y="1143000"/>
-            <a:ext cx="5486400" cy="3086100"/>
+            <a:off x="1143000" y="685800"/>
+            <a:ext cx="4572000" cy="3429000"/>
           </a:xfrm>
           <a:prstGeom prst="rect">
             <a:avLst/>
@@ -253,8 +253,8 @@
         </p:nvSpPr>
         <p:spPr>
           <a:xfrm>
-            <a:off x="685800" y="4400550"/>
-            <a:ext cx="5486400" cy="3600450"/>
+            <a:off x="685800" y="4343400"/>
+            <a:ext cx="5486400" cy="4114800"/>
           </a:xfrm>
           <a:prstGeom prst="rect">
             <a:avLst/>
@@ -266,37 +266,38 @@
           <a:p>
             <a:pPr lvl="0"/>
             <a:r>
-              <a:rPr lang="en-US"/>
+              <a:rPr lang="en-US" smtClean="0"/>
               <a:t>Click to edit Master text styles</a:t>
             </a:r>
           </a:p>
           <a:p>
             <a:pPr lvl="1"/>
             <a:r>
-              <a:rPr lang="en-US"/>
+              <a:rPr lang="en-US" smtClean="0"/>
               <a:t>Second level</a:t>
             </a:r>
           </a:p>
           <a:p>
             <a:pPr lvl="2"/>
             <a:r>
-              <a:rPr lang="en-US"/>
+              <a:rPr lang="en-US" smtClean="0"/>
               <a:t>Third level</a:t>
             </a:r>
           </a:p>
           <a:p>
             <a:pPr lvl="3"/>
             <a:r>
-              <a:rPr lang="en-US"/>
+              <a:rPr lang="en-US" smtClean="0"/>
               <a:t>Fourth level</a:t>
             </a:r>
           </a:p>
           <a:p>
             <a:pPr lvl="4"/>
             <a:r>
-              <a:rPr lang="en-US"/>
+              <a:rPr lang="en-US" smtClean="0"/>
               <a:t>Fifth level</a:t>
             </a:r>
+            <a:endParaRPr lang="en-US"/>
           </a:p>
         </p:txBody>
       </p:sp>
@@ -313,7 +314,7 @@
         <p:spPr>
           <a:xfrm>
             <a:off x="0" y="8685213"/>
-            <a:ext cx="2971800" cy="458787"/>
+            <a:ext cx="2971800" cy="457200"/>
           </a:xfrm>
           <a:prstGeom prst="rect">
             <a:avLst/>
@@ -344,7 +345,7 @@
         <p:spPr>
           <a:xfrm>
             <a:off x="3884613" y="8685213"/>
-            <a:ext cx="2971800" cy="458787"/>
+            <a:ext cx="2971800" cy="457200"/>
           </a:xfrm>
           <a:prstGeom prst="rect">
             <a:avLst/>
@@ -358,8 +359,8 @@
             </a:lvl1pPr>
           </a:lstStyle>
           <a:p>
-            <a:fld id="{CE5E9CC1-C706-0F49-92D6-E571CC5EEA8F}" type="slidenum">
-              <a:rPr lang="en-US"/>
+            <a:fld id="{BB5E49A5-4136-284D-997B-48E1D791AD67}" type="slidenum">
+              <a:rPr lang="en-US" smtClean="0"/>
               <a:t>‹#›</a:t>
             </a:fld>
             <a:endParaRPr lang="en-US"/>
@@ -369,13 +370,13 @@
     </p:spTree>
     <p:extLst>
       <p:ext uri="{BB962C8B-B14F-4D97-AF65-F5344CB8AC3E}">
-        <p14:creationId xmlns:p14="http://schemas.microsoft.com/office/powerpoint/2010/main" val="1024086991"/>
+        <p14:creationId xmlns:p14="http://schemas.microsoft.com/office/powerpoint/2010/main" val="2623252185"/>
       </p:ext>
     </p:extLst>
   </p:cSld>
   <p:clrMap bg1="lt1" tx1="dk1" bg2="lt2" tx2="dk2" accent1="accent1" accent2="accent2" accent3="accent3" accent4="accent4" accent5="accent5" accent6="accent6" hlink="hlink" folHlink="folHlink"/>
   <p:notesStyle>
-    <a:lvl1pPr marL="0" algn="l" defTabSz="914400" rtl="0" eaLnBrk="1" latinLnBrk="0" hangingPunct="1">
+    <a:lvl1pPr marL="0" algn="l" defTabSz="457200" rtl="0" eaLnBrk="1" latinLnBrk="0" hangingPunct="1">
       <a:defRPr sz="1200" kern="1200">
         <a:solidFill>
           <a:schemeClr val="tx1"/>
@@ -385,7 +386,7 @@
         <a:cs typeface="+mn-cs"/>
       </a:defRPr>
     </a:lvl1pPr>
-    <a:lvl2pPr marL="457200" algn="l" defTabSz="914400" rtl="0" eaLnBrk="1" latinLnBrk="0" hangingPunct="1">
+    <a:lvl2pPr marL="457200" algn="l" defTabSz="457200" rtl="0" eaLnBrk="1" latinLnBrk="0" hangingPunct="1">
       <a:defRPr sz="1200" kern="1200">
         <a:solidFill>
           <a:schemeClr val="tx1"/>
@@ -395,7 +396,7 @@
         <a:cs typeface="+mn-cs"/>
       </a:defRPr>
     </a:lvl2pPr>
-    <a:lvl3pPr marL="914400" algn="l" defTabSz="914400" rtl="0" eaLnBrk="1" latinLnBrk="0" hangingPunct="1">
+    <a:lvl3pPr marL="914400" algn="l" defTabSz="457200" rtl="0" eaLnBrk="1" latinLnBrk="0" hangingPunct="1">
       <a:defRPr sz="1200" kern="1200">
         <a:solidFill>
           <a:schemeClr val="tx1"/>
@@ -405,7 +406,7 @@
         <a:cs typeface="+mn-cs"/>
       </a:defRPr>
     </a:lvl3pPr>
-    <a:lvl4pPr marL="1371600" algn="l" defTabSz="914400" rtl="0" eaLnBrk="1" latinLnBrk="0" hangingPunct="1">
+    <a:lvl4pPr marL="1371600" algn="l" defTabSz="457200" rtl="0" eaLnBrk="1" latinLnBrk="0" hangingPunct="1">
       <a:defRPr sz="1200" kern="1200">
         <a:solidFill>
           <a:schemeClr val="tx1"/>
@@ -415,7 +416,7 @@
         <a:cs typeface="+mn-cs"/>
       </a:defRPr>
     </a:lvl4pPr>
-    <a:lvl5pPr marL="1828800" algn="l" defTabSz="914400" rtl="0" eaLnBrk="1" latinLnBrk="0" hangingPunct="1">
+    <a:lvl5pPr marL="1828800" algn="l" defTabSz="457200" rtl="0" eaLnBrk="1" latinLnBrk="0" hangingPunct="1">
       <a:defRPr sz="1200" kern="1200">
         <a:solidFill>
           <a:schemeClr val="tx1"/>
@@ -425,7 +426,7 @@
         <a:cs typeface="+mn-cs"/>
       </a:defRPr>
     </a:lvl5pPr>
-    <a:lvl6pPr marL="2286000" algn="l" defTabSz="914400" rtl="0" eaLnBrk="1" latinLnBrk="0" hangingPunct="1">
+    <a:lvl6pPr marL="2286000" algn="l" defTabSz="457200" rtl="0" eaLnBrk="1" latinLnBrk="0" hangingPunct="1">
       <a:defRPr sz="1200" kern="1200">
         <a:solidFill>
           <a:schemeClr val="tx1"/>
@@ -435,7 +436,7 @@
         <a:cs typeface="+mn-cs"/>
       </a:defRPr>
     </a:lvl6pPr>
-    <a:lvl7pPr marL="2743200" algn="l" defTabSz="914400" rtl="0" eaLnBrk="1" latinLnBrk="0" hangingPunct="1">
+    <a:lvl7pPr marL="2743200" algn="l" defTabSz="457200" rtl="0" eaLnBrk="1" latinLnBrk="0" hangingPunct="1">
       <a:defRPr sz="1200" kern="1200">
         <a:solidFill>
           <a:schemeClr val="tx1"/>
@@ -445,7 +446,7 @@
         <a:cs typeface="+mn-cs"/>
       </a:defRPr>
     </a:lvl7pPr>
-    <a:lvl8pPr marL="3200400" algn="l" defTabSz="914400" rtl="0" eaLnBrk="1" latinLnBrk="0" hangingPunct="1">
+    <a:lvl8pPr marL="3200400" algn="l" defTabSz="457200" rtl="0" eaLnBrk="1" latinLnBrk="0" hangingPunct="1">
       <a:defRPr sz="1200" kern="1200">
         <a:solidFill>
           <a:schemeClr val="tx1"/>
@@ -455,7 +456,7 @@
         <a:cs typeface="+mn-cs"/>
       </a:defRPr>
     </a:lvl8pPr>
-    <a:lvl9pPr marL="3657600" algn="l" defTabSz="914400" rtl="0" eaLnBrk="1" latinLnBrk="0" hangingPunct="1">
+    <a:lvl9pPr marL="3657600" algn="l" defTabSz="457200" rtl="0" eaLnBrk="1" latinLnBrk="0" hangingPunct="1">
       <a:defRPr sz="1200" kern="1200">
         <a:solidFill>
           <a:schemeClr val="tx1"/>
@@ -470,7 +471,7 @@
 </file>
 
 <file path=ppt/notesSlides/notesSlide1.xml><?xml version="1.0" encoding="utf-8"?>
-<p:notes xmlns:a="http://schemas.openxmlformats.org/drawingml/2006/main" xmlns:r="http://schemas.openxmlformats.org/officeDocument/2006/relationships" xmlns:p="http://schemas.openxmlformats.org/presentationml/2006/main">
+<p:notes xmlns:a="http://schemas.openxmlformats.org/drawingml/2006/main" xmlns:p="http://schemas.openxmlformats.org/presentationml/2006/main" xmlns:r="http://schemas.openxmlformats.org/officeDocument/2006/relationships">
   <p:cSld>
     <p:spTree>
       <p:nvGrpSpPr>
@@ -490,10 +491,10 @@
         <p:nvSpPr>
           <p:cNvPr id="2" name="Slide Image Placeholder 1"/>
           <p:cNvSpPr>
-            <a:spLocks noGrp="1" noRot="1" noChangeAspect="1"/>
-          </p:cNvSpPr>
-          <p:nvPr>
-            <p:ph type="sldImg"/>
+            <a:spLocks noGrp="1"/>
+          </p:cNvSpPr>
+          <p:nvPr>
+            <p:ph type="sldImg" idx="2"/>
           </p:nvPr>
         </p:nvSpPr>
         <p:spPr/>
@@ -505,7 +506,7 @@
             <a:spLocks noGrp="1"/>
           </p:cNvSpPr>
           <p:nvPr>
-            <p:ph type="body" idx="1"/>
+            <p:ph type="body" idx="3" sz="quarter"/>
           </p:nvPr>
         </p:nvSpPr>
         <p:spPr/>
@@ -569,28 +570,12 @@
             <a:spLocks noGrp="1"/>
           </p:cNvSpPr>
           <p:nvPr>
-            <p:ph type="sldNum" sz="quarter" idx="10"/>
-          </p:nvPr>
-        </p:nvSpPr>
-        <p:spPr/>
-        <p:txBody>
-          <a:bodyPr/>
-          <a:lstStyle/>
-          <a:p>
-            <a:fld id="{F7021451-1387-4CA6-816F-3879F97B5CBC}" type="slidenum">
-              <a:rPr lang="en-US"/>
-              <a:t>1</a:t>
-            </a:fld>
-            <a:endParaRPr lang="en-US"/>
-          </a:p>
-        </p:txBody>
+            <p:ph type="sldNum" idx="5" sz="quarter"/>
+          </p:nvPr>
+        </p:nvSpPr>
+        <p:spPr/>
       </p:sp>
     </p:spTree>
-    <p:extLst>
-      <p:ext uri="{BB962C8B-B14F-4D97-AF65-F5344CB8AC3E}">
-        <p14:creationId xmlns:p14="http://schemas.microsoft.com/office/powerpoint/2010/main" val="1024086991"/>
-      </p:ext>
-    </p:extLst>
   </p:cSld>
   <p:clrMapOvr>
     <a:masterClrMapping/>
@@ -599,7 +584,7 @@
 </file>
 
 <file path=ppt/notesSlides/notesSlide10.xml><?xml version="1.0" encoding="utf-8"?>
-<p:notes xmlns:a="http://schemas.openxmlformats.org/drawingml/2006/main" xmlns:r="http://schemas.openxmlformats.org/officeDocument/2006/relationships" xmlns:p="http://schemas.openxmlformats.org/presentationml/2006/main">
+<p:notes xmlns:a="http://schemas.openxmlformats.org/drawingml/2006/main" xmlns:p="http://schemas.openxmlformats.org/presentationml/2006/main" xmlns:r="http://schemas.openxmlformats.org/officeDocument/2006/relationships">
   <p:cSld>
     <p:spTree>
       <p:nvGrpSpPr>
@@ -619,10 +604,10 @@
         <p:nvSpPr>
           <p:cNvPr id="2" name="Slide Image Placeholder 1"/>
           <p:cNvSpPr>
-            <a:spLocks noGrp="1" noRot="1" noChangeAspect="1"/>
-          </p:cNvSpPr>
-          <p:nvPr>
-            <p:ph type="sldImg"/>
+            <a:spLocks noGrp="1"/>
+          </p:cNvSpPr>
+          <p:nvPr>
+            <p:ph type="sldImg" idx="2"/>
           </p:nvPr>
         </p:nvSpPr>
         <p:spPr/>
@@ -634,7 +619,7 @@
             <a:spLocks noGrp="1"/>
           </p:cNvSpPr>
           <p:nvPr>
-            <p:ph type="body" idx="1"/>
+            <p:ph type="body" idx="3" sz="quarter"/>
           </p:nvPr>
         </p:nvSpPr>
         <p:spPr/>
@@ -708,28 +693,12 @@
             <a:spLocks noGrp="1"/>
           </p:cNvSpPr>
           <p:nvPr>
-            <p:ph type="sldNum" sz="quarter" idx="10"/>
-          </p:nvPr>
-        </p:nvSpPr>
-        <p:spPr/>
-        <p:txBody>
-          <a:bodyPr/>
-          <a:lstStyle/>
-          <a:p>
-            <a:fld id="{F7021451-1387-4CA6-816F-3879F97B5CBC}" type="slidenum">
-              <a:rPr lang="en-US"/>
-              <a:t>10</a:t>
-            </a:fld>
-            <a:endParaRPr lang="en-US"/>
-          </a:p>
-        </p:txBody>
+            <p:ph type="sldNum" idx="5" sz="quarter"/>
+          </p:nvPr>
+        </p:nvSpPr>
+        <p:spPr/>
       </p:sp>
     </p:spTree>
-    <p:extLst>
-      <p:ext uri="{BB962C8B-B14F-4D97-AF65-F5344CB8AC3E}">
-        <p14:creationId xmlns:p14="http://schemas.microsoft.com/office/powerpoint/2010/main" val="1024086991"/>
-      </p:ext>
-    </p:extLst>
   </p:cSld>
   <p:clrMapOvr>
     <a:masterClrMapping/>
@@ -738,7 +707,7 @@
 </file>
 
 <file path=ppt/notesSlides/notesSlide11.xml><?xml version="1.0" encoding="utf-8"?>
-<p:notes xmlns:a="http://schemas.openxmlformats.org/drawingml/2006/main" xmlns:r="http://schemas.openxmlformats.org/officeDocument/2006/relationships" xmlns:p="http://schemas.openxmlformats.org/presentationml/2006/main">
+<p:notes xmlns:a="http://schemas.openxmlformats.org/drawingml/2006/main" xmlns:p="http://schemas.openxmlformats.org/presentationml/2006/main" xmlns:r="http://schemas.openxmlformats.org/officeDocument/2006/relationships">
   <p:cSld>
     <p:spTree>
       <p:nvGrpSpPr>
@@ -758,10 +727,10 @@
         <p:nvSpPr>
           <p:cNvPr id="2" name="Slide Image Placeholder 1"/>
           <p:cNvSpPr>
-            <a:spLocks noGrp="1" noRot="1" noChangeAspect="1"/>
-          </p:cNvSpPr>
-          <p:nvPr>
-            <p:ph type="sldImg"/>
+            <a:spLocks noGrp="1"/>
+          </p:cNvSpPr>
+          <p:nvPr>
+            <p:ph type="sldImg" idx="2"/>
           </p:nvPr>
         </p:nvSpPr>
         <p:spPr/>
@@ -773,7 +742,7 @@
             <a:spLocks noGrp="1"/>
           </p:cNvSpPr>
           <p:nvPr>
-            <p:ph type="body" idx="1"/>
+            <p:ph type="body" idx="3" sz="quarter"/>
           </p:nvPr>
         </p:nvSpPr>
         <p:spPr/>
@@ -852,28 +821,12 @@
             <a:spLocks noGrp="1"/>
           </p:cNvSpPr>
           <p:nvPr>
-            <p:ph type="sldNum" sz="quarter" idx="10"/>
-          </p:nvPr>
-        </p:nvSpPr>
-        <p:spPr/>
-        <p:txBody>
-          <a:bodyPr/>
-          <a:lstStyle/>
-          <a:p>
-            <a:fld id="{F7021451-1387-4CA6-816F-3879F97B5CBC}" type="slidenum">
-              <a:rPr lang="en-US"/>
-              <a:t>11</a:t>
-            </a:fld>
-            <a:endParaRPr lang="en-US"/>
-          </a:p>
-        </p:txBody>
+            <p:ph type="sldNum" idx="5" sz="quarter"/>
+          </p:nvPr>
+        </p:nvSpPr>
+        <p:spPr/>
       </p:sp>
     </p:spTree>
-    <p:extLst>
-      <p:ext uri="{BB962C8B-B14F-4D97-AF65-F5344CB8AC3E}">
-        <p14:creationId xmlns:p14="http://schemas.microsoft.com/office/powerpoint/2010/main" val="1024086991"/>
-      </p:ext>
-    </p:extLst>
   </p:cSld>
   <p:clrMapOvr>
     <a:masterClrMapping/>
@@ -882,7 +835,7 @@
 </file>
 
 <file path=ppt/notesSlides/notesSlide12.xml><?xml version="1.0" encoding="utf-8"?>
-<p:notes xmlns:a="http://schemas.openxmlformats.org/drawingml/2006/main" xmlns:r="http://schemas.openxmlformats.org/officeDocument/2006/relationships" xmlns:p="http://schemas.openxmlformats.org/presentationml/2006/main">
+<p:notes xmlns:a="http://schemas.openxmlformats.org/drawingml/2006/main" xmlns:p="http://schemas.openxmlformats.org/presentationml/2006/main" xmlns:r="http://schemas.openxmlformats.org/officeDocument/2006/relationships">
   <p:cSld>
     <p:spTree>
       <p:nvGrpSpPr>
@@ -902,10 +855,10 @@
         <p:nvSpPr>
           <p:cNvPr id="2" name="Slide Image Placeholder 1"/>
           <p:cNvSpPr>
-            <a:spLocks noGrp="1" noRot="1" noChangeAspect="1"/>
-          </p:cNvSpPr>
-          <p:nvPr>
-            <p:ph type="sldImg"/>
+            <a:spLocks noGrp="1"/>
+          </p:cNvSpPr>
+          <p:nvPr>
+            <p:ph type="sldImg" idx="2"/>
           </p:nvPr>
         </p:nvSpPr>
         <p:spPr/>
@@ -917,7 +870,7 @@
             <a:spLocks noGrp="1"/>
           </p:cNvSpPr>
           <p:nvPr>
-            <p:ph type="body" idx="1"/>
+            <p:ph type="body" idx="3" sz="quarter"/>
           </p:nvPr>
         </p:nvSpPr>
         <p:spPr/>
@@ -957,7 +910,7 @@
           </a:p>
           <a:p>
             <a:r>
-              <a:t>• 批量提交是整批跑的，单条平均约0.09到0.14秒。</a:t>
+              <a:t>• 图像批量8分量0.07秒是单骨干探针外推；文本0.09到0.14秒含训练后评估等阶段，不能作为最终完整系统纯推理耗时。</a:t>
             </a:r>
           </a:p>
           <a:p/>
@@ -973,7 +926,7 @@
           </a:p>
           <a:p>
             <a:r>
-              <a:t>图像的已有测试，是两百张图片顺序HTTP请求，共四十七点二秒，平均每张零点二三六秒。文本是五条测试输入，以短文本为主，其中包含空串，HTTP均值零点六八秒。两组条件不同，文本测量来自宿主GPU，不能直接比较，也不能据此推算并发吞吐。批量提交是整批跑的，单条平均约0.09到0.14秒。</a:t>
+              <a:t>图像的已有测试，是两百张图片顺序HTTP请求，共四十七点二秒，平均每张零点二三六秒。文本是五条测试输入，以短文本为主，其中包含空串，HTTP均值零点六八秒。两组条件不同，文本测量来自宿主GPU，不能直接比较，也不能据此推算并发吞吐。批量预测还需要单独测量完整集成的总耗时。</a:t>
             </a:r>
           </a:p>
           <a:p>
@@ -1006,28 +959,12 @@
             <a:spLocks noGrp="1"/>
           </p:cNvSpPr>
           <p:nvPr>
-            <p:ph type="sldNum" sz="quarter" idx="10"/>
-          </p:nvPr>
-        </p:nvSpPr>
-        <p:spPr/>
-        <p:txBody>
-          <a:bodyPr/>
-          <a:lstStyle/>
-          <a:p>
-            <a:fld id="{F7021451-1387-4CA6-816F-3879F97B5CBC}" type="slidenum">
-              <a:rPr lang="en-US"/>
-              <a:t>12</a:t>
-            </a:fld>
-            <a:endParaRPr lang="en-US"/>
-          </a:p>
-        </p:txBody>
+            <p:ph type="sldNum" idx="5" sz="quarter"/>
+          </p:nvPr>
+        </p:nvSpPr>
+        <p:spPr/>
       </p:sp>
     </p:spTree>
-    <p:extLst>
-      <p:ext uri="{BB962C8B-B14F-4D97-AF65-F5344CB8AC3E}">
-        <p14:creationId xmlns:p14="http://schemas.microsoft.com/office/powerpoint/2010/main" val="1024086991"/>
-      </p:ext>
-    </p:extLst>
   </p:cSld>
   <p:clrMapOvr>
     <a:masterClrMapping/>
@@ -1036,7 +973,7 @@
 </file>
 
 <file path=ppt/notesSlides/notesSlide13.xml><?xml version="1.0" encoding="utf-8"?>
-<p:notes xmlns:a="http://schemas.openxmlformats.org/drawingml/2006/main" xmlns:r="http://schemas.openxmlformats.org/officeDocument/2006/relationships" xmlns:p="http://schemas.openxmlformats.org/presentationml/2006/main">
+<p:notes xmlns:a="http://schemas.openxmlformats.org/drawingml/2006/main" xmlns:p="http://schemas.openxmlformats.org/presentationml/2006/main" xmlns:r="http://schemas.openxmlformats.org/officeDocument/2006/relationships">
   <p:cSld>
     <p:spTree>
       <p:nvGrpSpPr>
@@ -1056,10 +993,10 @@
         <p:nvSpPr>
           <p:cNvPr id="2" name="Slide Image Placeholder 1"/>
           <p:cNvSpPr>
-            <a:spLocks noGrp="1" noRot="1" noChangeAspect="1"/>
-          </p:cNvSpPr>
-          <p:nvPr>
-            <p:ph type="sldImg"/>
+            <a:spLocks noGrp="1"/>
+          </p:cNvSpPr>
+          <p:nvPr>
+            <p:ph type="sldImg" idx="2"/>
           </p:nvPr>
         </p:nvSpPr>
         <p:spPr/>
@@ -1071,7 +1008,7 @@
             <a:spLocks noGrp="1"/>
           </p:cNvSpPr>
           <p:nvPr>
-            <p:ph type="body" idx="1"/>
+            <p:ph type="body" idx="3" sz="quarter"/>
           </p:nvPr>
         </p:nvSpPr>
         <p:spPr/>
@@ -1145,28 +1082,12 @@
             <a:spLocks noGrp="1"/>
           </p:cNvSpPr>
           <p:nvPr>
-            <p:ph type="sldNum" sz="quarter" idx="10"/>
-          </p:nvPr>
-        </p:nvSpPr>
-        <p:spPr/>
-        <p:txBody>
-          <a:bodyPr/>
-          <a:lstStyle/>
-          <a:p>
-            <a:fld id="{F7021451-1387-4CA6-816F-3879F97B5CBC}" type="slidenum">
-              <a:rPr lang="en-US"/>
-              <a:t>13</a:t>
-            </a:fld>
-            <a:endParaRPr lang="en-US"/>
-          </a:p>
-        </p:txBody>
+            <p:ph type="sldNum" idx="5" sz="quarter"/>
+          </p:nvPr>
+        </p:nvSpPr>
+        <p:spPr/>
       </p:sp>
     </p:spTree>
-    <p:extLst>
-      <p:ext uri="{BB962C8B-B14F-4D97-AF65-F5344CB8AC3E}">
-        <p14:creationId xmlns:p14="http://schemas.microsoft.com/office/powerpoint/2010/main" val="1024086991"/>
-      </p:ext>
-    </p:extLst>
   </p:cSld>
   <p:clrMapOvr>
     <a:masterClrMapping/>
@@ -1175,7 +1096,7 @@
 </file>
 
 <file path=ppt/notesSlides/notesSlide14.xml><?xml version="1.0" encoding="utf-8"?>
-<p:notes xmlns:a="http://schemas.openxmlformats.org/drawingml/2006/main" xmlns:r="http://schemas.openxmlformats.org/officeDocument/2006/relationships" xmlns:p="http://schemas.openxmlformats.org/presentationml/2006/main">
+<p:notes xmlns:a="http://schemas.openxmlformats.org/drawingml/2006/main" xmlns:p="http://schemas.openxmlformats.org/presentationml/2006/main" xmlns:r="http://schemas.openxmlformats.org/officeDocument/2006/relationships">
   <p:cSld>
     <p:spTree>
       <p:nvGrpSpPr>
@@ -1195,10 +1116,10 @@
         <p:nvSpPr>
           <p:cNvPr id="2" name="Slide Image Placeholder 1"/>
           <p:cNvSpPr>
-            <a:spLocks noGrp="1" noRot="1" noChangeAspect="1"/>
-          </p:cNvSpPr>
-          <p:nvPr>
-            <p:ph type="sldImg"/>
+            <a:spLocks noGrp="1"/>
+          </p:cNvSpPr>
+          <p:nvPr>
+            <p:ph type="sldImg" idx="2"/>
           </p:nvPr>
         </p:nvSpPr>
         <p:spPr/>
@@ -1210,7 +1131,7 @@
             <a:spLocks noGrp="1"/>
           </p:cNvSpPr>
           <p:nvPr>
-            <p:ph type="body" idx="1"/>
+            <p:ph type="body" idx="3" sz="quarter"/>
           </p:nvPr>
         </p:nvSpPr>
         <p:spPr/>
@@ -1274,28 +1195,12 @@
             <a:spLocks noGrp="1"/>
           </p:cNvSpPr>
           <p:nvPr>
-            <p:ph type="sldNum" sz="quarter" idx="10"/>
-          </p:nvPr>
-        </p:nvSpPr>
-        <p:spPr/>
-        <p:txBody>
-          <a:bodyPr/>
-          <a:lstStyle/>
-          <a:p>
-            <a:fld id="{F7021451-1387-4CA6-816F-3879F97B5CBC}" type="slidenum">
-              <a:rPr lang="en-US"/>
-              <a:t>14</a:t>
-            </a:fld>
-            <a:endParaRPr lang="en-US"/>
-          </a:p>
-        </p:txBody>
+            <p:ph type="sldNum" idx="5" sz="quarter"/>
+          </p:nvPr>
+        </p:nvSpPr>
+        <p:spPr/>
       </p:sp>
     </p:spTree>
-    <p:extLst>
-      <p:ext uri="{BB962C8B-B14F-4D97-AF65-F5344CB8AC3E}">
-        <p14:creationId xmlns:p14="http://schemas.microsoft.com/office/powerpoint/2010/main" val="1024086991"/>
-      </p:ext>
-    </p:extLst>
   </p:cSld>
   <p:clrMapOvr>
     <a:masterClrMapping/>
@@ -1304,7 +1209,7 @@
 </file>
 
 <file path=ppt/notesSlides/notesSlide2.xml><?xml version="1.0" encoding="utf-8"?>
-<p:notes xmlns:a="http://schemas.openxmlformats.org/drawingml/2006/main" xmlns:r="http://schemas.openxmlformats.org/officeDocument/2006/relationships" xmlns:p="http://schemas.openxmlformats.org/presentationml/2006/main">
+<p:notes xmlns:a="http://schemas.openxmlformats.org/drawingml/2006/main" xmlns:p="http://schemas.openxmlformats.org/presentationml/2006/main" xmlns:r="http://schemas.openxmlformats.org/officeDocument/2006/relationships">
   <p:cSld>
     <p:spTree>
       <p:nvGrpSpPr>
@@ -1324,10 +1229,10 @@
         <p:nvSpPr>
           <p:cNvPr id="2" name="Slide Image Placeholder 1"/>
           <p:cNvSpPr>
-            <a:spLocks noGrp="1" noRot="1" noChangeAspect="1"/>
-          </p:cNvSpPr>
-          <p:nvPr>
-            <p:ph type="sldImg"/>
+            <a:spLocks noGrp="1"/>
+          </p:cNvSpPr>
+          <p:nvPr>
+            <p:ph type="sldImg" idx="2"/>
           </p:nvPr>
         </p:nvSpPr>
         <p:spPr/>
@@ -1339,7 +1244,7 @@
             <a:spLocks noGrp="1"/>
           </p:cNvSpPr>
           <p:nvPr>
-            <p:ph type="body" idx="1"/>
+            <p:ph type="body" idx="3" sz="quarter"/>
           </p:nvPr>
         </p:nvSpPr>
         <p:spPr/>
@@ -1408,28 +1313,12 @@
             <a:spLocks noGrp="1"/>
           </p:cNvSpPr>
           <p:nvPr>
-            <p:ph type="sldNum" sz="quarter" idx="10"/>
-          </p:nvPr>
-        </p:nvSpPr>
-        <p:spPr/>
-        <p:txBody>
-          <a:bodyPr/>
-          <a:lstStyle/>
-          <a:p>
-            <a:fld id="{F7021451-1387-4CA6-816F-3879F97B5CBC}" type="slidenum">
-              <a:rPr lang="en-US"/>
-              <a:t>2</a:t>
-            </a:fld>
-            <a:endParaRPr lang="en-US"/>
-          </a:p>
-        </p:txBody>
+            <p:ph type="sldNum" idx="5" sz="quarter"/>
+          </p:nvPr>
+        </p:nvSpPr>
+        <p:spPr/>
       </p:sp>
     </p:spTree>
-    <p:extLst>
-      <p:ext uri="{BB962C8B-B14F-4D97-AF65-F5344CB8AC3E}">
-        <p14:creationId xmlns:p14="http://schemas.microsoft.com/office/powerpoint/2010/main" val="1024086991"/>
-      </p:ext>
-    </p:extLst>
   </p:cSld>
   <p:clrMapOvr>
     <a:masterClrMapping/>
@@ -1438,7 +1327,7 @@
 </file>
 
 <file path=ppt/notesSlides/notesSlide3.xml><?xml version="1.0" encoding="utf-8"?>
-<p:notes xmlns:a="http://schemas.openxmlformats.org/drawingml/2006/main" xmlns:r="http://schemas.openxmlformats.org/officeDocument/2006/relationships" xmlns:p="http://schemas.openxmlformats.org/presentationml/2006/main">
+<p:notes xmlns:a="http://schemas.openxmlformats.org/drawingml/2006/main" xmlns:p="http://schemas.openxmlformats.org/presentationml/2006/main" xmlns:r="http://schemas.openxmlformats.org/officeDocument/2006/relationships">
   <p:cSld>
     <p:spTree>
       <p:nvGrpSpPr>
@@ -1458,10 +1347,10 @@
         <p:nvSpPr>
           <p:cNvPr id="2" name="Slide Image Placeholder 1"/>
           <p:cNvSpPr>
-            <a:spLocks noGrp="1" noRot="1" noChangeAspect="1"/>
-          </p:cNvSpPr>
-          <p:nvPr>
-            <p:ph type="sldImg"/>
+            <a:spLocks noGrp="1"/>
+          </p:cNvSpPr>
+          <p:nvPr>
+            <p:ph type="sldImg" idx="2"/>
           </p:nvPr>
         </p:nvSpPr>
         <p:spPr/>
@@ -1473,7 +1362,7 @@
             <a:spLocks noGrp="1"/>
           </p:cNvSpPr>
           <p:nvPr>
-            <p:ph type="body" idx="1"/>
+            <p:ph type="body" idx="3" sz="quarter"/>
           </p:nvPr>
         </p:nvSpPr>
         <p:spPr/>
@@ -1493,17 +1382,17 @@
           </a:p>
           <a:p>
             <a:r>
-              <a:t>• 图像3类骨干、8个LoRA分量，百分位融合。</a:t>
-            </a:r>
-          </a:p>
-          <a:p>
-            <a:r>
-              <a:t>• 文本14B与7B、三组五折适配器、9:1融合。</a:t>
-            </a:r>
-          </a:p>
-          <a:p>
-            <a:r>
-              <a:t>• 两种模态独立训练、独立输出。</a:t>
+              <a:t>• 实线连接单样本输入、预处理、模型分支、融合与独立输出；虚线代表训练和辅助信号。</a:t>
+            </a:r>
+          </a:p>
+          <a:p>
+            <a:r>
+              <a:t>• 图像8个分量来自CLIP-H四路、bigG三路及SigLIP2一路，进入ECDF和三槽融合。</a:t>
+            </a:r>
+          </a:p>
+          <a:p>
+            <a:r>
+              <a:t>• 在线文本两基座各先平均logit再sigmoid，然后9:1融合；整批排名路径在第9页单独说明。</a:t>
             </a:r>
           </a:p>
           <a:p/>
@@ -1514,7 +1403,7 @@
           </a:p>
           <a:p>
             <a:r>
-              <a:t>请看这张架构图。左边是图像链：图片经过预处理，由三类视觉骨干、八个检测分量分别打分，再做百分位映射和先验融合。右边是文本链：两个语言模型基座，配合三组适配器，最后按主辅权重组合。</a:t>
+              <a:t>请看这张全景架构图。上面是图像链，下面是文本链。沿实线从左往右看，是单样本输入、预处理、模型分支、融合和各自的输出。虚线表示训练与辅助信号。图像有三类骨干、八个分量；文本用两个基座、三组适配器。</a:t>
             </a:r>
           </a:p>
           <a:p>
@@ -1542,28 +1431,12 @@
             <a:spLocks noGrp="1"/>
           </p:cNvSpPr>
           <p:nvPr>
-            <p:ph type="sldNum" sz="quarter" idx="10"/>
-          </p:nvPr>
-        </p:nvSpPr>
-        <p:spPr/>
-        <p:txBody>
-          <a:bodyPr/>
-          <a:lstStyle/>
-          <a:p>
-            <a:fld id="{F7021451-1387-4CA6-816F-3879F97B5CBC}" type="slidenum">
-              <a:rPr lang="en-US"/>
-              <a:t>3</a:t>
-            </a:fld>
-            <a:endParaRPr lang="en-US"/>
-          </a:p>
-        </p:txBody>
+            <p:ph type="sldNum" idx="5" sz="quarter"/>
+          </p:nvPr>
+        </p:nvSpPr>
+        <p:spPr/>
       </p:sp>
     </p:spTree>
-    <p:extLst>
-      <p:ext uri="{BB962C8B-B14F-4D97-AF65-F5344CB8AC3E}">
-        <p14:creationId xmlns:p14="http://schemas.microsoft.com/office/powerpoint/2010/main" val="1024086991"/>
-      </p:ext>
-    </p:extLst>
   </p:cSld>
   <p:clrMapOvr>
     <a:masterClrMapping/>
@@ -1572,7 +1445,7 @@
 </file>
 
 <file path=ppt/notesSlides/notesSlide4.xml><?xml version="1.0" encoding="utf-8"?>
-<p:notes xmlns:a="http://schemas.openxmlformats.org/drawingml/2006/main" xmlns:r="http://schemas.openxmlformats.org/officeDocument/2006/relationships" xmlns:p="http://schemas.openxmlformats.org/presentationml/2006/main">
+<p:notes xmlns:a="http://schemas.openxmlformats.org/drawingml/2006/main" xmlns:p="http://schemas.openxmlformats.org/presentationml/2006/main" xmlns:r="http://schemas.openxmlformats.org/officeDocument/2006/relationships">
   <p:cSld>
     <p:spTree>
       <p:nvGrpSpPr>
@@ -1592,10 +1465,10 @@
         <p:nvSpPr>
           <p:cNvPr id="2" name="Slide Image Placeholder 1"/>
           <p:cNvSpPr>
-            <a:spLocks noGrp="1" noRot="1" noChangeAspect="1"/>
-          </p:cNvSpPr>
-          <p:nvPr>
-            <p:ph type="sldImg"/>
+            <a:spLocks noGrp="1"/>
+          </p:cNvSpPr>
+          <p:nvPr>
+            <p:ph type="sldImg" idx="2"/>
           </p:nvPr>
         </p:nvSpPr>
         <p:spPr/>
@@ -1607,7 +1480,7 @@
             <a:spLocks noGrp="1"/>
           </p:cNvSpPr>
           <p:nvPr>
-            <p:ph type="body" idx="1"/>
+            <p:ph type="body" idx="3" sz="quarter"/>
           </p:nvPr>
         </p:nvSpPr>
         <p:spPr/>
@@ -1627,22 +1500,27 @@
           </a:p>
           <a:p>
             <a:r>
-              <a:t>• CLIP-H使用20,000目标图像软标签，加1,000官方样例硬标签，硬标签权重4。</a:t>
-            </a:r>
-          </a:p>
-          <a:p>
-            <a:r>
-              <a:t>• 主跑2轮，另外三个种子4轮；它们共享教师和骨干，种子改变可训参数初始化及增强。主跑种子为脚本默认20261003。</a:t>
-            </a:r>
-          </a:p>
-          <a:p>
-            <a:r>
-              <a:t>• bigG的224视角有两个种子，384视角另有一个分量；Tiny-GenImage与官方样例提供监督，800训练、200验证。</a:t>
-            </a:r>
-          </a:p>
-          <a:p>
-            <a:r>
-              <a:t>• SigLIP2使用GenImage++与官方样例监督；全方案冻结骨干，只更新LoRA与分类头。</a:t>
+              <a:t>• 上方左侧是20,000张目标图像的教师软标签，与1,000张官方样例的硬标签混合；硬标签权重4。</a:t>
+            </a:r>
+          </a:p>
+          <a:p>
+            <a:r>
+              <a:t>• 中间放大的是CLIP-H骨干内线性层的LoRA适配示意。冻结W，与低秩A、B旁路的更新相加，只更新LoRA与分类头，使用加权BCE训练。</a:t>
+            </a:r>
+          </a:p>
+          <a:p>
+            <a:r>
+              <a:t>• CLIP-H主跑种子20261003训练2轮，三个追加种子20261101/02/03各4轮。不能把主跑与追加分量说成只改种子、训练预算完全相同。</a:t>
+            </a:r>
+          </a:p>
+          <a:p>
+            <a:r>
+              <a:t>• 下方三个监督支路：bigG224两个分量和bigG384一个分量使用Tiny-GenImage 28.8k；SigLIP2使用GenImage++78k，各叠加官方800训练、200验证。</a:t>
+            </a:r>
+          </a:p>
+          <a:p>
+            <a:r>
+              <a:t>• 所有分量冻结骨干并更新LoRA及分类头；图中并行路径是线性层适配示意，不表示在骨干后串接额外LoRA网络。</a:t>
             </a:r>
           </a:p>
           <a:p/>
@@ -1658,12 +1536,12 @@
           </a:p>
           <a:p>
             <a:r>
-              <a:t>下面是监督训练，包括bigG两种输入尺度的三个分量，以及一个SigLIP2分量。它们使用Tiny-GenImage、GenImage++等监督数据，提供不同的视觉线索。</a:t>
-            </a:r>
-          </a:p>
-          <a:p>
-            <a:r>
-              <a:t>训练时，我们冻结骨干，只更新LoRA和分类头，并加入JPEG、水平翻转增强。这样可以减少需要更新的参数，但推理仍要运行完整骨干。两条路径分别补充目标数据的针对性和视觉判断的多样性。下一步，就是把八路输出融合起来。</a:t>
+              <a:t>看中间的放大图：骨干权重冻结，LoRA低秩旁路与它并行，再相加、进入分类头。训练只更新LoRA和分类头，加入JPEG增强；监督支路还使用水平翻转。这样减少了更新参数，推理仍要运行完整骨干。</a:t>
+            </a:r>
+          </a:p>
+          <a:p>
+            <a:r>
+              <a:t>下面是独立监督训练，包括bigG三个分量和SigLIP2，使用Tiny-GenImage、GenImage++，并加入官方八百条训练、两百条验证。两类来源补充目标域针对性和视觉多样性。下一步，把八路输出融合。</a:t>
             </a:r>
           </a:p>
           <a:p/>
@@ -1674,7 +1552,7 @@
           </a:p>
           <a:p>
             <a:r>
-              <a:t>下面把8路输出按三槽公式汇合。</a:t>
+              <a:t>训练得到八个分量后，下一页沿每条箭头看单张图怎样得到最终分数。</a:t>
             </a:r>
           </a:p>
         </p:txBody>
@@ -1686,28 +1564,12 @@
             <a:spLocks noGrp="1"/>
           </p:cNvSpPr>
           <p:nvPr>
-            <p:ph type="sldNum" sz="quarter" idx="10"/>
-          </p:nvPr>
-        </p:nvSpPr>
-        <p:spPr/>
-        <p:txBody>
-          <a:bodyPr/>
-          <a:lstStyle/>
-          <a:p>
-            <a:fld id="{F7021451-1387-4CA6-816F-3879F97B5CBC}" type="slidenum">
-              <a:rPr lang="en-US"/>
-              <a:t>4</a:t>
-            </a:fld>
-            <a:endParaRPr lang="en-US"/>
-          </a:p>
-        </p:txBody>
+            <p:ph type="sldNum" idx="5" sz="quarter"/>
+          </p:nvPr>
+        </p:nvSpPr>
+        <p:spPr/>
       </p:sp>
     </p:spTree>
-    <p:extLst>
-      <p:ext uri="{BB962C8B-B14F-4D97-AF65-F5344CB8AC3E}">
-        <p14:creationId xmlns:p14="http://schemas.microsoft.com/office/powerpoint/2010/main" val="1024086991"/>
-      </p:ext>
-    </p:extLst>
   </p:cSld>
   <p:clrMapOvr>
     <a:masterClrMapping/>
@@ -1716,7 +1578,7 @@
 </file>
 
 <file path=ppt/notesSlides/notesSlide5.xml><?xml version="1.0" encoding="utf-8"?>
-<p:notes xmlns:a="http://schemas.openxmlformats.org/drawingml/2006/main" xmlns:r="http://schemas.openxmlformats.org/officeDocument/2006/relationships" xmlns:p="http://schemas.openxmlformats.org/presentationml/2006/main">
+<p:notes xmlns:a="http://schemas.openxmlformats.org/drawingml/2006/main" xmlns:p="http://schemas.openxmlformats.org/presentationml/2006/main" xmlns:r="http://schemas.openxmlformats.org/officeDocument/2006/relationships">
   <p:cSld>
     <p:spTree>
       <p:nvGrpSpPr>
@@ -1736,10 +1598,10 @@
         <p:nvSpPr>
           <p:cNvPr id="2" name="Slide Image Placeholder 1"/>
           <p:cNvSpPr>
-            <a:spLocks noGrp="1" noRot="1" noChangeAspect="1"/>
-          </p:cNvSpPr>
-          <p:nvPr>
-            <p:ph type="sldImg"/>
+            <a:spLocks noGrp="1"/>
+          </p:cNvSpPr>
+          <p:nvPr>
+            <p:ph type="sldImg" idx="2"/>
           </p:nvPr>
         </p:nvSpPr>
         <p:spPr/>
@@ -1751,7 +1613,7 @@
             <a:spLocks noGrp="1"/>
           </p:cNvSpPr>
           <p:nvPr>
-            <p:ph type="body" idx="1"/>
+            <p:ph type="body" idx="3" sz="quarter"/>
           </p:nvPr>
         </p:nvSpPr>
         <p:spPr/>
@@ -1771,22 +1633,27 @@
           </a:p>
           <a:p>
             <a:r>
-              <a:t>• 先对每个分量做ECDF。主槽包含4路CLIP-H和SigLIP2，五者等权；bigG224两路等权，bigG384独占一槽。</a:t>
-            </a:r>
-          </a:p>
-          <a:p>
-            <a:r>
-              <a:t>• 槽权重为3/4、1/7、3/28。三槽直接求base；base不会再经过中间ECDF。</a:t>
-            </a:r>
-          </a:p>
-          <a:p>
-            <a:r>
-              <a:t>• 尺寸先验由0.4桶ECDF与0.6GBM ECDF混合后再做先验ECDF。z等于0.8base加0.2prior，最后才查询最终ECDF。</a:t>
-            </a:r>
-          </a:p>
-          <a:p>
-            <a:r>
-              <a:t>• 右侧画的是ECDF函数形式，参考表有20,000项。输出为排序百分位，不能直接当已校准概率；尺寸先验依赖分布。</a:t>
+              <a:t>• 从左侧八路输出开始，每个分量各自查固定参考ECDF，将原始分转成同一百分位尺度。</a:t>
+            </a:r>
+          </a:p>
+          <a:p>
+            <a:r>
+              <a:t>• 五条上路进入主槽：四个CLIP-H与一个SigLIP2等权。两条bigG224等权进入第二槽，bigG384单独占第三槽；三槽权重分别3/4、1/7、3/28。</a:t>
+            </a:r>
+          </a:p>
+          <a:p>
+            <a:r>
+              <a:t>• 沿槽右侧的汇合线下到base，直接得到加权和；这里不插入额外base ECDF。左下尺寸先验由0.4桶ECDF与0.6GBM ECDF混合，再做先验ECDF。</a:t>
+            </a:r>
+          </a:p>
+          <a:p>
+            <a:r>
+              <a:t>• 两路在下方融合为z=0.8base+0.2prior，再向右查询最终ECDF，得到单图分数。</a:t>
+            </a:r>
+          </a:p>
+          <a:p>
+            <a:r>
+              <a:t>• 右侧阶梯图仅示意查表函数，不是ROC或新增实验。固定参考表各有20,000项，按并列平均秩处理，F(x)=(lo+hi+1)/(2(N+1))；输出为排序百分位，尺寸先验依赖分布。</a:t>
             </a:r>
           </a:p>
           <a:p/>
@@ -1823,7 +1690,7 @@
           </a:p>
           <a:p>
             <a:r>
-              <a:t>效果页同时看融合AUC与分量的排序差异。</a:t>
+              <a:t>接着用融合AUC与分量间排序差异，分析这些分支的实际作用。</a:t>
             </a:r>
           </a:p>
         </p:txBody>
@@ -1835,28 +1702,12 @@
             <a:spLocks noGrp="1"/>
           </p:cNvSpPr>
           <p:nvPr>
-            <p:ph type="sldNum" sz="quarter" idx="10"/>
-          </p:nvPr>
-        </p:nvSpPr>
-        <p:spPr/>
-        <p:txBody>
-          <a:bodyPr/>
-          <a:lstStyle/>
-          <a:p>
-            <a:fld id="{F7021451-1387-4CA6-816F-3879F97B5CBC}" type="slidenum">
-              <a:rPr lang="en-US"/>
-              <a:t>5</a:t>
-            </a:fld>
-            <a:endParaRPr lang="en-US"/>
-          </a:p>
-        </p:txBody>
+            <p:ph type="sldNum" idx="5" sz="quarter"/>
+          </p:nvPr>
+        </p:nvSpPr>
+        <p:spPr/>
       </p:sp>
     </p:spTree>
-    <p:extLst>
-      <p:ext uri="{BB962C8B-B14F-4D97-AF65-F5344CB8AC3E}">
-        <p14:creationId xmlns:p14="http://schemas.microsoft.com/office/powerpoint/2010/main" val="1024086991"/>
-      </p:ext>
-    </p:extLst>
   </p:cSld>
   <p:clrMapOvr>
     <a:masterClrMapping/>
@@ -1865,7 +1716,7 @@
 </file>
 
 <file path=ppt/notesSlides/notesSlide6.xml><?xml version="1.0" encoding="utf-8"?>
-<p:notes xmlns:a="http://schemas.openxmlformats.org/drawingml/2006/main" xmlns:r="http://schemas.openxmlformats.org/officeDocument/2006/relationships" xmlns:p="http://schemas.openxmlformats.org/presentationml/2006/main">
+<p:notes xmlns:a="http://schemas.openxmlformats.org/drawingml/2006/main" xmlns:p="http://schemas.openxmlformats.org/presentationml/2006/main" xmlns:r="http://schemas.openxmlformats.org/officeDocument/2006/relationships">
   <p:cSld>
     <p:spTree>
       <p:nvGrpSpPr>
@@ -1885,10 +1736,10 @@
         <p:nvSpPr>
           <p:cNvPr id="2" name="Slide Image Placeholder 1"/>
           <p:cNvSpPr>
-            <a:spLocks noGrp="1" noRot="1" noChangeAspect="1"/>
-          </p:cNvSpPr>
-          <p:nvPr>
-            <p:ph type="sldImg"/>
+            <a:spLocks noGrp="1"/>
+          </p:cNvSpPr>
+          <p:nvPr>
+            <p:ph type="sldImg" idx="2"/>
           </p:nvPr>
         </p:nvSpPr>
         <p:spPr/>
@@ -1900,7 +1751,7 @@
             <a:spLocks noGrp="1"/>
           </p:cNvSpPr>
           <p:nvPr>
-            <p:ph type="body" idx="1"/>
+            <p:ph type="body" idx="3" sz="quarter"/>
           </p:nvPr>
         </p:nvSpPr>
         <p:spPr/>
@@ -1974,28 +1825,12 @@
             <a:spLocks noGrp="1"/>
           </p:cNvSpPr>
           <p:nvPr>
-            <p:ph type="sldNum" sz="quarter" idx="10"/>
-          </p:nvPr>
-        </p:nvSpPr>
-        <p:spPr/>
-        <p:txBody>
-          <a:bodyPr/>
-          <a:lstStyle/>
-          <a:p>
-            <a:fld id="{F7021451-1387-4CA6-816F-3879F97B5CBC}" type="slidenum">
-              <a:rPr lang="en-US"/>
-              <a:t>6</a:t>
-            </a:fld>
-            <a:endParaRPr lang="en-US"/>
-          </a:p>
-        </p:txBody>
+            <p:ph type="sldNum" idx="5" sz="quarter"/>
+          </p:nvPr>
+        </p:nvSpPr>
+        <p:spPr/>
       </p:sp>
     </p:spTree>
-    <p:extLst>
-      <p:ext uri="{BB962C8B-B14F-4D97-AF65-F5344CB8AC3E}">
-        <p14:creationId xmlns:p14="http://schemas.microsoft.com/office/powerpoint/2010/main" val="1024086991"/>
-      </p:ext>
-    </p:extLst>
   </p:cSld>
   <p:clrMapOvr>
     <a:masterClrMapping/>
@@ -2004,7 +1839,7 @@
 </file>
 
 <file path=ppt/notesSlides/notesSlide7.xml><?xml version="1.0" encoding="utf-8"?>
-<p:notes xmlns:a="http://schemas.openxmlformats.org/drawingml/2006/main" xmlns:r="http://schemas.openxmlformats.org/officeDocument/2006/relationships" xmlns:p="http://schemas.openxmlformats.org/presentationml/2006/main">
+<p:notes xmlns:a="http://schemas.openxmlformats.org/drawingml/2006/main" xmlns:p="http://schemas.openxmlformats.org/presentationml/2006/main" xmlns:r="http://schemas.openxmlformats.org/officeDocument/2006/relationships">
   <p:cSld>
     <p:spTree>
       <p:nvGrpSpPr>
@@ -2024,10 +1859,10 @@
         <p:nvSpPr>
           <p:cNvPr id="2" name="Slide Image Placeholder 1"/>
           <p:cNvSpPr>
-            <a:spLocks noGrp="1" noRot="1" noChangeAspect="1"/>
-          </p:cNvSpPr>
-          <p:nvPr>
-            <p:ph type="sldImg"/>
+            <a:spLocks noGrp="1"/>
+          </p:cNvSpPr>
+          <p:nvPr>
+            <p:ph type="sldImg" idx="2"/>
           </p:nvPr>
         </p:nvSpPr>
         <p:spPr/>
@@ -2039,7 +1874,7 @@
             <a:spLocks noGrp="1"/>
           </p:cNvSpPr>
           <p:nvPr>
-            <p:ph type="body" idx="1"/>
+            <p:ph type="body" idx="3" sz="quarter"/>
           </p:nvPr>
         </p:nvSpPr>
         <p:spPr/>
@@ -2059,27 +1894,27 @@
           </a:p>
           <a:p>
             <a:r>
-              <a:t>• 教师候选池43个，按家族权重乘成员权重，仅6个带权：robust 0.35；7B官方s2/s3各0.25；4B hidden mean 0.075；qwen pair和4B hidden last各0.0375。public的11个候选有效权重全为0。</a:t>
-            </a:r>
-          </a:p>
-          <a:p>
-            <a:r>
-              <a:t>• 1,000条有标签样例分五折；每折800条训练、200条验证，另加入全量20,000条无标签目标文本。这属于转导自训练，目标集合效果不能直接外推到未见目标域。</a:t>
-            </a:r>
-          </a:p>
-          <a:p>
-            <a:r>
-              <a:t>• r为并列平均秩除以N＋1；软标签y=σ[4(r−0.5)]，理论端点0.119203和0.880797。置信权重w=min(1,4|y−0.5|)，中心0、两端1；饱和阈值0.22534693和0.77465307。这是确定性公式图，权重不是标签正确概率。</a:t>
-            </a:r>
-          </a:p>
-          <a:p>
-            <a:r>
-              <a:t>• 无并列且按连续均匀r近似时，饱和区占45.0694%，平均权重0.73837593；20,000条的权重总和约14767.52，比800×2约9.23倍。它不是统计有效样本量ESS，也不是实测训练收益，因此这些推导只作问答补充。</a:t>
-            </a:r>
-          </a:p>
-          <a:p>
-            <a:r>
-              <a:t>• 验证AUC选择checkpoint，OOF AUC选择融合。闭环表示可迭代方法；未宣称全部最终adapter完整经历相同三轮。旧公共检测器泛化最强说法已被目标集反馈否定，后续主教师public权重为0；不能据候选池数量宣传泛化。</a:t>
+              <a:t>• 从左上沿实线看已确认的v2标签链：mk_pseudo_v2读取上一代submit_v2_p2AD.csv，先排名，再按sigmoid生成软标签。p43默认标签与日志指向v2；后续43候选中六路非零教师属于不同代际，不能直接接到这条标签链。</a:t>
+            </a:r>
+          </a:p>
+          <a:p>
+            <a:r>
+              <a:t>• 每折800条官方硬标签以权重2汇入加权BCE；20,000目标文本的软标签以置信权重w汇入。L=mean(w·BCE)，不是除以权重总和。冻结语言基座，更新LoRA和分类头。</a:t>
+            </a:r>
+          </a:p>
+          <a:p>
+            <a:r>
+              <a:t>• 右侧实线y=σ[4(r−0.5)]，端点约0.1192与0.8808；虚线w=min(1,4|y−0.5|)，中点0，两端饱和到1。图是确定性映射，权重不是标签正确概率。</a:t>
+            </a:r>
+          </a:p>
+          <a:p>
+            <a:r>
+              <a:t>• 学生对每折200条验证样本预测，由验证AUC选checkpoint；五折OOF用于融合选择。这不是新的独立测试集。</a:t>
+            </a:r>
+          </a:p>
+          <a:p>
+            <a:r>
+              <a:t>• 主图表示已确认的14B学生v2链路，不表示所有最终adapter都用同一教师或经历同样轮次。转导训练效果限于已使用的目标集合，未见域需要另测。</a:t>
             </a:r>
           </a:p>
           <a:p/>
@@ -2090,22 +1925,22 @@
           </a:p>
           <a:p>
             <a:r>
-              <a:t>文本侧同样是一千条官方标注，加两万条无标签目标文本。关键是让教师的判断变成可用于训练的信号。</a:t>
-            </a:r>
-          </a:p>
-          <a:p>
-            <a:r>
-              <a:t>请看左侧。最终参与教师融合的有六路：两路七B分类器合计占一半，字符与风格分支占百分之三十五，三路语言特征占百分之十五。教师先给目标文本排序，再用sigmoid函数平滑地转成软标签，范围约零点一二到零点八八。</a:t>
-            </a:r>
-          </a:p>
-          <a:p>
-            <a:r>
-              <a:t>右边两条曲线分别是软标签和训练权重。越接近中间，判断越不确定，训练权重就越低；两端的权重最高为一。官方硬标签权重为二，继续提供真实监督。训练用加权二元交叉熵，让这些权重直接作用到损失上。</a:t>
-            </a:r>
-          </a:p>
-          <a:p>
-            <a:r>
-              <a:t>每折用八百条标注训练、两百条验证，并加入目标文本的软标签。验证AUC用来选模型，折外预测用来选融合。这样既利用了无标签数据，也降低不确定判断的影响，但仍需注意教师错误累积。下面看最终模型。</a:t>
+              <a:t>文本侧同样是一千条官方标注，加两万条无标签目标文本。关键是把已有检测分数变成训练信号。</a:t>
+            </a:r>
+          </a:p>
+          <a:p>
+            <a:r>
+              <a:t>请沿左侧实线看：上一代检测器先给两万条文本打分，分数转成排名，再由sigmoid生成软标签。左侧八百条官方硬标签汇入加权损失，软标签同时带上置信权重。冻结语言基座后，更新LoRA和分类头。</a:t>
+            </a:r>
+          </a:p>
+          <a:p>
+            <a:r>
+              <a:t>右边实线表示软标签，范围约零点一二到零点八八；虚线表示权重，中间最低、两端最高为一。官方硬标签权重为二，提供真实监督。这些权重直接作用到二元交叉熵损失。</a:t>
+            </a:r>
+          </a:p>
+          <a:p>
+            <a:r>
+              <a:t>流程图右侧，中间的每折两百条只用于验证，AUC选择检查点；下方的五折折外预测用于融合选型。这样利用目标域数据，也减少中间样本的监督强度，但不能保证教师错误不会传播。下面看最终模型。</a:t>
             </a:r>
           </a:p>
           <a:p/>
@@ -2128,28 +1963,12 @@
             <a:spLocks noGrp="1"/>
           </p:cNvSpPr>
           <p:nvPr>
-            <p:ph type="sldNum" sz="quarter" idx="10"/>
-          </p:nvPr>
-        </p:nvSpPr>
-        <p:spPr/>
-        <p:txBody>
-          <a:bodyPr/>
-          <a:lstStyle/>
-          <a:p>
-            <a:fld id="{F7021451-1387-4CA6-816F-3879F97B5CBC}" type="slidenum">
-              <a:rPr lang="en-US"/>
-              <a:t>7</a:t>
-            </a:fld>
-            <a:endParaRPr lang="en-US"/>
-          </a:p>
-        </p:txBody>
+            <p:ph type="sldNum" idx="5" sz="quarter"/>
+          </p:nvPr>
+        </p:nvSpPr>
+        <p:spPr/>
       </p:sp>
     </p:spTree>
-    <p:extLst>
-      <p:ext uri="{BB962C8B-B14F-4D97-AF65-F5344CB8AC3E}">
-        <p14:creationId xmlns:p14="http://schemas.microsoft.com/office/powerpoint/2010/main" val="1024086991"/>
-      </p:ext>
-    </p:extLst>
   </p:cSld>
   <p:clrMapOvr>
     <a:masterClrMapping/>
@@ -2158,7 +1977,7 @@
 </file>
 
 <file path=ppt/notesSlides/notesSlide8.xml><?xml version="1.0" encoding="utf-8"?>
-<p:notes xmlns:a="http://schemas.openxmlformats.org/drawingml/2006/main" xmlns:r="http://schemas.openxmlformats.org/officeDocument/2006/relationships" xmlns:p="http://schemas.openxmlformats.org/presentationml/2006/main">
+<p:notes xmlns:a="http://schemas.openxmlformats.org/drawingml/2006/main" xmlns:p="http://schemas.openxmlformats.org/presentationml/2006/main" xmlns:r="http://schemas.openxmlformats.org/officeDocument/2006/relationships">
   <p:cSld>
     <p:spTree>
       <p:nvGrpSpPr>
@@ -2178,10 +1997,10 @@
         <p:nvSpPr>
           <p:cNvPr id="2" name="Slide Image Placeholder 1"/>
           <p:cNvSpPr>
-            <a:spLocks noGrp="1" noRot="1" noChangeAspect="1"/>
-          </p:cNvSpPr>
-          <p:nvPr>
-            <p:ph type="sldImg"/>
+            <a:spLocks noGrp="1"/>
+          </p:cNvSpPr>
+          <p:nvPr>
+            <p:ph type="sldImg" idx="2"/>
           </p:nvPr>
         </p:nvSpPr>
         <p:spPr/>
@@ -2193,7 +2012,7 @@
             <a:spLocks noGrp="1"/>
           </p:cNvSpPr>
           <p:nvPr>
-            <p:ph type="body" idx="1"/>
+            <p:ph type="body" idx="3" sz="quarter"/>
           </p:nvPr>
         </p:nvSpPr>
         <p:spPr/>
@@ -2244,12 +2063,12 @@
           </a:p>
           <a:p>
             <a:r>
-              <a:t>最终方案以Qwen2.5十四B为主、七B为辅。请沿着模型树看：十四B是一组五折，七B是两组五折，加起来是十五个适配器。每折保留一部分官方样例做验证，再汇总验证部分的预测，用于比较和选型。</a:t>
-            </a:r>
-          </a:p>
-          <a:p>
-            <a:r>
-              <a:t>推理时，两个基座保留在内存中，适配器依次切换。十四B运行五次，七B运行十次，最终权重分别是百分之九十和百分之十。</a:t>
+              <a:t>最终方案以Qwen2.5十四B为主、七B为辅。请从模型树上方往下看：两个共享基座，分出三组五折。十四B主分支有五个适配器；七B两个辅助分组各有五个，共十五个。两组七B并不是一次十折验证。</a:t>
+            </a:r>
+          </a:p>
+          <a:p>
+            <a:r>
+              <a:t>推理时，基座常驻，适配器依次切换。十四B运行五次，七B运行十次，底部先分别聚合，再按百分之九十和百分之十汇合。</a:t>
             </a:r>
           </a:p>
           <a:p>
@@ -2277,28 +2096,12 @@
             <a:spLocks noGrp="1"/>
           </p:cNvSpPr>
           <p:nvPr>
-            <p:ph type="sldNum" sz="quarter" idx="10"/>
-          </p:nvPr>
-        </p:nvSpPr>
-        <p:spPr/>
-        <p:txBody>
-          <a:bodyPr/>
-          <a:lstStyle/>
-          <a:p>
-            <a:fld id="{F7021451-1387-4CA6-816F-3879F97B5CBC}" type="slidenum">
-              <a:rPr lang="en-US"/>
-              <a:t>8</a:t>
-            </a:fld>
-            <a:endParaRPr lang="en-US"/>
-          </a:p>
-        </p:txBody>
+            <p:ph type="sldNum" idx="5" sz="quarter"/>
+          </p:nvPr>
+        </p:nvSpPr>
+        <p:spPr/>
       </p:sp>
     </p:spTree>
-    <p:extLst>
-      <p:ext uri="{BB962C8B-B14F-4D97-AF65-F5344CB8AC3E}">
-        <p14:creationId xmlns:p14="http://schemas.microsoft.com/office/powerpoint/2010/main" val="1024086991"/>
-      </p:ext>
-    </p:extLst>
   </p:cSld>
   <p:clrMapOvr>
     <a:masterClrMapping/>
@@ -2307,7 +2110,7 @@
 </file>
 
 <file path=ppt/notesSlides/notesSlide9.xml><?xml version="1.0" encoding="utf-8"?>
-<p:notes xmlns:a="http://schemas.openxmlformats.org/drawingml/2006/main" xmlns:r="http://schemas.openxmlformats.org/officeDocument/2006/relationships" xmlns:p="http://schemas.openxmlformats.org/presentationml/2006/main">
+<p:notes xmlns:a="http://schemas.openxmlformats.org/drawingml/2006/main" xmlns:p="http://schemas.openxmlformats.org/presentationml/2006/main" xmlns:r="http://schemas.openxmlformats.org/officeDocument/2006/relationships">
   <p:cSld>
     <p:spTree>
       <p:nvGrpSpPr>
@@ -2327,10 +2130,10 @@
         <p:nvSpPr>
           <p:cNvPr id="2" name="Slide Image Placeholder 1"/>
           <p:cNvSpPr>
-            <a:spLocks noGrp="1" noRot="1" noChangeAspect="1"/>
-          </p:cNvSpPr>
-          <p:nvPr>
-            <p:ph type="sldImg"/>
+            <a:spLocks noGrp="1"/>
+          </p:cNvSpPr>
+          <p:nvPr>
+            <p:ph type="sldImg" idx="2"/>
           </p:nvPr>
         </p:nvSpPr>
         <p:spPr/>
@@ -2342,7 +2145,7 @@
             <a:spLocks noGrp="1"/>
           </p:cNvSpPr>
           <p:nvPr>
-            <p:ph type="body" idx="1"/>
+            <p:ph type="body" idx="3" sz="quarter"/>
           </p:nvPr>
         </p:nvSpPr>
         <p:spPr/>
@@ -2393,12 +2196,12 @@
           </a:p>
           <a:p>
             <a:r>
-              <a:t>这里有两条计算路径。左边是整批离线检测：各组预测转成排名百分位，七B两组等权组合，再与十四B按九比一融合，最后对整批结果重新排名。</a:t>
-            </a:r>
-          </a:p>
-          <a:p>
-            <a:r>
-              <a:t>右边是在线服务，一次只收到一段文本。它先把十四B的五个logit，也就是模型的原始输出，平均后做sigmoid；七B的十个logit也共同平均，再做一次sigmoid。得到两侧分数后，才按九比一加权。</a:t>
+              <a:t>这里有两条计算路径。左边沿三个rank节点往下看：各组预测先转成排名百分位，再以九成、百分之五、百分之五汇合，最后对整批结果重新排名。</a:t>
+            </a:r>
+          </a:p>
+          <a:p>
+            <a:r>
+              <a:t>右边从顶部输入往下看，在线服务一次只收到一段文本。十四B的五个logit，也就是模型原始输出，先平均，再做sigmoid；七B的十个logit也共同平均，再做一次sigmoid。两侧分数最后才按九比一加权。</a:t>
             </a:r>
           </a:p>
           <a:p>
@@ -2426,28 +2229,12 @@
             <a:spLocks noGrp="1"/>
           </p:cNvSpPr>
           <p:nvPr>
-            <p:ph type="sldNum" sz="quarter" idx="10"/>
-          </p:nvPr>
-        </p:nvSpPr>
-        <p:spPr/>
-        <p:txBody>
-          <a:bodyPr/>
-          <a:lstStyle/>
-          <a:p>
-            <a:fld id="{F7021451-1387-4CA6-816F-3879F97B5CBC}" type="slidenum">
-              <a:rPr lang="en-US"/>
-              <a:t>9</a:t>
-            </a:fld>
-            <a:endParaRPr lang="en-US"/>
-          </a:p>
-        </p:txBody>
+            <p:ph type="sldNum" idx="5" sz="quarter"/>
+          </p:nvPr>
+        </p:nvSpPr>
+        <p:spPr/>
       </p:sp>
     </p:spTree>
-    <p:extLst>
-      <p:ext uri="{BB962C8B-B14F-4D97-AF65-F5344CB8AC3E}">
-        <p14:creationId xmlns:p14="http://schemas.microsoft.com/office/powerpoint/2010/main" val="1024086991"/>
-      </p:ext>
-    </p:extLst>
   </p:cSld>
   <p:clrMapOvr>
     <a:masterClrMapping/>
@@ -2456,8 +2243,2469 @@
 </file>
 
 <file path=ppt/slideLayouts/slideLayout1.xml><?xml version="1.0" encoding="utf-8"?>
-<p:sldLayout xmlns:a="http://schemas.openxmlformats.org/drawingml/2006/main" xmlns:r="http://schemas.openxmlformats.org/officeDocument/2006/relationships" xmlns:p="http://schemas.openxmlformats.org/presentationml/2006/main" preserve="1">
-  <p:cSld name="DEFAULT">
+<p:sldLayout xmlns:a="http://schemas.openxmlformats.org/drawingml/2006/main" xmlns:r="http://schemas.openxmlformats.org/officeDocument/2006/relationships" xmlns:p="http://schemas.openxmlformats.org/presentationml/2006/main" type="title" preserve="1">
+  <p:cSld name="Title Slide">
+    <p:spTree>
+      <p:nvGrpSpPr>
+        <p:cNvPr id="1" name=""/>
+        <p:cNvGrpSpPr/>
+        <p:nvPr/>
+      </p:nvGrpSpPr>
+      <p:grpSpPr>
+        <a:xfrm>
+          <a:off x="0" y="0"/>
+          <a:ext cx="0" cy="0"/>
+          <a:chOff x="0" y="0"/>
+          <a:chExt cx="0" cy="0"/>
+        </a:xfrm>
+      </p:grpSpPr>
+      <p:sp>
+        <p:nvSpPr>
+          <p:cNvPr id="2" name="Title 1"/>
+          <p:cNvSpPr>
+            <a:spLocks noGrp="1"/>
+          </p:cNvSpPr>
+          <p:nvPr>
+            <p:ph type="ctrTitle"/>
+          </p:nvPr>
+        </p:nvSpPr>
+        <p:spPr>
+          <a:xfrm>
+            <a:off x="685800" y="2130425"/>
+            <a:ext cx="7772400" cy="1470025"/>
+          </a:xfrm>
+        </p:spPr>
+        <p:txBody>
+          <a:bodyPr/>
+          <a:lstStyle/>
+          <a:p>
+            <a:r>
+              <a:rPr lang="en-US" smtClean="0"/>
+              <a:t>Click to edit Master title style</a:t>
+            </a:r>
+            <a:endParaRPr lang="en-US"/>
+          </a:p>
+        </p:txBody>
+      </p:sp>
+      <p:sp>
+        <p:nvSpPr>
+          <p:cNvPr id="3" name="Subtitle 2"/>
+          <p:cNvSpPr>
+            <a:spLocks noGrp="1"/>
+          </p:cNvSpPr>
+          <p:nvPr>
+            <p:ph type="subTitle" idx="1"/>
+          </p:nvPr>
+        </p:nvSpPr>
+        <p:spPr>
+          <a:xfrm>
+            <a:off x="1371600" y="3886200"/>
+            <a:ext cx="6400800" cy="1752600"/>
+          </a:xfrm>
+        </p:spPr>
+        <p:txBody>
+          <a:bodyPr/>
+          <a:lstStyle>
+            <a:lvl1pPr marL="0" indent="0" algn="ctr">
+              <a:buNone/>
+              <a:defRPr>
+                <a:solidFill>
+                  <a:schemeClr val="tx1">
+                    <a:tint val="75000"/>
+                  </a:schemeClr>
+                </a:solidFill>
+              </a:defRPr>
+            </a:lvl1pPr>
+            <a:lvl2pPr marL="457200" indent="0" algn="ctr">
+              <a:buNone/>
+              <a:defRPr>
+                <a:solidFill>
+                  <a:schemeClr val="tx1">
+                    <a:tint val="75000"/>
+                  </a:schemeClr>
+                </a:solidFill>
+              </a:defRPr>
+            </a:lvl2pPr>
+            <a:lvl3pPr marL="914400" indent="0" algn="ctr">
+              <a:buNone/>
+              <a:defRPr>
+                <a:solidFill>
+                  <a:schemeClr val="tx1">
+                    <a:tint val="75000"/>
+                  </a:schemeClr>
+                </a:solidFill>
+              </a:defRPr>
+            </a:lvl3pPr>
+            <a:lvl4pPr marL="1371600" indent="0" algn="ctr">
+              <a:buNone/>
+              <a:defRPr>
+                <a:solidFill>
+                  <a:schemeClr val="tx1">
+                    <a:tint val="75000"/>
+                  </a:schemeClr>
+                </a:solidFill>
+              </a:defRPr>
+            </a:lvl4pPr>
+            <a:lvl5pPr marL="1828800" indent="0" algn="ctr">
+              <a:buNone/>
+              <a:defRPr>
+                <a:solidFill>
+                  <a:schemeClr val="tx1">
+                    <a:tint val="75000"/>
+                  </a:schemeClr>
+                </a:solidFill>
+              </a:defRPr>
+            </a:lvl5pPr>
+            <a:lvl6pPr marL="2286000" indent="0" algn="ctr">
+              <a:buNone/>
+              <a:defRPr>
+                <a:solidFill>
+                  <a:schemeClr val="tx1">
+                    <a:tint val="75000"/>
+                  </a:schemeClr>
+                </a:solidFill>
+              </a:defRPr>
+            </a:lvl6pPr>
+            <a:lvl7pPr marL="2743200" indent="0" algn="ctr">
+              <a:buNone/>
+              <a:defRPr>
+                <a:solidFill>
+                  <a:schemeClr val="tx1">
+                    <a:tint val="75000"/>
+                  </a:schemeClr>
+                </a:solidFill>
+              </a:defRPr>
+            </a:lvl7pPr>
+            <a:lvl8pPr marL="3200400" indent="0" algn="ctr">
+              <a:buNone/>
+              <a:defRPr>
+                <a:solidFill>
+                  <a:schemeClr val="tx1">
+                    <a:tint val="75000"/>
+                  </a:schemeClr>
+                </a:solidFill>
+              </a:defRPr>
+            </a:lvl8pPr>
+            <a:lvl9pPr marL="3657600" indent="0" algn="ctr">
+              <a:buNone/>
+              <a:defRPr>
+                <a:solidFill>
+                  <a:schemeClr val="tx1">
+                    <a:tint val="75000"/>
+                  </a:schemeClr>
+                </a:solidFill>
+              </a:defRPr>
+            </a:lvl9pPr>
+          </a:lstStyle>
+          <a:p>
+            <a:r>
+              <a:rPr lang="en-US" smtClean="0"/>
+              <a:t>Click to edit Master subtitle style</a:t>
+            </a:r>
+            <a:endParaRPr lang="en-US"/>
+          </a:p>
+        </p:txBody>
+      </p:sp>
+      <p:sp>
+        <p:nvSpPr>
+          <p:cNvPr id="4" name="Date Placeholder 3"/>
+          <p:cNvSpPr>
+            <a:spLocks noGrp="1"/>
+          </p:cNvSpPr>
+          <p:nvPr>
+            <p:ph type="dt" sz="half" idx="10"/>
+          </p:nvPr>
+        </p:nvSpPr>
+        <p:spPr/>
+        <p:txBody>
+          <a:bodyPr/>
+          <a:lstStyle/>
+          <a:p>
+            <a:fld id="{5BCAD085-E8A6-8845-BD4E-CB4CCA059FC4}" type="datetimeFigureOut">
+              <a:rPr lang="en-US" smtClean="0"/>
+              <a:t>1/27/13</a:t>
+            </a:fld>
+            <a:endParaRPr lang="en-US"/>
+          </a:p>
+        </p:txBody>
+      </p:sp>
+      <p:sp>
+        <p:nvSpPr>
+          <p:cNvPr id="5" name="Footer Placeholder 4"/>
+          <p:cNvSpPr>
+            <a:spLocks noGrp="1"/>
+          </p:cNvSpPr>
+          <p:nvPr>
+            <p:ph type="ftr" sz="quarter" idx="11"/>
+          </p:nvPr>
+        </p:nvSpPr>
+        <p:spPr/>
+        <p:txBody>
+          <a:bodyPr/>
+          <a:lstStyle/>
+          <a:p>
+            <a:endParaRPr lang="en-US"/>
+          </a:p>
+        </p:txBody>
+      </p:sp>
+      <p:sp>
+        <p:nvSpPr>
+          <p:cNvPr id="6" name="Slide Number Placeholder 5"/>
+          <p:cNvSpPr>
+            <a:spLocks noGrp="1"/>
+          </p:cNvSpPr>
+          <p:nvPr>
+            <p:ph type="sldNum" sz="quarter" idx="12"/>
+          </p:nvPr>
+        </p:nvSpPr>
+        <p:spPr/>
+        <p:txBody>
+          <a:bodyPr/>
+          <a:lstStyle/>
+          <a:p>
+            <a:fld id="{C1FF6DA9-008F-8B48-92A6-B652298478BF}" type="slidenum">
+              <a:rPr lang="en-US" smtClean="0"/>
+              <a:t>‹#›</a:t>
+            </a:fld>
+            <a:endParaRPr lang="en-US"/>
+          </a:p>
+        </p:txBody>
+      </p:sp>
+    </p:spTree>
+    <p:extLst>
+      <p:ext uri="{BB962C8B-B14F-4D97-AF65-F5344CB8AC3E}">
+        <p14:creationId xmlns:p14="http://schemas.microsoft.com/office/powerpoint/2010/main" val="3168075583"/>
+      </p:ext>
+    </p:extLst>
+  </p:cSld>
+  <p:clrMapOvr>
+    <a:masterClrMapping/>
+  </p:clrMapOvr>
+</p:sldLayout>
+</file>
+
+<file path=ppt/slideLayouts/slideLayout10.xml><?xml version="1.0" encoding="utf-8"?>
+<p:sldLayout xmlns:a="http://schemas.openxmlformats.org/drawingml/2006/main" xmlns:r="http://schemas.openxmlformats.org/officeDocument/2006/relationships" xmlns:p="http://schemas.openxmlformats.org/presentationml/2006/main" type="vertTx" preserve="1">
+  <p:cSld name="Title and Vertical Text">
+    <p:spTree>
+      <p:nvGrpSpPr>
+        <p:cNvPr id="1" name=""/>
+        <p:cNvGrpSpPr/>
+        <p:nvPr/>
+      </p:nvGrpSpPr>
+      <p:grpSpPr>
+        <a:xfrm>
+          <a:off x="0" y="0"/>
+          <a:ext cx="0" cy="0"/>
+          <a:chOff x="0" y="0"/>
+          <a:chExt cx="0" cy="0"/>
+        </a:xfrm>
+      </p:grpSpPr>
+      <p:sp>
+        <p:nvSpPr>
+          <p:cNvPr id="2" name="Title 1"/>
+          <p:cNvSpPr>
+            <a:spLocks noGrp="1"/>
+          </p:cNvSpPr>
+          <p:nvPr>
+            <p:ph type="title"/>
+          </p:nvPr>
+        </p:nvSpPr>
+        <p:spPr/>
+        <p:txBody>
+          <a:bodyPr/>
+          <a:lstStyle/>
+          <a:p>
+            <a:r>
+              <a:rPr lang="en-US" smtClean="0"/>
+              <a:t>Click to edit Master title style</a:t>
+            </a:r>
+            <a:endParaRPr lang="en-US"/>
+          </a:p>
+        </p:txBody>
+      </p:sp>
+      <p:sp>
+        <p:nvSpPr>
+          <p:cNvPr id="3" name="Vertical Text Placeholder 2"/>
+          <p:cNvSpPr>
+            <a:spLocks noGrp="1"/>
+          </p:cNvSpPr>
+          <p:nvPr>
+            <p:ph type="body" orient="vert" idx="1"/>
+          </p:nvPr>
+        </p:nvSpPr>
+        <p:spPr/>
+        <p:txBody>
+          <a:bodyPr vert="eaVert"/>
+          <a:lstStyle/>
+          <a:p>
+            <a:pPr lvl="0"/>
+            <a:r>
+              <a:rPr lang="en-US" smtClean="0"/>
+              <a:t>Click to edit Master text styles</a:t>
+            </a:r>
+          </a:p>
+          <a:p>
+            <a:pPr lvl="1"/>
+            <a:r>
+              <a:rPr lang="en-US" smtClean="0"/>
+              <a:t>Second level</a:t>
+            </a:r>
+          </a:p>
+          <a:p>
+            <a:pPr lvl="2"/>
+            <a:r>
+              <a:rPr lang="en-US" smtClean="0"/>
+              <a:t>Third level</a:t>
+            </a:r>
+          </a:p>
+          <a:p>
+            <a:pPr lvl="3"/>
+            <a:r>
+              <a:rPr lang="en-US" smtClean="0"/>
+              <a:t>Fourth level</a:t>
+            </a:r>
+          </a:p>
+          <a:p>
+            <a:pPr lvl="4"/>
+            <a:r>
+              <a:rPr lang="en-US" smtClean="0"/>
+              <a:t>Fifth level</a:t>
+            </a:r>
+            <a:endParaRPr lang="en-US"/>
+          </a:p>
+        </p:txBody>
+      </p:sp>
+      <p:sp>
+        <p:nvSpPr>
+          <p:cNvPr id="4" name="Date Placeholder 3"/>
+          <p:cNvSpPr>
+            <a:spLocks noGrp="1"/>
+          </p:cNvSpPr>
+          <p:nvPr>
+            <p:ph type="dt" sz="half" idx="10"/>
+          </p:nvPr>
+        </p:nvSpPr>
+        <p:spPr/>
+        <p:txBody>
+          <a:bodyPr/>
+          <a:lstStyle/>
+          <a:p>
+            <a:fld id="{5BCAD085-E8A6-8845-BD4E-CB4CCA059FC4}" type="datetimeFigureOut">
+              <a:rPr lang="en-US" smtClean="0"/>
+              <a:t>1/27/13</a:t>
+            </a:fld>
+            <a:endParaRPr lang="en-US"/>
+          </a:p>
+        </p:txBody>
+      </p:sp>
+      <p:sp>
+        <p:nvSpPr>
+          <p:cNvPr id="5" name="Footer Placeholder 4"/>
+          <p:cNvSpPr>
+            <a:spLocks noGrp="1"/>
+          </p:cNvSpPr>
+          <p:nvPr>
+            <p:ph type="ftr" sz="quarter" idx="11"/>
+          </p:nvPr>
+        </p:nvSpPr>
+        <p:spPr/>
+        <p:txBody>
+          <a:bodyPr/>
+          <a:lstStyle/>
+          <a:p>
+            <a:endParaRPr lang="en-US"/>
+          </a:p>
+        </p:txBody>
+      </p:sp>
+      <p:sp>
+        <p:nvSpPr>
+          <p:cNvPr id="6" name="Slide Number Placeholder 5"/>
+          <p:cNvSpPr>
+            <a:spLocks noGrp="1"/>
+          </p:cNvSpPr>
+          <p:nvPr>
+            <p:ph type="sldNum" sz="quarter" idx="12"/>
+          </p:nvPr>
+        </p:nvSpPr>
+        <p:spPr/>
+        <p:txBody>
+          <a:bodyPr/>
+          <a:lstStyle/>
+          <a:p>
+            <a:fld id="{C1FF6DA9-008F-8B48-92A6-B652298478BF}" type="slidenum">
+              <a:rPr lang="en-US" smtClean="0"/>
+              <a:t>‹#›</a:t>
+            </a:fld>
+            <a:endParaRPr lang="en-US"/>
+          </a:p>
+        </p:txBody>
+      </p:sp>
+    </p:spTree>
+    <p:extLst>
+      <p:ext uri="{BB962C8B-B14F-4D97-AF65-F5344CB8AC3E}">
+        <p14:creationId xmlns:p14="http://schemas.microsoft.com/office/powerpoint/2010/main" val="2910927964"/>
+      </p:ext>
+    </p:extLst>
+  </p:cSld>
+  <p:clrMapOvr>
+    <a:masterClrMapping/>
+  </p:clrMapOvr>
+</p:sldLayout>
+</file>
+
+<file path=ppt/slideLayouts/slideLayout11.xml><?xml version="1.0" encoding="utf-8"?>
+<p:sldLayout xmlns:a="http://schemas.openxmlformats.org/drawingml/2006/main" xmlns:r="http://schemas.openxmlformats.org/officeDocument/2006/relationships" xmlns:p="http://schemas.openxmlformats.org/presentationml/2006/main" type="vertTitleAndTx" preserve="1">
+  <p:cSld name="Vertical Title and Text">
+    <p:spTree>
+      <p:nvGrpSpPr>
+        <p:cNvPr id="1" name=""/>
+        <p:cNvGrpSpPr/>
+        <p:nvPr/>
+      </p:nvGrpSpPr>
+      <p:grpSpPr>
+        <a:xfrm>
+          <a:off x="0" y="0"/>
+          <a:ext cx="0" cy="0"/>
+          <a:chOff x="0" y="0"/>
+          <a:chExt cx="0" cy="0"/>
+        </a:xfrm>
+      </p:grpSpPr>
+      <p:sp>
+        <p:nvSpPr>
+          <p:cNvPr id="2" name="Vertical Title 1"/>
+          <p:cNvSpPr>
+            <a:spLocks noGrp="1"/>
+          </p:cNvSpPr>
+          <p:nvPr>
+            <p:ph type="title" orient="vert"/>
+          </p:nvPr>
+        </p:nvSpPr>
+        <p:spPr>
+          <a:xfrm>
+            <a:off x="6629400" y="274638"/>
+            <a:ext cx="2057400" cy="5851525"/>
+          </a:xfrm>
+        </p:spPr>
+        <p:txBody>
+          <a:bodyPr vert="eaVert"/>
+          <a:lstStyle/>
+          <a:p>
+            <a:r>
+              <a:rPr lang="en-US" smtClean="0"/>
+              <a:t>Click to edit Master title style</a:t>
+            </a:r>
+            <a:endParaRPr lang="en-US"/>
+          </a:p>
+        </p:txBody>
+      </p:sp>
+      <p:sp>
+        <p:nvSpPr>
+          <p:cNvPr id="3" name="Vertical Text Placeholder 2"/>
+          <p:cNvSpPr>
+            <a:spLocks noGrp="1"/>
+          </p:cNvSpPr>
+          <p:nvPr>
+            <p:ph type="body" orient="vert" idx="1"/>
+          </p:nvPr>
+        </p:nvSpPr>
+        <p:spPr>
+          <a:xfrm>
+            <a:off x="457200" y="274638"/>
+            <a:ext cx="6019800" cy="5851525"/>
+          </a:xfrm>
+        </p:spPr>
+        <p:txBody>
+          <a:bodyPr vert="eaVert"/>
+          <a:lstStyle/>
+          <a:p>
+            <a:pPr lvl="0"/>
+            <a:r>
+              <a:rPr lang="en-US" smtClean="0"/>
+              <a:t>Click to edit Master text styles</a:t>
+            </a:r>
+          </a:p>
+          <a:p>
+            <a:pPr lvl="1"/>
+            <a:r>
+              <a:rPr lang="en-US" smtClean="0"/>
+              <a:t>Second level</a:t>
+            </a:r>
+          </a:p>
+          <a:p>
+            <a:pPr lvl="2"/>
+            <a:r>
+              <a:rPr lang="en-US" smtClean="0"/>
+              <a:t>Third level</a:t>
+            </a:r>
+          </a:p>
+          <a:p>
+            <a:pPr lvl="3"/>
+            <a:r>
+              <a:rPr lang="en-US" smtClean="0"/>
+              <a:t>Fourth level</a:t>
+            </a:r>
+          </a:p>
+          <a:p>
+            <a:pPr lvl="4"/>
+            <a:r>
+              <a:rPr lang="en-US" smtClean="0"/>
+              <a:t>Fifth level</a:t>
+            </a:r>
+            <a:endParaRPr lang="en-US"/>
+          </a:p>
+        </p:txBody>
+      </p:sp>
+      <p:sp>
+        <p:nvSpPr>
+          <p:cNvPr id="4" name="Date Placeholder 3"/>
+          <p:cNvSpPr>
+            <a:spLocks noGrp="1"/>
+          </p:cNvSpPr>
+          <p:nvPr>
+            <p:ph type="dt" sz="half" idx="10"/>
+          </p:nvPr>
+        </p:nvSpPr>
+        <p:spPr/>
+        <p:txBody>
+          <a:bodyPr/>
+          <a:lstStyle/>
+          <a:p>
+            <a:fld id="{5BCAD085-E8A6-8845-BD4E-CB4CCA059FC4}" type="datetimeFigureOut">
+              <a:rPr lang="en-US" smtClean="0"/>
+              <a:t>1/27/13</a:t>
+            </a:fld>
+            <a:endParaRPr lang="en-US"/>
+          </a:p>
+        </p:txBody>
+      </p:sp>
+      <p:sp>
+        <p:nvSpPr>
+          <p:cNvPr id="5" name="Footer Placeholder 4"/>
+          <p:cNvSpPr>
+            <a:spLocks noGrp="1"/>
+          </p:cNvSpPr>
+          <p:nvPr>
+            <p:ph type="ftr" sz="quarter" idx="11"/>
+          </p:nvPr>
+        </p:nvSpPr>
+        <p:spPr/>
+        <p:txBody>
+          <a:bodyPr/>
+          <a:lstStyle/>
+          <a:p>
+            <a:endParaRPr lang="en-US"/>
+          </a:p>
+        </p:txBody>
+      </p:sp>
+      <p:sp>
+        <p:nvSpPr>
+          <p:cNvPr id="6" name="Slide Number Placeholder 5"/>
+          <p:cNvSpPr>
+            <a:spLocks noGrp="1"/>
+          </p:cNvSpPr>
+          <p:nvPr>
+            <p:ph type="sldNum" sz="quarter" idx="12"/>
+          </p:nvPr>
+        </p:nvSpPr>
+        <p:spPr/>
+        <p:txBody>
+          <a:bodyPr/>
+          <a:lstStyle/>
+          <a:p>
+            <a:fld id="{C1FF6DA9-008F-8B48-92A6-B652298478BF}" type="slidenum">
+              <a:rPr lang="en-US" smtClean="0"/>
+              <a:t>‹#›</a:t>
+            </a:fld>
+            <a:endParaRPr lang="en-US"/>
+          </a:p>
+        </p:txBody>
+      </p:sp>
+    </p:spTree>
+    <p:extLst>
+      <p:ext uri="{BB962C8B-B14F-4D97-AF65-F5344CB8AC3E}">
+        <p14:creationId xmlns:p14="http://schemas.microsoft.com/office/powerpoint/2010/main" val="3612223792"/>
+      </p:ext>
+    </p:extLst>
+  </p:cSld>
+  <p:clrMapOvr>
+    <a:masterClrMapping/>
+  </p:clrMapOvr>
+</p:sldLayout>
+</file>
+
+<file path=ppt/slideLayouts/slideLayout2.xml><?xml version="1.0" encoding="utf-8"?>
+<p:sldLayout xmlns:a="http://schemas.openxmlformats.org/drawingml/2006/main" xmlns:r="http://schemas.openxmlformats.org/officeDocument/2006/relationships" xmlns:p="http://schemas.openxmlformats.org/presentationml/2006/main" type="obj" preserve="1">
+  <p:cSld name="Title and Content">
+    <p:spTree>
+      <p:nvGrpSpPr>
+        <p:cNvPr id="1" name=""/>
+        <p:cNvGrpSpPr/>
+        <p:nvPr/>
+      </p:nvGrpSpPr>
+      <p:grpSpPr>
+        <a:xfrm>
+          <a:off x="0" y="0"/>
+          <a:ext cx="0" cy="0"/>
+          <a:chOff x="0" y="0"/>
+          <a:chExt cx="0" cy="0"/>
+        </a:xfrm>
+      </p:grpSpPr>
+      <p:sp>
+        <p:nvSpPr>
+          <p:cNvPr id="2" name="Title 1"/>
+          <p:cNvSpPr>
+            <a:spLocks noGrp="1"/>
+          </p:cNvSpPr>
+          <p:nvPr>
+            <p:ph type="title"/>
+          </p:nvPr>
+        </p:nvSpPr>
+        <p:spPr/>
+        <p:txBody>
+          <a:bodyPr/>
+          <a:lstStyle/>
+          <a:p>
+            <a:r>
+              <a:rPr lang="en-US" smtClean="0"/>
+              <a:t>Click to edit Master title style</a:t>
+            </a:r>
+            <a:endParaRPr lang="en-US"/>
+          </a:p>
+        </p:txBody>
+      </p:sp>
+      <p:sp>
+        <p:nvSpPr>
+          <p:cNvPr id="3" name="Content Placeholder 2"/>
+          <p:cNvSpPr>
+            <a:spLocks noGrp="1"/>
+          </p:cNvSpPr>
+          <p:nvPr>
+            <p:ph idx="1"/>
+          </p:nvPr>
+        </p:nvSpPr>
+        <p:spPr/>
+        <p:txBody>
+          <a:bodyPr/>
+          <a:lstStyle/>
+          <a:p>
+            <a:pPr lvl="0"/>
+            <a:r>
+              <a:rPr lang="en-US" smtClean="0"/>
+              <a:t>Click to edit Master text styles</a:t>
+            </a:r>
+          </a:p>
+          <a:p>
+            <a:pPr lvl="1"/>
+            <a:r>
+              <a:rPr lang="en-US" smtClean="0"/>
+              <a:t>Second level</a:t>
+            </a:r>
+          </a:p>
+          <a:p>
+            <a:pPr lvl="2"/>
+            <a:r>
+              <a:rPr lang="en-US" smtClean="0"/>
+              <a:t>Third level</a:t>
+            </a:r>
+          </a:p>
+          <a:p>
+            <a:pPr lvl="3"/>
+            <a:r>
+              <a:rPr lang="en-US" smtClean="0"/>
+              <a:t>Fourth level</a:t>
+            </a:r>
+          </a:p>
+          <a:p>
+            <a:pPr lvl="4"/>
+            <a:r>
+              <a:rPr lang="en-US" smtClean="0"/>
+              <a:t>Fifth level</a:t>
+            </a:r>
+            <a:endParaRPr lang="en-US"/>
+          </a:p>
+        </p:txBody>
+      </p:sp>
+      <p:sp>
+        <p:nvSpPr>
+          <p:cNvPr id="4" name="Date Placeholder 3"/>
+          <p:cNvSpPr>
+            <a:spLocks noGrp="1"/>
+          </p:cNvSpPr>
+          <p:nvPr>
+            <p:ph type="dt" sz="half" idx="10"/>
+          </p:nvPr>
+        </p:nvSpPr>
+        <p:spPr/>
+        <p:txBody>
+          <a:bodyPr/>
+          <a:lstStyle/>
+          <a:p>
+            <a:fld id="{5BCAD085-E8A6-8845-BD4E-CB4CCA059FC4}" type="datetimeFigureOut">
+              <a:rPr lang="en-US" smtClean="0"/>
+              <a:t>1/27/13</a:t>
+            </a:fld>
+            <a:endParaRPr lang="en-US"/>
+          </a:p>
+        </p:txBody>
+      </p:sp>
+      <p:sp>
+        <p:nvSpPr>
+          <p:cNvPr id="5" name="Footer Placeholder 4"/>
+          <p:cNvSpPr>
+            <a:spLocks noGrp="1"/>
+          </p:cNvSpPr>
+          <p:nvPr>
+            <p:ph type="ftr" sz="quarter" idx="11"/>
+          </p:nvPr>
+        </p:nvSpPr>
+        <p:spPr/>
+        <p:txBody>
+          <a:bodyPr/>
+          <a:lstStyle/>
+          <a:p>
+            <a:endParaRPr lang="en-US"/>
+          </a:p>
+        </p:txBody>
+      </p:sp>
+      <p:sp>
+        <p:nvSpPr>
+          <p:cNvPr id="6" name="Slide Number Placeholder 5"/>
+          <p:cNvSpPr>
+            <a:spLocks noGrp="1"/>
+          </p:cNvSpPr>
+          <p:nvPr>
+            <p:ph type="sldNum" sz="quarter" idx="12"/>
+          </p:nvPr>
+        </p:nvSpPr>
+        <p:spPr/>
+        <p:txBody>
+          <a:bodyPr/>
+          <a:lstStyle/>
+          <a:p>
+            <a:fld id="{C1FF6DA9-008F-8B48-92A6-B652298478BF}" type="slidenum">
+              <a:rPr lang="en-US" smtClean="0"/>
+              <a:t>‹#›</a:t>
+            </a:fld>
+            <a:endParaRPr lang="en-US"/>
+          </a:p>
+        </p:txBody>
+      </p:sp>
+    </p:spTree>
+    <p:extLst>
+      <p:ext uri="{BB962C8B-B14F-4D97-AF65-F5344CB8AC3E}">
+        <p14:creationId xmlns:p14="http://schemas.microsoft.com/office/powerpoint/2010/main" val="2614314258"/>
+      </p:ext>
+    </p:extLst>
+  </p:cSld>
+  <p:clrMapOvr>
+    <a:masterClrMapping/>
+  </p:clrMapOvr>
+</p:sldLayout>
+</file>
+
+<file path=ppt/slideLayouts/slideLayout3.xml><?xml version="1.0" encoding="utf-8"?>
+<p:sldLayout xmlns:a="http://schemas.openxmlformats.org/drawingml/2006/main" xmlns:r="http://schemas.openxmlformats.org/officeDocument/2006/relationships" xmlns:p="http://schemas.openxmlformats.org/presentationml/2006/main" type="secHead" preserve="1">
+  <p:cSld name="Section Header">
+    <p:spTree>
+      <p:nvGrpSpPr>
+        <p:cNvPr id="1" name=""/>
+        <p:cNvGrpSpPr/>
+        <p:nvPr/>
+      </p:nvGrpSpPr>
+      <p:grpSpPr>
+        <a:xfrm>
+          <a:off x="0" y="0"/>
+          <a:ext cx="0" cy="0"/>
+          <a:chOff x="0" y="0"/>
+          <a:chExt cx="0" cy="0"/>
+        </a:xfrm>
+      </p:grpSpPr>
+      <p:sp>
+        <p:nvSpPr>
+          <p:cNvPr id="2" name="Title 1"/>
+          <p:cNvSpPr>
+            <a:spLocks noGrp="1"/>
+          </p:cNvSpPr>
+          <p:nvPr>
+            <p:ph type="title"/>
+          </p:nvPr>
+        </p:nvSpPr>
+        <p:spPr>
+          <a:xfrm>
+            <a:off x="722313" y="4406900"/>
+            <a:ext cx="7772400" cy="1362075"/>
+          </a:xfrm>
+        </p:spPr>
+        <p:txBody>
+          <a:bodyPr anchor="t"/>
+          <a:lstStyle>
+            <a:lvl1pPr algn="l">
+              <a:defRPr sz="4000" b="1" cap="all"/>
+            </a:lvl1pPr>
+          </a:lstStyle>
+          <a:p>
+            <a:r>
+              <a:rPr lang="en-US" smtClean="0"/>
+              <a:t>Click to edit Master title style</a:t>
+            </a:r>
+            <a:endParaRPr lang="en-US"/>
+          </a:p>
+        </p:txBody>
+      </p:sp>
+      <p:sp>
+        <p:nvSpPr>
+          <p:cNvPr id="3" name="Text Placeholder 2"/>
+          <p:cNvSpPr>
+            <a:spLocks noGrp="1"/>
+          </p:cNvSpPr>
+          <p:nvPr>
+            <p:ph type="body" idx="1"/>
+          </p:nvPr>
+        </p:nvSpPr>
+        <p:spPr>
+          <a:xfrm>
+            <a:off x="722313" y="2906713"/>
+            <a:ext cx="7772400" cy="1500187"/>
+          </a:xfrm>
+        </p:spPr>
+        <p:txBody>
+          <a:bodyPr anchor="b"/>
+          <a:lstStyle>
+            <a:lvl1pPr marL="0" indent="0">
+              <a:buNone/>
+              <a:defRPr sz="2000">
+                <a:solidFill>
+                  <a:schemeClr val="tx1">
+                    <a:tint val="75000"/>
+                  </a:schemeClr>
+                </a:solidFill>
+              </a:defRPr>
+            </a:lvl1pPr>
+            <a:lvl2pPr marL="457200" indent="0">
+              <a:buNone/>
+              <a:defRPr sz="1800">
+                <a:solidFill>
+                  <a:schemeClr val="tx1">
+                    <a:tint val="75000"/>
+                  </a:schemeClr>
+                </a:solidFill>
+              </a:defRPr>
+            </a:lvl2pPr>
+            <a:lvl3pPr marL="914400" indent="0">
+              <a:buNone/>
+              <a:defRPr sz="1600">
+                <a:solidFill>
+                  <a:schemeClr val="tx1">
+                    <a:tint val="75000"/>
+                  </a:schemeClr>
+                </a:solidFill>
+              </a:defRPr>
+            </a:lvl3pPr>
+            <a:lvl4pPr marL="1371600" indent="0">
+              <a:buNone/>
+              <a:defRPr sz="1400">
+                <a:solidFill>
+                  <a:schemeClr val="tx1">
+                    <a:tint val="75000"/>
+                  </a:schemeClr>
+                </a:solidFill>
+              </a:defRPr>
+            </a:lvl4pPr>
+            <a:lvl5pPr marL="1828800" indent="0">
+              <a:buNone/>
+              <a:defRPr sz="1400">
+                <a:solidFill>
+                  <a:schemeClr val="tx1">
+                    <a:tint val="75000"/>
+                  </a:schemeClr>
+                </a:solidFill>
+              </a:defRPr>
+            </a:lvl5pPr>
+            <a:lvl6pPr marL="2286000" indent="0">
+              <a:buNone/>
+              <a:defRPr sz="1400">
+                <a:solidFill>
+                  <a:schemeClr val="tx1">
+                    <a:tint val="75000"/>
+                  </a:schemeClr>
+                </a:solidFill>
+              </a:defRPr>
+            </a:lvl6pPr>
+            <a:lvl7pPr marL="2743200" indent="0">
+              <a:buNone/>
+              <a:defRPr sz="1400">
+                <a:solidFill>
+                  <a:schemeClr val="tx1">
+                    <a:tint val="75000"/>
+                  </a:schemeClr>
+                </a:solidFill>
+              </a:defRPr>
+            </a:lvl7pPr>
+            <a:lvl8pPr marL="3200400" indent="0">
+              <a:buNone/>
+              <a:defRPr sz="1400">
+                <a:solidFill>
+                  <a:schemeClr val="tx1">
+                    <a:tint val="75000"/>
+                  </a:schemeClr>
+                </a:solidFill>
+              </a:defRPr>
+            </a:lvl8pPr>
+            <a:lvl9pPr marL="3657600" indent="0">
+              <a:buNone/>
+              <a:defRPr sz="1400">
+                <a:solidFill>
+                  <a:schemeClr val="tx1">
+                    <a:tint val="75000"/>
+                  </a:schemeClr>
+                </a:solidFill>
+              </a:defRPr>
+            </a:lvl9pPr>
+          </a:lstStyle>
+          <a:p>
+            <a:pPr lvl="0"/>
+            <a:r>
+              <a:rPr lang="en-US" smtClean="0"/>
+              <a:t>Click to edit Master text styles</a:t>
+            </a:r>
+          </a:p>
+        </p:txBody>
+      </p:sp>
+      <p:sp>
+        <p:nvSpPr>
+          <p:cNvPr id="4" name="Date Placeholder 3"/>
+          <p:cNvSpPr>
+            <a:spLocks noGrp="1"/>
+          </p:cNvSpPr>
+          <p:nvPr>
+            <p:ph type="dt" sz="half" idx="10"/>
+          </p:nvPr>
+        </p:nvSpPr>
+        <p:spPr/>
+        <p:txBody>
+          <a:bodyPr/>
+          <a:lstStyle/>
+          <a:p>
+            <a:fld id="{5BCAD085-E8A6-8845-BD4E-CB4CCA059FC4}" type="datetimeFigureOut">
+              <a:rPr lang="en-US" smtClean="0"/>
+              <a:t>1/27/13</a:t>
+            </a:fld>
+            <a:endParaRPr lang="en-US"/>
+          </a:p>
+        </p:txBody>
+      </p:sp>
+      <p:sp>
+        <p:nvSpPr>
+          <p:cNvPr id="5" name="Footer Placeholder 4"/>
+          <p:cNvSpPr>
+            <a:spLocks noGrp="1"/>
+          </p:cNvSpPr>
+          <p:nvPr>
+            <p:ph type="ftr" sz="quarter" idx="11"/>
+          </p:nvPr>
+        </p:nvSpPr>
+        <p:spPr/>
+        <p:txBody>
+          <a:bodyPr/>
+          <a:lstStyle/>
+          <a:p>
+            <a:endParaRPr lang="en-US"/>
+          </a:p>
+        </p:txBody>
+      </p:sp>
+      <p:sp>
+        <p:nvSpPr>
+          <p:cNvPr id="6" name="Slide Number Placeholder 5"/>
+          <p:cNvSpPr>
+            <a:spLocks noGrp="1"/>
+          </p:cNvSpPr>
+          <p:nvPr>
+            <p:ph type="sldNum" sz="quarter" idx="12"/>
+          </p:nvPr>
+        </p:nvSpPr>
+        <p:spPr/>
+        <p:txBody>
+          <a:bodyPr/>
+          <a:lstStyle/>
+          <a:p>
+            <a:fld id="{C1FF6DA9-008F-8B48-92A6-B652298478BF}" type="slidenum">
+              <a:rPr lang="en-US" smtClean="0"/>
+              <a:t>‹#›</a:t>
+            </a:fld>
+            <a:endParaRPr lang="en-US"/>
+          </a:p>
+        </p:txBody>
+      </p:sp>
+    </p:spTree>
+    <p:extLst>
+      <p:ext uri="{BB962C8B-B14F-4D97-AF65-F5344CB8AC3E}">
+        <p14:creationId xmlns:p14="http://schemas.microsoft.com/office/powerpoint/2010/main" val="960648375"/>
+      </p:ext>
+    </p:extLst>
+  </p:cSld>
+  <p:clrMapOvr>
+    <a:masterClrMapping/>
+  </p:clrMapOvr>
+</p:sldLayout>
+</file>
+
+<file path=ppt/slideLayouts/slideLayout4.xml><?xml version="1.0" encoding="utf-8"?>
+<p:sldLayout xmlns:a="http://schemas.openxmlformats.org/drawingml/2006/main" xmlns:r="http://schemas.openxmlformats.org/officeDocument/2006/relationships" xmlns:p="http://schemas.openxmlformats.org/presentationml/2006/main" type="twoObj" preserve="1">
+  <p:cSld name="Two Content">
+    <p:spTree>
+      <p:nvGrpSpPr>
+        <p:cNvPr id="1" name=""/>
+        <p:cNvGrpSpPr/>
+        <p:nvPr/>
+      </p:nvGrpSpPr>
+      <p:grpSpPr>
+        <a:xfrm>
+          <a:off x="0" y="0"/>
+          <a:ext cx="0" cy="0"/>
+          <a:chOff x="0" y="0"/>
+          <a:chExt cx="0" cy="0"/>
+        </a:xfrm>
+      </p:grpSpPr>
+      <p:sp>
+        <p:nvSpPr>
+          <p:cNvPr id="2" name="Title 1"/>
+          <p:cNvSpPr>
+            <a:spLocks noGrp="1"/>
+          </p:cNvSpPr>
+          <p:nvPr>
+            <p:ph type="title"/>
+          </p:nvPr>
+        </p:nvSpPr>
+        <p:spPr/>
+        <p:txBody>
+          <a:bodyPr/>
+          <a:lstStyle/>
+          <a:p>
+            <a:r>
+              <a:rPr lang="en-US" smtClean="0"/>
+              <a:t>Click to edit Master title style</a:t>
+            </a:r>
+            <a:endParaRPr lang="en-US"/>
+          </a:p>
+        </p:txBody>
+      </p:sp>
+      <p:sp>
+        <p:nvSpPr>
+          <p:cNvPr id="3" name="Content Placeholder 2"/>
+          <p:cNvSpPr>
+            <a:spLocks noGrp="1"/>
+          </p:cNvSpPr>
+          <p:nvPr>
+            <p:ph sz="half" idx="1"/>
+          </p:nvPr>
+        </p:nvSpPr>
+        <p:spPr>
+          <a:xfrm>
+            <a:off x="457200" y="1600200"/>
+            <a:ext cx="4038600" cy="4525963"/>
+          </a:xfrm>
+        </p:spPr>
+        <p:txBody>
+          <a:bodyPr/>
+          <a:lstStyle>
+            <a:lvl1pPr>
+              <a:defRPr sz="2800"/>
+            </a:lvl1pPr>
+            <a:lvl2pPr>
+              <a:defRPr sz="2400"/>
+            </a:lvl2pPr>
+            <a:lvl3pPr>
+              <a:defRPr sz="2000"/>
+            </a:lvl3pPr>
+            <a:lvl4pPr>
+              <a:defRPr sz="1800"/>
+            </a:lvl4pPr>
+            <a:lvl5pPr>
+              <a:defRPr sz="1800"/>
+            </a:lvl5pPr>
+            <a:lvl6pPr>
+              <a:defRPr sz="1800"/>
+            </a:lvl6pPr>
+            <a:lvl7pPr>
+              <a:defRPr sz="1800"/>
+            </a:lvl7pPr>
+            <a:lvl8pPr>
+              <a:defRPr sz="1800"/>
+            </a:lvl8pPr>
+            <a:lvl9pPr>
+              <a:defRPr sz="1800"/>
+            </a:lvl9pPr>
+          </a:lstStyle>
+          <a:p>
+            <a:pPr lvl="0"/>
+            <a:r>
+              <a:rPr lang="en-US" smtClean="0"/>
+              <a:t>Click to edit Master text styles</a:t>
+            </a:r>
+          </a:p>
+          <a:p>
+            <a:pPr lvl="1"/>
+            <a:r>
+              <a:rPr lang="en-US" smtClean="0"/>
+              <a:t>Second level</a:t>
+            </a:r>
+          </a:p>
+          <a:p>
+            <a:pPr lvl="2"/>
+            <a:r>
+              <a:rPr lang="en-US" smtClean="0"/>
+              <a:t>Third level</a:t>
+            </a:r>
+          </a:p>
+          <a:p>
+            <a:pPr lvl="3"/>
+            <a:r>
+              <a:rPr lang="en-US" smtClean="0"/>
+              <a:t>Fourth level</a:t>
+            </a:r>
+          </a:p>
+          <a:p>
+            <a:pPr lvl="4"/>
+            <a:r>
+              <a:rPr lang="en-US" smtClean="0"/>
+              <a:t>Fifth level</a:t>
+            </a:r>
+            <a:endParaRPr lang="en-US"/>
+          </a:p>
+        </p:txBody>
+      </p:sp>
+      <p:sp>
+        <p:nvSpPr>
+          <p:cNvPr id="4" name="Content Placeholder 3"/>
+          <p:cNvSpPr>
+            <a:spLocks noGrp="1"/>
+          </p:cNvSpPr>
+          <p:nvPr>
+            <p:ph sz="half" idx="2"/>
+          </p:nvPr>
+        </p:nvSpPr>
+        <p:spPr>
+          <a:xfrm>
+            <a:off x="4648200" y="1600200"/>
+            <a:ext cx="4038600" cy="4525963"/>
+          </a:xfrm>
+        </p:spPr>
+        <p:txBody>
+          <a:bodyPr/>
+          <a:lstStyle>
+            <a:lvl1pPr>
+              <a:defRPr sz="2800"/>
+            </a:lvl1pPr>
+            <a:lvl2pPr>
+              <a:defRPr sz="2400"/>
+            </a:lvl2pPr>
+            <a:lvl3pPr>
+              <a:defRPr sz="2000"/>
+            </a:lvl3pPr>
+            <a:lvl4pPr>
+              <a:defRPr sz="1800"/>
+            </a:lvl4pPr>
+            <a:lvl5pPr>
+              <a:defRPr sz="1800"/>
+            </a:lvl5pPr>
+            <a:lvl6pPr>
+              <a:defRPr sz="1800"/>
+            </a:lvl6pPr>
+            <a:lvl7pPr>
+              <a:defRPr sz="1800"/>
+            </a:lvl7pPr>
+            <a:lvl8pPr>
+              <a:defRPr sz="1800"/>
+            </a:lvl8pPr>
+            <a:lvl9pPr>
+              <a:defRPr sz="1800"/>
+            </a:lvl9pPr>
+          </a:lstStyle>
+          <a:p>
+            <a:pPr lvl="0"/>
+            <a:r>
+              <a:rPr lang="en-US" smtClean="0"/>
+              <a:t>Click to edit Master text styles</a:t>
+            </a:r>
+          </a:p>
+          <a:p>
+            <a:pPr lvl="1"/>
+            <a:r>
+              <a:rPr lang="en-US" smtClean="0"/>
+              <a:t>Second level</a:t>
+            </a:r>
+          </a:p>
+          <a:p>
+            <a:pPr lvl="2"/>
+            <a:r>
+              <a:rPr lang="en-US" smtClean="0"/>
+              <a:t>Third level</a:t>
+            </a:r>
+          </a:p>
+          <a:p>
+            <a:pPr lvl="3"/>
+            <a:r>
+              <a:rPr lang="en-US" smtClean="0"/>
+              <a:t>Fourth level</a:t>
+            </a:r>
+          </a:p>
+          <a:p>
+            <a:pPr lvl="4"/>
+            <a:r>
+              <a:rPr lang="en-US" smtClean="0"/>
+              <a:t>Fifth level</a:t>
+            </a:r>
+            <a:endParaRPr lang="en-US"/>
+          </a:p>
+        </p:txBody>
+      </p:sp>
+      <p:sp>
+        <p:nvSpPr>
+          <p:cNvPr id="5" name="Date Placeholder 4"/>
+          <p:cNvSpPr>
+            <a:spLocks noGrp="1"/>
+          </p:cNvSpPr>
+          <p:nvPr>
+            <p:ph type="dt" sz="half" idx="10"/>
+          </p:nvPr>
+        </p:nvSpPr>
+        <p:spPr/>
+        <p:txBody>
+          <a:bodyPr/>
+          <a:lstStyle/>
+          <a:p>
+            <a:fld id="{5BCAD085-E8A6-8845-BD4E-CB4CCA059FC4}" type="datetimeFigureOut">
+              <a:rPr lang="en-US" smtClean="0"/>
+              <a:t>1/27/13</a:t>
+            </a:fld>
+            <a:endParaRPr lang="en-US"/>
+          </a:p>
+        </p:txBody>
+      </p:sp>
+      <p:sp>
+        <p:nvSpPr>
+          <p:cNvPr id="6" name="Footer Placeholder 5"/>
+          <p:cNvSpPr>
+            <a:spLocks noGrp="1"/>
+          </p:cNvSpPr>
+          <p:nvPr>
+            <p:ph type="ftr" sz="quarter" idx="11"/>
+          </p:nvPr>
+        </p:nvSpPr>
+        <p:spPr/>
+        <p:txBody>
+          <a:bodyPr/>
+          <a:lstStyle/>
+          <a:p>
+            <a:endParaRPr lang="en-US"/>
+          </a:p>
+        </p:txBody>
+      </p:sp>
+      <p:sp>
+        <p:nvSpPr>
+          <p:cNvPr id="7" name="Slide Number Placeholder 6"/>
+          <p:cNvSpPr>
+            <a:spLocks noGrp="1"/>
+          </p:cNvSpPr>
+          <p:nvPr>
+            <p:ph type="sldNum" sz="quarter" idx="12"/>
+          </p:nvPr>
+        </p:nvSpPr>
+        <p:spPr/>
+        <p:txBody>
+          <a:bodyPr/>
+          <a:lstStyle/>
+          <a:p>
+            <a:fld id="{C1FF6DA9-008F-8B48-92A6-B652298478BF}" type="slidenum">
+              <a:rPr lang="en-US" smtClean="0"/>
+              <a:t>‹#›</a:t>
+            </a:fld>
+            <a:endParaRPr lang="en-US"/>
+          </a:p>
+        </p:txBody>
+      </p:sp>
+    </p:spTree>
+    <p:extLst>
+      <p:ext uri="{BB962C8B-B14F-4D97-AF65-F5344CB8AC3E}">
+        <p14:creationId xmlns:p14="http://schemas.microsoft.com/office/powerpoint/2010/main" val="2782244947"/>
+      </p:ext>
+    </p:extLst>
+  </p:cSld>
+  <p:clrMapOvr>
+    <a:masterClrMapping/>
+  </p:clrMapOvr>
+</p:sldLayout>
+</file>
+
+<file path=ppt/slideLayouts/slideLayout5.xml><?xml version="1.0" encoding="utf-8"?>
+<p:sldLayout xmlns:a="http://schemas.openxmlformats.org/drawingml/2006/main" xmlns:r="http://schemas.openxmlformats.org/officeDocument/2006/relationships" xmlns:p="http://schemas.openxmlformats.org/presentationml/2006/main" type="twoTxTwoObj" preserve="1">
+  <p:cSld name="Comparison">
+    <p:spTree>
+      <p:nvGrpSpPr>
+        <p:cNvPr id="1" name=""/>
+        <p:cNvGrpSpPr/>
+        <p:nvPr/>
+      </p:nvGrpSpPr>
+      <p:grpSpPr>
+        <a:xfrm>
+          <a:off x="0" y="0"/>
+          <a:ext cx="0" cy="0"/>
+          <a:chOff x="0" y="0"/>
+          <a:chExt cx="0" cy="0"/>
+        </a:xfrm>
+      </p:grpSpPr>
+      <p:sp>
+        <p:nvSpPr>
+          <p:cNvPr id="2" name="Title 1"/>
+          <p:cNvSpPr>
+            <a:spLocks noGrp="1"/>
+          </p:cNvSpPr>
+          <p:nvPr>
+            <p:ph type="title"/>
+          </p:nvPr>
+        </p:nvSpPr>
+        <p:spPr/>
+        <p:txBody>
+          <a:bodyPr/>
+          <a:lstStyle>
+            <a:lvl1pPr>
+              <a:defRPr/>
+            </a:lvl1pPr>
+          </a:lstStyle>
+          <a:p>
+            <a:r>
+              <a:rPr lang="en-US" smtClean="0"/>
+              <a:t>Click to edit Master title style</a:t>
+            </a:r>
+            <a:endParaRPr lang="en-US"/>
+          </a:p>
+        </p:txBody>
+      </p:sp>
+      <p:sp>
+        <p:nvSpPr>
+          <p:cNvPr id="3" name="Text Placeholder 2"/>
+          <p:cNvSpPr>
+            <a:spLocks noGrp="1"/>
+          </p:cNvSpPr>
+          <p:nvPr>
+            <p:ph type="body" idx="1"/>
+          </p:nvPr>
+        </p:nvSpPr>
+        <p:spPr>
+          <a:xfrm>
+            <a:off x="457200" y="1535113"/>
+            <a:ext cx="4040188" cy="639762"/>
+          </a:xfrm>
+        </p:spPr>
+        <p:txBody>
+          <a:bodyPr anchor="b"/>
+          <a:lstStyle>
+            <a:lvl1pPr marL="0" indent="0">
+              <a:buNone/>
+              <a:defRPr sz="2400" b="1"/>
+            </a:lvl1pPr>
+            <a:lvl2pPr marL="457200" indent="0">
+              <a:buNone/>
+              <a:defRPr sz="2000" b="1"/>
+            </a:lvl2pPr>
+            <a:lvl3pPr marL="914400" indent="0">
+              <a:buNone/>
+              <a:defRPr sz="1800" b="1"/>
+            </a:lvl3pPr>
+            <a:lvl4pPr marL="1371600" indent="0">
+              <a:buNone/>
+              <a:defRPr sz="1600" b="1"/>
+            </a:lvl4pPr>
+            <a:lvl5pPr marL="1828800" indent="0">
+              <a:buNone/>
+              <a:defRPr sz="1600" b="1"/>
+            </a:lvl5pPr>
+            <a:lvl6pPr marL="2286000" indent="0">
+              <a:buNone/>
+              <a:defRPr sz="1600" b="1"/>
+            </a:lvl6pPr>
+            <a:lvl7pPr marL="2743200" indent="0">
+              <a:buNone/>
+              <a:defRPr sz="1600" b="1"/>
+            </a:lvl7pPr>
+            <a:lvl8pPr marL="3200400" indent="0">
+              <a:buNone/>
+              <a:defRPr sz="1600" b="1"/>
+            </a:lvl8pPr>
+            <a:lvl9pPr marL="3657600" indent="0">
+              <a:buNone/>
+              <a:defRPr sz="1600" b="1"/>
+            </a:lvl9pPr>
+          </a:lstStyle>
+          <a:p>
+            <a:pPr lvl="0"/>
+            <a:r>
+              <a:rPr lang="en-US" smtClean="0"/>
+              <a:t>Click to edit Master text styles</a:t>
+            </a:r>
+          </a:p>
+        </p:txBody>
+      </p:sp>
+      <p:sp>
+        <p:nvSpPr>
+          <p:cNvPr id="4" name="Content Placeholder 3"/>
+          <p:cNvSpPr>
+            <a:spLocks noGrp="1"/>
+          </p:cNvSpPr>
+          <p:nvPr>
+            <p:ph sz="half" idx="2"/>
+          </p:nvPr>
+        </p:nvSpPr>
+        <p:spPr>
+          <a:xfrm>
+            <a:off x="457200" y="2174875"/>
+            <a:ext cx="4040188" cy="3951288"/>
+          </a:xfrm>
+        </p:spPr>
+        <p:txBody>
+          <a:bodyPr/>
+          <a:lstStyle>
+            <a:lvl1pPr>
+              <a:defRPr sz="2400"/>
+            </a:lvl1pPr>
+            <a:lvl2pPr>
+              <a:defRPr sz="2000"/>
+            </a:lvl2pPr>
+            <a:lvl3pPr>
+              <a:defRPr sz="1800"/>
+            </a:lvl3pPr>
+            <a:lvl4pPr>
+              <a:defRPr sz="1600"/>
+            </a:lvl4pPr>
+            <a:lvl5pPr>
+              <a:defRPr sz="1600"/>
+            </a:lvl5pPr>
+            <a:lvl6pPr>
+              <a:defRPr sz="1600"/>
+            </a:lvl6pPr>
+            <a:lvl7pPr>
+              <a:defRPr sz="1600"/>
+            </a:lvl7pPr>
+            <a:lvl8pPr>
+              <a:defRPr sz="1600"/>
+            </a:lvl8pPr>
+            <a:lvl9pPr>
+              <a:defRPr sz="1600"/>
+            </a:lvl9pPr>
+          </a:lstStyle>
+          <a:p>
+            <a:pPr lvl="0"/>
+            <a:r>
+              <a:rPr lang="en-US" smtClean="0"/>
+              <a:t>Click to edit Master text styles</a:t>
+            </a:r>
+          </a:p>
+          <a:p>
+            <a:pPr lvl="1"/>
+            <a:r>
+              <a:rPr lang="en-US" smtClean="0"/>
+              <a:t>Second level</a:t>
+            </a:r>
+          </a:p>
+          <a:p>
+            <a:pPr lvl="2"/>
+            <a:r>
+              <a:rPr lang="en-US" smtClean="0"/>
+              <a:t>Third level</a:t>
+            </a:r>
+          </a:p>
+          <a:p>
+            <a:pPr lvl="3"/>
+            <a:r>
+              <a:rPr lang="en-US" smtClean="0"/>
+              <a:t>Fourth level</a:t>
+            </a:r>
+          </a:p>
+          <a:p>
+            <a:pPr lvl="4"/>
+            <a:r>
+              <a:rPr lang="en-US" smtClean="0"/>
+              <a:t>Fifth level</a:t>
+            </a:r>
+            <a:endParaRPr lang="en-US"/>
+          </a:p>
+        </p:txBody>
+      </p:sp>
+      <p:sp>
+        <p:nvSpPr>
+          <p:cNvPr id="5" name="Text Placeholder 4"/>
+          <p:cNvSpPr>
+            <a:spLocks noGrp="1"/>
+          </p:cNvSpPr>
+          <p:nvPr>
+            <p:ph type="body" sz="quarter" idx="3"/>
+          </p:nvPr>
+        </p:nvSpPr>
+        <p:spPr>
+          <a:xfrm>
+            <a:off x="4645025" y="1535113"/>
+            <a:ext cx="4041775" cy="639762"/>
+          </a:xfrm>
+        </p:spPr>
+        <p:txBody>
+          <a:bodyPr anchor="b"/>
+          <a:lstStyle>
+            <a:lvl1pPr marL="0" indent="0">
+              <a:buNone/>
+              <a:defRPr sz="2400" b="1"/>
+            </a:lvl1pPr>
+            <a:lvl2pPr marL="457200" indent="0">
+              <a:buNone/>
+              <a:defRPr sz="2000" b="1"/>
+            </a:lvl2pPr>
+            <a:lvl3pPr marL="914400" indent="0">
+              <a:buNone/>
+              <a:defRPr sz="1800" b="1"/>
+            </a:lvl3pPr>
+            <a:lvl4pPr marL="1371600" indent="0">
+              <a:buNone/>
+              <a:defRPr sz="1600" b="1"/>
+            </a:lvl4pPr>
+            <a:lvl5pPr marL="1828800" indent="0">
+              <a:buNone/>
+              <a:defRPr sz="1600" b="1"/>
+            </a:lvl5pPr>
+            <a:lvl6pPr marL="2286000" indent="0">
+              <a:buNone/>
+              <a:defRPr sz="1600" b="1"/>
+            </a:lvl6pPr>
+            <a:lvl7pPr marL="2743200" indent="0">
+              <a:buNone/>
+              <a:defRPr sz="1600" b="1"/>
+            </a:lvl7pPr>
+            <a:lvl8pPr marL="3200400" indent="0">
+              <a:buNone/>
+              <a:defRPr sz="1600" b="1"/>
+            </a:lvl8pPr>
+            <a:lvl9pPr marL="3657600" indent="0">
+              <a:buNone/>
+              <a:defRPr sz="1600" b="1"/>
+            </a:lvl9pPr>
+          </a:lstStyle>
+          <a:p>
+            <a:pPr lvl="0"/>
+            <a:r>
+              <a:rPr lang="en-US" smtClean="0"/>
+              <a:t>Click to edit Master text styles</a:t>
+            </a:r>
+          </a:p>
+        </p:txBody>
+      </p:sp>
+      <p:sp>
+        <p:nvSpPr>
+          <p:cNvPr id="6" name="Content Placeholder 5"/>
+          <p:cNvSpPr>
+            <a:spLocks noGrp="1"/>
+          </p:cNvSpPr>
+          <p:nvPr>
+            <p:ph sz="quarter" idx="4"/>
+          </p:nvPr>
+        </p:nvSpPr>
+        <p:spPr>
+          <a:xfrm>
+            <a:off x="4645025" y="2174875"/>
+            <a:ext cx="4041775" cy="3951288"/>
+          </a:xfrm>
+        </p:spPr>
+        <p:txBody>
+          <a:bodyPr/>
+          <a:lstStyle>
+            <a:lvl1pPr>
+              <a:defRPr sz="2400"/>
+            </a:lvl1pPr>
+            <a:lvl2pPr>
+              <a:defRPr sz="2000"/>
+            </a:lvl2pPr>
+            <a:lvl3pPr>
+              <a:defRPr sz="1800"/>
+            </a:lvl3pPr>
+            <a:lvl4pPr>
+              <a:defRPr sz="1600"/>
+            </a:lvl4pPr>
+            <a:lvl5pPr>
+              <a:defRPr sz="1600"/>
+            </a:lvl5pPr>
+            <a:lvl6pPr>
+              <a:defRPr sz="1600"/>
+            </a:lvl6pPr>
+            <a:lvl7pPr>
+              <a:defRPr sz="1600"/>
+            </a:lvl7pPr>
+            <a:lvl8pPr>
+              <a:defRPr sz="1600"/>
+            </a:lvl8pPr>
+            <a:lvl9pPr>
+              <a:defRPr sz="1600"/>
+            </a:lvl9pPr>
+          </a:lstStyle>
+          <a:p>
+            <a:pPr lvl="0"/>
+            <a:r>
+              <a:rPr lang="en-US" smtClean="0"/>
+              <a:t>Click to edit Master text styles</a:t>
+            </a:r>
+          </a:p>
+          <a:p>
+            <a:pPr lvl="1"/>
+            <a:r>
+              <a:rPr lang="en-US" smtClean="0"/>
+              <a:t>Second level</a:t>
+            </a:r>
+          </a:p>
+          <a:p>
+            <a:pPr lvl="2"/>
+            <a:r>
+              <a:rPr lang="en-US" smtClean="0"/>
+              <a:t>Third level</a:t>
+            </a:r>
+          </a:p>
+          <a:p>
+            <a:pPr lvl="3"/>
+            <a:r>
+              <a:rPr lang="en-US" smtClean="0"/>
+              <a:t>Fourth level</a:t>
+            </a:r>
+          </a:p>
+          <a:p>
+            <a:pPr lvl="4"/>
+            <a:r>
+              <a:rPr lang="en-US" smtClean="0"/>
+              <a:t>Fifth level</a:t>
+            </a:r>
+            <a:endParaRPr lang="en-US"/>
+          </a:p>
+        </p:txBody>
+      </p:sp>
+      <p:sp>
+        <p:nvSpPr>
+          <p:cNvPr id="7" name="Date Placeholder 6"/>
+          <p:cNvSpPr>
+            <a:spLocks noGrp="1"/>
+          </p:cNvSpPr>
+          <p:nvPr>
+            <p:ph type="dt" sz="half" idx="10"/>
+          </p:nvPr>
+        </p:nvSpPr>
+        <p:spPr/>
+        <p:txBody>
+          <a:bodyPr/>
+          <a:lstStyle/>
+          <a:p>
+            <a:fld id="{5BCAD085-E8A6-8845-BD4E-CB4CCA059FC4}" type="datetimeFigureOut">
+              <a:rPr lang="en-US" smtClean="0"/>
+              <a:t>1/27/13</a:t>
+            </a:fld>
+            <a:endParaRPr lang="en-US"/>
+          </a:p>
+        </p:txBody>
+      </p:sp>
+      <p:sp>
+        <p:nvSpPr>
+          <p:cNvPr id="8" name="Footer Placeholder 7"/>
+          <p:cNvSpPr>
+            <a:spLocks noGrp="1"/>
+          </p:cNvSpPr>
+          <p:nvPr>
+            <p:ph type="ftr" sz="quarter" idx="11"/>
+          </p:nvPr>
+        </p:nvSpPr>
+        <p:spPr/>
+        <p:txBody>
+          <a:bodyPr/>
+          <a:lstStyle/>
+          <a:p>
+            <a:endParaRPr lang="en-US"/>
+          </a:p>
+        </p:txBody>
+      </p:sp>
+      <p:sp>
+        <p:nvSpPr>
+          <p:cNvPr id="9" name="Slide Number Placeholder 8"/>
+          <p:cNvSpPr>
+            <a:spLocks noGrp="1"/>
+          </p:cNvSpPr>
+          <p:nvPr>
+            <p:ph type="sldNum" sz="quarter" idx="12"/>
+          </p:nvPr>
+        </p:nvSpPr>
+        <p:spPr/>
+        <p:txBody>
+          <a:bodyPr/>
+          <a:lstStyle/>
+          <a:p>
+            <a:fld id="{C1FF6DA9-008F-8B48-92A6-B652298478BF}" type="slidenum">
+              <a:rPr lang="en-US" smtClean="0"/>
+              <a:t>‹#›</a:t>
+            </a:fld>
+            <a:endParaRPr lang="en-US"/>
+          </a:p>
+        </p:txBody>
+      </p:sp>
+    </p:spTree>
+    <p:extLst>
+      <p:ext uri="{BB962C8B-B14F-4D97-AF65-F5344CB8AC3E}">
+        <p14:creationId xmlns:p14="http://schemas.microsoft.com/office/powerpoint/2010/main" val="990158736"/>
+      </p:ext>
+    </p:extLst>
+  </p:cSld>
+  <p:clrMapOvr>
+    <a:masterClrMapping/>
+  </p:clrMapOvr>
+</p:sldLayout>
+</file>
+
+<file path=ppt/slideLayouts/slideLayout6.xml><?xml version="1.0" encoding="utf-8"?>
+<p:sldLayout xmlns:a="http://schemas.openxmlformats.org/drawingml/2006/main" xmlns:r="http://schemas.openxmlformats.org/officeDocument/2006/relationships" xmlns:p="http://schemas.openxmlformats.org/presentationml/2006/main" type="titleOnly" preserve="1">
+  <p:cSld name="Title Only">
+    <p:spTree>
+      <p:nvGrpSpPr>
+        <p:cNvPr id="1" name=""/>
+        <p:cNvGrpSpPr/>
+        <p:nvPr/>
+      </p:nvGrpSpPr>
+      <p:grpSpPr>
+        <a:xfrm>
+          <a:off x="0" y="0"/>
+          <a:ext cx="0" cy="0"/>
+          <a:chOff x="0" y="0"/>
+          <a:chExt cx="0" cy="0"/>
+        </a:xfrm>
+      </p:grpSpPr>
+      <p:sp>
+        <p:nvSpPr>
+          <p:cNvPr id="2" name="Title 1"/>
+          <p:cNvSpPr>
+            <a:spLocks noGrp="1"/>
+          </p:cNvSpPr>
+          <p:nvPr>
+            <p:ph type="title"/>
+          </p:nvPr>
+        </p:nvSpPr>
+        <p:spPr/>
+        <p:txBody>
+          <a:bodyPr/>
+          <a:lstStyle/>
+          <a:p>
+            <a:r>
+              <a:rPr lang="en-US" smtClean="0"/>
+              <a:t>Click to edit Master title style</a:t>
+            </a:r>
+            <a:endParaRPr lang="en-US"/>
+          </a:p>
+        </p:txBody>
+      </p:sp>
+      <p:sp>
+        <p:nvSpPr>
+          <p:cNvPr id="3" name="Date Placeholder 2"/>
+          <p:cNvSpPr>
+            <a:spLocks noGrp="1"/>
+          </p:cNvSpPr>
+          <p:nvPr>
+            <p:ph type="dt" sz="half" idx="10"/>
+          </p:nvPr>
+        </p:nvSpPr>
+        <p:spPr/>
+        <p:txBody>
+          <a:bodyPr/>
+          <a:lstStyle/>
+          <a:p>
+            <a:fld id="{5BCAD085-E8A6-8845-BD4E-CB4CCA059FC4}" type="datetimeFigureOut">
+              <a:rPr lang="en-US" smtClean="0"/>
+              <a:t>1/27/13</a:t>
+            </a:fld>
+            <a:endParaRPr lang="en-US"/>
+          </a:p>
+        </p:txBody>
+      </p:sp>
+      <p:sp>
+        <p:nvSpPr>
+          <p:cNvPr id="4" name="Footer Placeholder 3"/>
+          <p:cNvSpPr>
+            <a:spLocks noGrp="1"/>
+          </p:cNvSpPr>
+          <p:nvPr>
+            <p:ph type="ftr" sz="quarter" idx="11"/>
+          </p:nvPr>
+        </p:nvSpPr>
+        <p:spPr/>
+        <p:txBody>
+          <a:bodyPr/>
+          <a:lstStyle/>
+          <a:p>
+            <a:endParaRPr lang="en-US"/>
+          </a:p>
+        </p:txBody>
+      </p:sp>
+      <p:sp>
+        <p:nvSpPr>
+          <p:cNvPr id="5" name="Slide Number Placeholder 4"/>
+          <p:cNvSpPr>
+            <a:spLocks noGrp="1"/>
+          </p:cNvSpPr>
+          <p:nvPr>
+            <p:ph type="sldNum" sz="quarter" idx="12"/>
+          </p:nvPr>
+        </p:nvSpPr>
+        <p:spPr/>
+        <p:txBody>
+          <a:bodyPr/>
+          <a:lstStyle/>
+          <a:p>
+            <a:fld id="{C1FF6DA9-008F-8B48-92A6-B652298478BF}" type="slidenum">
+              <a:rPr lang="en-US" smtClean="0"/>
+              <a:t>‹#›</a:t>
+            </a:fld>
+            <a:endParaRPr lang="en-US"/>
+          </a:p>
+        </p:txBody>
+      </p:sp>
+    </p:spTree>
+    <p:extLst>
+      <p:ext uri="{BB962C8B-B14F-4D97-AF65-F5344CB8AC3E}">
+        <p14:creationId xmlns:p14="http://schemas.microsoft.com/office/powerpoint/2010/main" val="727027711"/>
+      </p:ext>
+    </p:extLst>
+  </p:cSld>
+  <p:clrMapOvr>
+    <a:masterClrMapping/>
+  </p:clrMapOvr>
+</p:sldLayout>
+</file>
+
+<file path=ppt/slideLayouts/slideLayout7.xml><?xml version="1.0" encoding="utf-8"?>
+<p:sldLayout xmlns:a="http://schemas.openxmlformats.org/drawingml/2006/main" xmlns:r="http://schemas.openxmlformats.org/officeDocument/2006/relationships" xmlns:p="http://schemas.openxmlformats.org/presentationml/2006/main" type="blank" preserve="1">
+  <p:cSld name="Blank">
+    <p:spTree>
+      <p:nvGrpSpPr>
+        <p:cNvPr id="1" name=""/>
+        <p:cNvGrpSpPr/>
+        <p:nvPr/>
+      </p:nvGrpSpPr>
+      <p:grpSpPr>
+        <a:xfrm>
+          <a:off x="0" y="0"/>
+          <a:ext cx="0" cy="0"/>
+          <a:chOff x="0" y="0"/>
+          <a:chExt cx="0" cy="0"/>
+        </a:xfrm>
+      </p:grpSpPr>
+      <p:sp>
+        <p:nvSpPr>
+          <p:cNvPr id="2" name="Date Placeholder 1"/>
+          <p:cNvSpPr>
+            <a:spLocks noGrp="1"/>
+          </p:cNvSpPr>
+          <p:nvPr>
+            <p:ph type="dt" sz="half" idx="10"/>
+          </p:nvPr>
+        </p:nvSpPr>
+        <p:spPr/>
+        <p:txBody>
+          <a:bodyPr/>
+          <a:lstStyle/>
+          <a:p>
+            <a:fld id="{5BCAD085-E8A6-8845-BD4E-CB4CCA059FC4}" type="datetimeFigureOut">
+              <a:rPr lang="en-US" smtClean="0"/>
+              <a:t>1/27/13</a:t>
+            </a:fld>
+            <a:endParaRPr lang="en-US"/>
+          </a:p>
+        </p:txBody>
+      </p:sp>
+      <p:sp>
+        <p:nvSpPr>
+          <p:cNvPr id="3" name="Footer Placeholder 2"/>
+          <p:cNvSpPr>
+            <a:spLocks noGrp="1"/>
+          </p:cNvSpPr>
+          <p:nvPr>
+            <p:ph type="ftr" sz="quarter" idx="11"/>
+          </p:nvPr>
+        </p:nvSpPr>
+        <p:spPr/>
+        <p:txBody>
+          <a:bodyPr/>
+          <a:lstStyle/>
+          <a:p>
+            <a:endParaRPr lang="en-US"/>
+          </a:p>
+        </p:txBody>
+      </p:sp>
+      <p:sp>
+        <p:nvSpPr>
+          <p:cNvPr id="4" name="Slide Number Placeholder 3"/>
+          <p:cNvSpPr>
+            <a:spLocks noGrp="1"/>
+          </p:cNvSpPr>
+          <p:nvPr>
+            <p:ph type="sldNum" sz="quarter" idx="12"/>
+          </p:nvPr>
+        </p:nvSpPr>
+        <p:spPr/>
+        <p:txBody>
+          <a:bodyPr/>
+          <a:lstStyle/>
+          <a:p>
+            <a:fld id="{C1FF6DA9-008F-8B48-92A6-B652298478BF}" type="slidenum">
+              <a:rPr lang="en-US" smtClean="0"/>
+              <a:t>‹#›</a:t>
+            </a:fld>
+            <a:endParaRPr lang="en-US"/>
+          </a:p>
+        </p:txBody>
+      </p:sp>
+    </p:spTree>
+    <p:extLst>
+      <p:ext uri="{BB962C8B-B14F-4D97-AF65-F5344CB8AC3E}">
+        <p14:creationId xmlns:p14="http://schemas.microsoft.com/office/powerpoint/2010/main" val="1212999818"/>
+      </p:ext>
+    </p:extLst>
+  </p:cSld>
+  <p:clrMapOvr>
+    <a:masterClrMapping/>
+  </p:clrMapOvr>
+</p:sldLayout>
+</file>
+
+<file path=ppt/slideLayouts/slideLayout8.xml><?xml version="1.0" encoding="utf-8"?>
+<p:sldLayout xmlns:a="http://schemas.openxmlformats.org/drawingml/2006/main" xmlns:r="http://schemas.openxmlformats.org/officeDocument/2006/relationships" xmlns:p="http://schemas.openxmlformats.org/presentationml/2006/main" type="objTx" preserve="1">
+  <p:cSld name="Content with Caption">
+    <p:spTree>
+      <p:nvGrpSpPr>
+        <p:cNvPr id="1" name=""/>
+        <p:cNvGrpSpPr/>
+        <p:nvPr/>
+      </p:nvGrpSpPr>
+      <p:grpSpPr>
+        <a:xfrm>
+          <a:off x="0" y="0"/>
+          <a:ext cx="0" cy="0"/>
+          <a:chOff x="0" y="0"/>
+          <a:chExt cx="0" cy="0"/>
+        </a:xfrm>
+      </p:grpSpPr>
+      <p:sp>
+        <p:nvSpPr>
+          <p:cNvPr id="2" name="Title 1"/>
+          <p:cNvSpPr>
+            <a:spLocks noGrp="1"/>
+          </p:cNvSpPr>
+          <p:nvPr>
+            <p:ph type="title"/>
+          </p:nvPr>
+        </p:nvSpPr>
+        <p:spPr>
+          <a:xfrm>
+            <a:off x="457200" y="273050"/>
+            <a:ext cx="3008313" cy="1162050"/>
+          </a:xfrm>
+        </p:spPr>
+        <p:txBody>
+          <a:bodyPr anchor="b"/>
+          <a:lstStyle>
+            <a:lvl1pPr algn="l">
+              <a:defRPr sz="2000" b="1"/>
+            </a:lvl1pPr>
+          </a:lstStyle>
+          <a:p>
+            <a:r>
+              <a:rPr lang="en-US" smtClean="0"/>
+              <a:t>Click to edit Master title style</a:t>
+            </a:r>
+            <a:endParaRPr lang="en-US"/>
+          </a:p>
+        </p:txBody>
+      </p:sp>
+      <p:sp>
+        <p:nvSpPr>
+          <p:cNvPr id="3" name="Content Placeholder 2"/>
+          <p:cNvSpPr>
+            <a:spLocks noGrp="1"/>
+          </p:cNvSpPr>
+          <p:nvPr>
+            <p:ph idx="1"/>
+          </p:nvPr>
+        </p:nvSpPr>
+        <p:spPr>
+          <a:xfrm>
+            <a:off x="3575050" y="273050"/>
+            <a:ext cx="5111750" cy="5853113"/>
+          </a:xfrm>
+        </p:spPr>
+        <p:txBody>
+          <a:bodyPr/>
+          <a:lstStyle>
+            <a:lvl1pPr>
+              <a:defRPr sz="3200"/>
+            </a:lvl1pPr>
+            <a:lvl2pPr>
+              <a:defRPr sz="2800"/>
+            </a:lvl2pPr>
+            <a:lvl3pPr>
+              <a:defRPr sz="2400"/>
+            </a:lvl3pPr>
+            <a:lvl4pPr>
+              <a:defRPr sz="2000"/>
+            </a:lvl4pPr>
+            <a:lvl5pPr>
+              <a:defRPr sz="2000"/>
+            </a:lvl5pPr>
+            <a:lvl6pPr>
+              <a:defRPr sz="2000"/>
+            </a:lvl6pPr>
+            <a:lvl7pPr>
+              <a:defRPr sz="2000"/>
+            </a:lvl7pPr>
+            <a:lvl8pPr>
+              <a:defRPr sz="2000"/>
+            </a:lvl8pPr>
+            <a:lvl9pPr>
+              <a:defRPr sz="2000"/>
+            </a:lvl9pPr>
+          </a:lstStyle>
+          <a:p>
+            <a:pPr lvl="0"/>
+            <a:r>
+              <a:rPr lang="en-US" smtClean="0"/>
+              <a:t>Click to edit Master text styles</a:t>
+            </a:r>
+          </a:p>
+          <a:p>
+            <a:pPr lvl="1"/>
+            <a:r>
+              <a:rPr lang="en-US" smtClean="0"/>
+              <a:t>Second level</a:t>
+            </a:r>
+          </a:p>
+          <a:p>
+            <a:pPr lvl="2"/>
+            <a:r>
+              <a:rPr lang="en-US" smtClean="0"/>
+              <a:t>Third level</a:t>
+            </a:r>
+          </a:p>
+          <a:p>
+            <a:pPr lvl="3"/>
+            <a:r>
+              <a:rPr lang="en-US" smtClean="0"/>
+              <a:t>Fourth level</a:t>
+            </a:r>
+          </a:p>
+          <a:p>
+            <a:pPr lvl="4"/>
+            <a:r>
+              <a:rPr lang="en-US" smtClean="0"/>
+              <a:t>Fifth level</a:t>
+            </a:r>
+            <a:endParaRPr lang="en-US"/>
+          </a:p>
+        </p:txBody>
+      </p:sp>
+      <p:sp>
+        <p:nvSpPr>
+          <p:cNvPr id="4" name="Text Placeholder 3"/>
+          <p:cNvSpPr>
+            <a:spLocks noGrp="1"/>
+          </p:cNvSpPr>
+          <p:nvPr>
+            <p:ph type="body" sz="half" idx="2"/>
+          </p:nvPr>
+        </p:nvSpPr>
+        <p:spPr>
+          <a:xfrm>
+            <a:off x="457200" y="1435100"/>
+            <a:ext cx="3008313" cy="4691063"/>
+          </a:xfrm>
+        </p:spPr>
+        <p:txBody>
+          <a:bodyPr/>
+          <a:lstStyle>
+            <a:lvl1pPr marL="0" indent="0">
+              <a:buNone/>
+              <a:defRPr sz="1400"/>
+            </a:lvl1pPr>
+            <a:lvl2pPr marL="457200" indent="0">
+              <a:buNone/>
+              <a:defRPr sz="1200"/>
+            </a:lvl2pPr>
+            <a:lvl3pPr marL="914400" indent="0">
+              <a:buNone/>
+              <a:defRPr sz="1000"/>
+            </a:lvl3pPr>
+            <a:lvl4pPr marL="1371600" indent="0">
+              <a:buNone/>
+              <a:defRPr sz="900"/>
+            </a:lvl4pPr>
+            <a:lvl5pPr marL="1828800" indent="0">
+              <a:buNone/>
+              <a:defRPr sz="900"/>
+            </a:lvl5pPr>
+            <a:lvl6pPr marL="2286000" indent="0">
+              <a:buNone/>
+              <a:defRPr sz="900"/>
+            </a:lvl6pPr>
+            <a:lvl7pPr marL="2743200" indent="0">
+              <a:buNone/>
+              <a:defRPr sz="900"/>
+            </a:lvl7pPr>
+            <a:lvl8pPr marL="3200400" indent="0">
+              <a:buNone/>
+              <a:defRPr sz="900"/>
+            </a:lvl8pPr>
+            <a:lvl9pPr marL="3657600" indent="0">
+              <a:buNone/>
+              <a:defRPr sz="900"/>
+            </a:lvl9pPr>
+          </a:lstStyle>
+          <a:p>
+            <a:pPr lvl="0"/>
+            <a:r>
+              <a:rPr lang="en-US" smtClean="0"/>
+              <a:t>Click to edit Master text styles</a:t>
+            </a:r>
+          </a:p>
+        </p:txBody>
+      </p:sp>
+      <p:sp>
+        <p:nvSpPr>
+          <p:cNvPr id="5" name="Date Placeholder 4"/>
+          <p:cNvSpPr>
+            <a:spLocks noGrp="1"/>
+          </p:cNvSpPr>
+          <p:nvPr>
+            <p:ph type="dt" sz="half" idx="10"/>
+          </p:nvPr>
+        </p:nvSpPr>
+        <p:spPr/>
+        <p:txBody>
+          <a:bodyPr/>
+          <a:lstStyle/>
+          <a:p>
+            <a:fld id="{5BCAD085-E8A6-8845-BD4E-CB4CCA059FC4}" type="datetimeFigureOut">
+              <a:rPr lang="en-US" smtClean="0"/>
+              <a:t>1/27/13</a:t>
+            </a:fld>
+            <a:endParaRPr lang="en-US"/>
+          </a:p>
+        </p:txBody>
+      </p:sp>
+      <p:sp>
+        <p:nvSpPr>
+          <p:cNvPr id="6" name="Footer Placeholder 5"/>
+          <p:cNvSpPr>
+            <a:spLocks noGrp="1"/>
+          </p:cNvSpPr>
+          <p:nvPr>
+            <p:ph type="ftr" sz="quarter" idx="11"/>
+          </p:nvPr>
+        </p:nvSpPr>
+        <p:spPr/>
+        <p:txBody>
+          <a:bodyPr/>
+          <a:lstStyle/>
+          <a:p>
+            <a:endParaRPr lang="en-US"/>
+          </a:p>
+        </p:txBody>
+      </p:sp>
+      <p:sp>
+        <p:nvSpPr>
+          <p:cNvPr id="7" name="Slide Number Placeholder 6"/>
+          <p:cNvSpPr>
+            <a:spLocks noGrp="1"/>
+          </p:cNvSpPr>
+          <p:nvPr>
+            <p:ph type="sldNum" sz="quarter" idx="12"/>
+          </p:nvPr>
+        </p:nvSpPr>
+        <p:spPr/>
+        <p:txBody>
+          <a:bodyPr/>
+          <a:lstStyle/>
+          <a:p>
+            <a:fld id="{C1FF6DA9-008F-8B48-92A6-B652298478BF}" type="slidenum">
+              <a:rPr lang="en-US" smtClean="0"/>
+              <a:t>‹#›</a:t>
+            </a:fld>
+            <a:endParaRPr lang="en-US"/>
+          </a:p>
+        </p:txBody>
+      </p:sp>
+    </p:spTree>
+    <p:extLst>
+      <p:ext uri="{BB962C8B-B14F-4D97-AF65-F5344CB8AC3E}">
+        <p14:creationId xmlns:p14="http://schemas.microsoft.com/office/powerpoint/2010/main" val="1840726560"/>
+      </p:ext>
+    </p:extLst>
+  </p:cSld>
+  <p:clrMapOvr>
+    <a:masterClrMapping/>
+  </p:clrMapOvr>
+</p:sldLayout>
+</file>
+
+<file path=ppt/slideLayouts/slideLayout9.xml><?xml version="1.0" encoding="utf-8"?>
+<p:sldLayout xmlns:a="http://schemas.openxmlformats.org/drawingml/2006/main" xmlns:r="http://schemas.openxmlformats.org/officeDocument/2006/relationships" xmlns:p="http://schemas.openxmlformats.org/presentationml/2006/main" type="picTx" preserve="1">
+  <p:cSld name="Picture with Caption">
+    <p:spTree>
+      <p:nvGrpSpPr>
+        <p:cNvPr id="1" name=""/>
+        <p:cNvGrpSpPr/>
+        <p:nvPr/>
+      </p:nvGrpSpPr>
+      <p:grpSpPr>
+        <a:xfrm>
+          <a:off x="0" y="0"/>
+          <a:ext cx="0" cy="0"/>
+          <a:chOff x="0" y="0"/>
+          <a:chExt cx="0" cy="0"/>
+        </a:xfrm>
+      </p:grpSpPr>
+      <p:sp>
+        <p:nvSpPr>
+          <p:cNvPr id="2" name="Title 1"/>
+          <p:cNvSpPr>
+            <a:spLocks noGrp="1"/>
+          </p:cNvSpPr>
+          <p:nvPr>
+            <p:ph type="title"/>
+          </p:nvPr>
+        </p:nvSpPr>
+        <p:spPr>
+          <a:xfrm>
+            <a:off x="1792288" y="4800600"/>
+            <a:ext cx="5486400" cy="566738"/>
+          </a:xfrm>
+        </p:spPr>
+        <p:txBody>
+          <a:bodyPr anchor="b"/>
+          <a:lstStyle>
+            <a:lvl1pPr algn="l">
+              <a:defRPr sz="2000" b="1"/>
+            </a:lvl1pPr>
+          </a:lstStyle>
+          <a:p>
+            <a:r>
+              <a:rPr lang="en-US" smtClean="0"/>
+              <a:t>Click to edit Master title style</a:t>
+            </a:r>
+            <a:endParaRPr lang="en-US"/>
+          </a:p>
+        </p:txBody>
+      </p:sp>
+      <p:sp>
+        <p:nvSpPr>
+          <p:cNvPr id="3" name="Picture Placeholder 2"/>
+          <p:cNvSpPr>
+            <a:spLocks noGrp="1"/>
+          </p:cNvSpPr>
+          <p:nvPr>
+            <p:ph type="pic" idx="1"/>
+          </p:nvPr>
+        </p:nvSpPr>
+        <p:spPr>
+          <a:xfrm>
+            <a:off x="1792288" y="612775"/>
+            <a:ext cx="5486400" cy="4114800"/>
+          </a:xfrm>
+        </p:spPr>
+        <p:txBody>
+          <a:bodyPr/>
+          <a:lstStyle>
+            <a:lvl1pPr marL="0" indent="0">
+              <a:buNone/>
+              <a:defRPr sz="3200"/>
+            </a:lvl1pPr>
+            <a:lvl2pPr marL="457200" indent="0">
+              <a:buNone/>
+              <a:defRPr sz="2800"/>
+            </a:lvl2pPr>
+            <a:lvl3pPr marL="914400" indent="0">
+              <a:buNone/>
+              <a:defRPr sz="2400"/>
+            </a:lvl3pPr>
+            <a:lvl4pPr marL="1371600" indent="0">
+              <a:buNone/>
+              <a:defRPr sz="2000"/>
+            </a:lvl4pPr>
+            <a:lvl5pPr marL="1828800" indent="0">
+              <a:buNone/>
+              <a:defRPr sz="2000"/>
+            </a:lvl5pPr>
+            <a:lvl6pPr marL="2286000" indent="0">
+              <a:buNone/>
+              <a:defRPr sz="2000"/>
+            </a:lvl6pPr>
+            <a:lvl7pPr marL="2743200" indent="0">
+              <a:buNone/>
+              <a:defRPr sz="2000"/>
+            </a:lvl7pPr>
+            <a:lvl8pPr marL="3200400" indent="0">
+              <a:buNone/>
+              <a:defRPr sz="2000"/>
+            </a:lvl8pPr>
+            <a:lvl9pPr marL="3657600" indent="0">
+              <a:buNone/>
+              <a:defRPr sz="2000"/>
+            </a:lvl9pPr>
+          </a:lstStyle>
+          <a:p>
+            <a:endParaRPr lang="en-US"/>
+          </a:p>
+        </p:txBody>
+      </p:sp>
+      <p:sp>
+        <p:nvSpPr>
+          <p:cNvPr id="4" name="Text Placeholder 3"/>
+          <p:cNvSpPr>
+            <a:spLocks noGrp="1"/>
+          </p:cNvSpPr>
+          <p:nvPr>
+            <p:ph type="body" sz="half" idx="2"/>
+          </p:nvPr>
+        </p:nvSpPr>
+        <p:spPr>
+          <a:xfrm>
+            <a:off x="1792288" y="5367338"/>
+            <a:ext cx="5486400" cy="804862"/>
+          </a:xfrm>
+        </p:spPr>
+        <p:txBody>
+          <a:bodyPr/>
+          <a:lstStyle>
+            <a:lvl1pPr marL="0" indent="0">
+              <a:buNone/>
+              <a:defRPr sz="1400"/>
+            </a:lvl1pPr>
+            <a:lvl2pPr marL="457200" indent="0">
+              <a:buNone/>
+              <a:defRPr sz="1200"/>
+            </a:lvl2pPr>
+            <a:lvl3pPr marL="914400" indent="0">
+              <a:buNone/>
+              <a:defRPr sz="1000"/>
+            </a:lvl3pPr>
+            <a:lvl4pPr marL="1371600" indent="0">
+              <a:buNone/>
+              <a:defRPr sz="900"/>
+            </a:lvl4pPr>
+            <a:lvl5pPr marL="1828800" indent="0">
+              <a:buNone/>
+              <a:defRPr sz="900"/>
+            </a:lvl5pPr>
+            <a:lvl6pPr marL="2286000" indent="0">
+              <a:buNone/>
+              <a:defRPr sz="900"/>
+            </a:lvl6pPr>
+            <a:lvl7pPr marL="2743200" indent="0">
+              <a:buNone/>
+              <a:defRPr sz="900"/>
+            </a:lvl7pPr>
+            <a:lvl8pPr marL="3200400" indent="0">
+              <a:buNone/>
+              <a:defRPr sz="900"/>
+            </a:lvl8pPr>
+            <a:lvl9pPr marL="3657600" indent="0">
+              <a:buNone/>
+              <a:defRPr sz="900"/>
+            </a:lvl9pPr>
+          </a:lstStyle>
+          <a:p>
+            <a:pPr lvl="0"/>
+            <a:r>
+              <a:rPr lang="en-US" smtClean="0"/>
+              <a:t>Click to edit Master text styles</a:t>
+            </a:r>
+          </a:p>
+        </p:txBody>
+      </p:sp>
+      <p:sp>
+        <p:nvSpPr>
+          <p:cNvPr id="5" name="Date Placeholder 4"/>
+          <p:cNvSpPr>
+            <a:spLocks noGrp="1"/>
+          </p:cNvSpPr>
+          <p:nvPr>
+            <p:ph type="dt" sz="half" idx="10"/>
+          </p:nvPr>
+        </p:nvSpPr>
+        <p:spPr/>
+        <p:txBody>
+          <a:bodyPr/>
+          <a:lstStyle/>
+          <a:p>
+            <a:fld id="{5BCAD085-E8A6-8845-BD4E-CB4CCA059FC4}" type="datetimeFigureOut">
+              <a:rPr lang="en-US" smtClean="0"/>
+              <a:t>1/27/13</a:t>
+            </a:fld>
+            <a:endParaRPr lang="en-US"/>
+          </a:p>
+        </p:txBody>
+      </p:sp>
+      <p:sp>
+        <p:nvSpPr>
+          <p:cNvPr id="6" name="Footer Placeholder 5"/>
+          <p:cNvSpPr>
+            <a:spLocks noGrp="1"/>
+          </p:cNvSpPr>
+          <p:nvPr>
+            <p:ph type="ftr" sz="quarter" idx="11"/>
+          </p:nvPr>
+        </p:nvSpPr>
+        <p:spPr/>
+        <p:txBody>
+          <a:bodyPr/>
+          <a:lstStyle/>
+          <a:p>
+            <a:endParaRPr lang="en-US"/>
+          </a:p>
+        </p:txBody>
+      </p:sp>
+      <p:sp>
+        <p:nvSpPr>
+          <p:cNvPr id="7" name="Slide Number Placeholder 6"/>
+          <p:cNvSpPr>
+            <a:spLocks noGrp="1"/>
+          </p:cNvSpPr>
+          <p:nvPr>
+            <p:ph type="sldNum" sz="quarter" idx="12"/>
+          </p:nvPr>
+        </p:nvSpPr>
+        <p:spPr/>
+        <p:txBody>
+          <a:bodyPr/>
+          <a:lstStyle/>
+          <a:p>
+            <a:fld id="{C1FF6DA9-008F-8B48-92A6-B652298478BF}" type="slidenum">
+              <a:rPr lang="en-US" smtClean="0"/>
+              <a:t>‹#›</a:t>
+            </a:fld>
+            <a:endParaRPr lang="en-US"/>
+          </a:p>
+        </p:txBody>
+      </p:sp>
+    </p:spTree>
+    <p:extLst>
+      <p:ext uri="{BB962C8B-B14F-4D97-AF65-F5344CB8AC3E}">
+        <p14:creationId xmlns:p14="http://schemas.microsoft.com/office/powerpoint/2010/main" val="3889236939"/>
+      </p:ext>
+    </p:extLst>
+  </p:cSld>
+  <p:clrMapOvr>
+    <a:masterClrMapping/>
+  </p:clrMapOvr>
+</p:sldLayout>
+</file>
+
+<file path=ppt/slideMasters/slideMaster1.xml><?xml version="1.0" encoding="utf-8"?>
+<p:sldMaster xmlns:a="http://schemas.openxmlformats.org/drawingml/2006/main" xmlns:r="http://schemas.openxmlformats.org/officeDocument/2006/relationships" xmlns:p="http://schemas.openxmlformats.org/presentationml/2006/main">
+  <p:cSld>
     <p:bg>
       <p:bgRef idx="1001">
         <a:schemeClr val="bg1"/>
@@ -2477,41 +4725,244 @@
           <a:chExt cx="0" cy="0"/>
         </a:xfrm>
       </p:grpSpPr>
+      <p:sp>
+        <p:nvSpPr>
+          <p:cNvPr id="2" name="Title Placeholder 1"/>
+          <p:cNvSpPr>
+            <a:spLocks noGrp="1"/>
+          </p:cNvSpPr>
+          <p:nvPr>
+            <p:ph type="title"/>
+          </p:nvPr>
+        </p:nvSpPr>
+        <p:spPr>
+          <a:xfrm>
+            <a:off x="457200" y="274638"/>
+            <a:ext cx="8229600" cy="1143000"/>
+          </a:xfrm>
+          <a:prstGeom prst="rect">
+            <a:avLst/>
+          </a:prstGeom>
+        </p:spPr>
+        <p:txBody>
+          <a:bodyPr vert="horz" lIns="91440" tIns="45720" rIns="91440" bIns="45720" rtlCol="0" anchor="ctr">
+            <a:normAutofit/>
+          </a:bodyPr>
+          <a:lstStyle/>
+          <a:p>
+            <a:r>
+              <a:rPr lang="en-US" smtClean="0"/>
+              <a:t>Click to edit Master title style</a:t>
+            </a:r>
+            <a:endParaRPr lang="en-US"/>
+          </a:p>
+        </p:txBody>
+      </p:sp>
+      <p:sp>
+        <p:nvSpPr>
+          <p:cNvPr id="3" name="Text Placeholder 2"/>
+          <p:cNvSpPr>
+            <a:spLocks noGrp="1"/>
+          </p:cNvSpPr>
+          <p:nvPr>
+            <p:ph type="body" idx="1"/>
+          </p:nvPr>
+        </p:nvSpPr>
+        <p:spPr>
+          <a:xfrm>
+            <a:off x="457200" y="1600200"/>
+            <a:ext cx="8229600" cy="4525963"/>
+          </a:xfrm>
+          <a:prstGeom prst="rect">
+            <a:avLst/>
+          </a:prstGeom>
+        </p:spPr>
+        <p:txBody>
+          <a:bodyPr vert="horz" lIns="91440" tIns="45720" rIns="91440" bIns="45720" rtlCol="0">
+            <a:normAutofit/>
+          </a:bodyPr>
+          <a:lstStyle/>
+          <a:p>
+            <a:pPr lvl="0"/>
+            <a:r>
+              <a:rPr lang="en-US" smtClean="0"/>
+              <a:t>Click to edit Master text styles</a:t>
+            </a:r>
+          </a:p>
+          <a:p>
+            <a:pPr lvl="1"/>
+            <a:r>
+              <a:rPr lang="en-US" smtClean="0"/>
+              <a:t>Second level</a:t>
+            </a:r>
+          </a:p>
+          <a:p>
+            <a:pPr lvl="2"/>
+            <a:r>
+              <a:rPr lang="en-US" smtClean="0"/>
+              <a:t>Third level</a:t>
+            </a:r>
+          </a:p>
+          <a:p>
+            <a:pPr lvl="3"/>
+            <a:r>
+              <a:rPr lang="en-US" smtClean="0"/>
+              <a:t>Fourth level</a:t>
+            </a:r>
+          </a:p>
+          <a:p>
+            <a:pPr lvl="4"/>
+            <a:r>
+              <a:rPr lang="en-US" smtClean="0"/>
+              <a:t>Fifth level</a:t>
+            </a:r>
+            <a:endParaRPr lang="en-US"/>
+          </a:p>
+        </p:txBody>
+      </p:sp>
+      <p:sp>
+        <p:nvSpPr>
+          <p:cNvPr id="4" name="Date Placeholder 3"/>
+          <p:cNvSpPr>
+            <a:spLocks noGrp="1"/>
+          </p:cNvSpPr>
+          <p:nvPr>
+            <p:ph type="dt" sz="half" idx="2"/>
+          </p:nvPr>
+        </p:nvSpPr>
+        <p:spPr>
+          <a:xfrm>
+            <a:off x="457200" y="6356350"/>
+            <a:ext cx="2133600" cy="365125"/>
+          </a:xfrm>
+          <a:prstGeom prst="rect">
+            <a:avLst/>
+          </a:prstGeom>
+        </p:spPr>
+        <p:txBody>
+          <a:bodyPr vert="horz" lIns="91440" tIns="45720" rIns="91440" bIns="45720" rtlCol="0" anchor="ctr"/>
+          <a:lstStyle>
+            <a:lvl1pPr algn="l">
+              <a:defRPr sz="1200">
+                <a:solidFill>
+                  <a:schemeClr val="tx1">
+                    <a:tint val="75000"/>
+                  </a:schemeClr>
+                </a:solidFill>
+              </a:defRPr>
+            </a:lvl1pPr>
+          </a:lstStyle>
+          <a:p>
+            <a:fld id="{5BCAD085-E8A6-8845-BD4E-CB4CCA059FC4}" type="datetimeFigureOut">
+              <a:rPr lang="en-US" smtClean="0"/>
+              <a:t>1/27/13</a:t>
+            </a:fld>
+            <a:endParaRPr lang="en-US"/>
+          </a:p>
+        </p:txBody>
+      </p:sp>
+      <p:sp>
+        <p:nvSpPr>
+          <p:cNvPr id="5" name="Footer Placeholder 4"/>
+          <p:cNvSpPr>
+            <a:spLocks noGrp="1"/>
+          </p:cNvSpPr>
+          <p:nvPr>
+            <p:ph type="ftr" sz="quarter" idx="3"/>
+          </p:nvPr>
+        </p:nvSpPr>
+        <p:spPr>
+          <a:xfrm>
+            <a:off x="3124200" y="6356350"/>
+            <a:ext cx="2895600" cy="365125"/>
+          </a:xfrm>
+          <a:prstGeom prst="rect">
+            <a:avLst/>
+          </a:prstGeom>
+        </p:spPr>
+        <p:txBody>
+          <a:bodyPr vert="horz" lIns="91440" tIns="45720" rIns="91440" bIns="45720" rtlCol="0" anchor="ctr"/>
+          <a:lstStyle>
+            <a:lvl1pPr algn="ctr">
+              <a:defRPr sz="1200">
+                <a:solidFill>
+                  <a:schemeClr val="tx1">
+                    <a:tint val="75000"/>
+                  </a:schemeClr>
+                </a:solidFill>
+              </a:defRPr>
+            </a:lvl1pPr>
+          </a:lstStyle>
+          <a:p>
+            <a:endParaRPr lang="en-US"/>
+          </a:p>
+        </p:txBody>
+      </p:sp>
+      <p:sp>
+        <p:nvSpPr>
+          <p:cNvPr id="6" name="Slide Number Placeholder 5"/>
+          <p:cNvSpPr>
+            <a:spLocks noGrp="1"/>
+          </p:cNvSpPr>
+          <p:nvPr>
+            <p:ph type="sldNum" sz="quarter" idx="4"/>
+          </p:nvPr>
+        </p:nvSpPr>
+        <p:spPr>
+          <a:xfrm>
+            <a:off x="6553200" y="6356350"/>
+            <a:ext cx="2133600" cy="365125"/>
+          </a:xfrm>
+          <a:prstGeom prst="rect">
+            <a:avLst/>
+          </a:prstGeom>
+        </p:spPr>
+        <p:txBody>
+          <a:bodyPr vert="horz" lIns="91440" tIns="45720" rIns="91440" bIns="45720" rtlCol="0" anchor="ctr"/>
+          <a:lstStyle>
+            <a:lvl1pPr algn="r">
+              <a:defRPr sz="1200">
+                <a:solidFill>
+                  <a:schemeClr val="tx1">
+                    <a:tint val="75000"/>
+                  </a:schemeClr>
+                </a:solidFill>
+              </a:defRPr>
+            </a:lvl1pPr>
+          </a:lstStyle>
+          <a:p>
+            <a:fld id="{C1FF6DA9-008F-8B48-92A6-B652298478BF}" type="slidenum">
+              <a:rPr lang="en-US" smtClean="0"/>
+              <a:t>‹#›</a:t>
+            </a:fld>
+            <a:endParaRPr lang="en-US"/>
+          </a:p>
+        </p:txBody>
+      </p:sp>
     </p:spTree>
-  </p:cSld>
-  <p:clrMapOvr>
-    <a:masterClrMapping/>
-  </p:clrMapOvr>
-</p:sldLayout>
-</file>
-
-<file path=ppt/slideMasters/slideMaster1.xml><?xml version="1.0" encoding="utf-8"?>
-<p:sldMaster xmlns:a="http://schemas.openxmlformats.org/drawingml/2006/main" xmlns:r="http://schemas.openxmlformats.org/officeDocument/2006/relationships" xmlns:p="http://schemas.openxmlformats.org/presentationml/2006/main">
-  <p:cSld>
-    <p:spTree>
-      <p:nvGrpSpPr>
-        <p:cNvPr id="1" name=""/>
-        <p:cNvGrpSpPr/>
-        <p:nvPr/>
-      </p:nvGrpSpPr>
-      <p:grpSpPr>
-        <a:xfrm>
-          <a:off x="0" y="0"/>
-          <a:ext cx="0" cy="0"/>
-          <a:chOff x="0" y="0"/>
-          <a:chExt cx="0" cy="0"/>
-        </a:xfrm>
-      </p:grpSpPr>
-    </p:spTree>
+    <p:extLst>
+      <p:ext uri="{BB962C8B-B14F-4D97-AF65-F5344CB8AC3E}">
+        <p14:creationId xmlns:p14="http://schemas.microsoft.com/office/powerpoint/2010/main" val="2209977519"/>
+      </p:ext>
+    </p:extLst>
   </p:cSld>
   <p:clrMap bg1="lt1" tx1="dk1" bg2="lt2" tx2="dk2" accent1="accent1" accent2="accent2" accent3="accent3" accent4="accent4" accent5="accent5" accent6="accent6" hlink="hlink" folHlink="folHlink"/>
   <p:sldLayoutIdLst>
     <p:sldLayoutId id="2147483649" r:id="rId1"/>
+    <p:sldLayoutId id="2147483650" r:id="rId2"/>
+    <p:sldLayoutId id="2147483651" r:id="rId3"/>
+    <p:sldLayoutId id="2147483652" r:id="rId4"/>
+    <p:sldLayoutId id="2147483653" r:id="rId5"/>
+    <p:sldLayoutId id="2147483654" r:id="rId6"/>
+    <p:sldLayoutId id="2147483655" r:id="rId7"/>
+    <p:sldLayoutId id="2147483656" r:id="rId8"/>
+    <p:sldLayoutId id="2147483657" r:id="rId9"/>
+    <p:sldLayoutId id="2147483658" r:id="rId10"/>
+    <p:sldLayoutId id="2147483659" r:id="rId11"/>
   </p:sldLayoutIdLst>
-  <p:hf sldNum="0" hdr="0" ftr="0" dt="0"/>
   <p:txStyles>
     <p:titleStyle>
-      <a:lvl1pPr algn="ctr" defTabSz="914400" rtl="0" eaLnBrk="1" latinLnBrk="0" hangingPunct="1">
+      <a:lvl1pPr algn="ctr" defTabSz="457200" rtl="0" eaLnBrk="1" latinLnBrk="0" hangingPunct="1">
         <a:spcBef>
           <a:spcPct val="0"/>
         </a:spcBef>
@@ -2527,11 +4978,11 @@
       </a:lvl1pPr>
     </p:titleStyle>
     <p:bodyStyle>
-      <a:lvl1pPr marL="342900" indent="-342900" algn="l" defTabSz="914400" rtl="0" eaLnBrk="1" latinLnBrk="0" hangingPunct="1">
+      <a:lvl1pPr marL="342900" indent="-342900" algn="l" defTabSz="457200" rtl="0" eaLnBrk="1" latinLnBrk="0" hangingPunct="1">
         <a:spcBef>
           <a:spcPct val="20000"/>
         </a:spcBef>
-        <a:buFont typeface="Arial" pitchFamily="34" charset="0"/>
+        <a:buFont typeface="Arial"/>
         <a:buChar char="•"/>
         <a:defRPr sz="3200" kern="1200">
           <a:solidFill>
@@ -2542,11 +4993,11 @@
           <a:cs typeface="+mn-cs"/>
         </a:defRPr>
       </a:lvl1pPr>
-      <a:lvl2pPr marL="742950" indent="-285750" algn="l" defTabSz="914400" rtl="0" eaLnBrk="1" latinLnBrk="0" hangingPunct="1">
+      <a:lvl2pPr marL="742950" indent="-285750" algn="l" defTabSz="457200" rtl="0" eaLnBrk="1" latinLnBrk="0" hangingPunct="1">
         <a:spcBef>
           <a:spcPct val="20000"/>
         </a:spcBef>
-        <a:buFont typeface="Arial" pitchFamily="34" charset="0"/>
+        <a:buFont typeface="Arial"/>
         <a:buChar char="–"/>
         <a:defRPr sz="2800" kern="1200">
           <a:solidFill>
@@ -2557,11 +5008,11 @@
           <a:cs typeface="+mn-cs"/>
         </a:defRPr>
       </a:lvl2pPr>
-      <a:lvl3pPr marL="1143000" indent="-228600" algn="l" defTabSz="914400" rtl="0" eaLnBrk="1" latinLnBrk="0" hangingPunct="1">
+      <a:lvl3pPr marL="1143000" indent="-228600" algn="l" defTabSz="457200" rtl="0" eaLnBrk="1" latinLnBrk="0" hangingPunct="1">
         <a:spcBef>
           <a:spcPct val="20000"/>
         </a:spcBef>
-        <a:buFont typeface="Arial" pitchFamily="34" charset="0"/>
+        <a:buFont typeface="Arial"/>
         <a:buChar char="•"/>
         <a:defRPr sz="2400" kern="1200">
           <a:solidFill>
@@ -2572,11 +5023,11 @@
           <a:cs typeface="+mn-cs"/>
         </a:defRPr>
       </a:lvl3pPr>
-      <a:lvl4pPr marL="1600200" indent="-228600" algn="l" defTabSz="914400" rtl="0" eaLnBrk="1" latinLnBrk="0" hangingPunct="1">
+      <a:lvl4pPr marL="1600200" indent="-228600" algn="l" defTabSz="457200" rtl="0" eaLnBrk="1" latinLnBrk="0" hangingPunct="1">
         <a:spcBef>
           <a:spcPct val="20000"/>
         </a:spcBef>
-        <a:buFont typeface="Arial" pitchFamily="34" charset="0"/>
+        <a:buFont typeface="Arial"/>
         <a:buChar char="–"/>
         <a:defRPr sz="2000" kern="1200">
           <a:solidFill>
@@ -2587,11 +5038,11 @@
           <a:cs typeface="+mn-cs"/>
         </a:defRPr>
       </a:lvl4pPr>
-      <a:lvl5pPr marL="2057400" indent="-228600" algn="l" defTabSz="914400" rtl="0" eaLnBrk="1" latinLnBrk="0" hangingPunct="1">
+      <a:lvl5pPr marL="2057400" indent="-228600" algn="l" defTabSz="457200" rtl="0" eaLnBrk="1" latinLnBrk="0" hangingPunct="1">
         <a:spcBef>
           <a:spcPct val="20000"/>
         </a:spcBef>
-        <a:buFont typeface="Arial" pitchFamily="34" charset="0"/>
+        <a:buFont typeface="Arial"/>
         <a:buChar char="»"/>
         <a:defRPr sz="2000" kern="1200">
           <a:solidFill>
@@ -2602,11 +5053,11 @@
           <a:cs typeface="+mn-cs"/>
         </a:defRPr>
       </a:lvl5pPr>
-      <a:lvl6pPr marL="2514600" indent="-228600" algn="l" defTabSz="914400" rtl="0" eaLnBrk="1" latinLnBrk="0" hangingPunct="1">
+      <a:lvl6pPr marL="2514600" indent="-228600" algn="l" defTabSz="457200" rtl="0" eaLnBrk="1" latinLnBrk="0" hangingPunct="1">
         <a:spcBef>
           <a:spcPct val="20000"/>
         </a:spcBef>
-        <a:buFont typeface="Arial" pitchFamily="34" charset="0"/>
+        <a:buFont typeface="Arial"/>
         <a:buChar char="•"/>
         <a:defRPr sz="2000" kern="1200">
           <a:solidFill>
@@ -2617,11 +5068,11 @@
           <a:cs typeface="+mn-cs"/>
         </a:defRPr>
       </a:lvl6pPr>
-      <a:lvl7pPr marL="2971800" indent="-228600" algn="l" defTabSz="914400" rtl="0" eaLnBrk="1" latinLnBrk="0" hangingPunct="1">
+      <a:lvl7pPr marL="2971800" indent="-228600" algn="l" defTabSz="457200" rtl="0" eaLnBrk="1" latinLnBrk="0" hangingPunct="1">
         <a:spcBef>
           <a:spcPct val="20000"/>
         </a:spcBef>
-        <a:buFont typeface="Arial" pitchFamily="34" charset="0"/>
+        <a:buFont typeface="Arial"/>
         <a:buChar char="•"/>
         <a:defRPr sz="2000" kern="1200">
           <a:solidFill>
@@ -2632,11 +5083,11 @@
           <a:cs typeface="+mn-cs"/>
         </a:defRPr>
       </a:lvl7pPr>
-      <a:lvl8pPr marL="3429000" indent="-228600" algn="l" defTabSz="914400" rtl="0" eaLnBrk="1" latinLnBrk="0" hangingPunct="1">
+      <a:lvl8pPr marL="3429000" indent="-228600" algn="l" defTabSz="457200" rtl="0" eaLnBrk="1" latinLnBrk="0" hangingPunct="1">
         <a:spcBef>
           <a:spcPct val="20000"/>
         </a:spcBef>
-        <a:buFont typeface="Arial" pitchFamily="34" charset="0"/>
+        <a:buFont typeface="Arial"/>
         <a:buChar char="•"/>
         <a:defRPr sz="2000" kern="1200">
           <a:solidFill>
@@ -2647,11 +5098,11 @@
           <a:cs typeface="+mn-cs"/>
         </a:defRPr>
       </a:lvl8pPr>
-      <a:lvl9pPr marL="3886200" indent="-228600" algn="l" defTabSz="914400" rtl="0" eaLnBrk="1" latinLnBrk="0" hangingPunct="1">
+      <a:lvl9pPr marL="3886200" indent="-228600" algn="l" defTabSz="457200" rtl="0" eaLnBrk="1" latinLnBrk="0" hangingPunct="1">
         <a:spcBef>
           <a:spcPct val="20000"/>
         </a:spcBef>
-        <a:buFont typeface="Arial" pitchFamily="34" charset="0"/>
+        <a:buFont typeface="Arial"/>
         <a:buChar char="•"/>
         <a:defRPr sz="2000" kern="1200">
           <a:solidFill>
@@ -2667,7 +5118,7 @@
       <a:defPPr>
         <a:defRPr lang="en-US"/>
       </a:defPPr>
-      <a:lvl1pPr marL="0" algn="l" defTabSz="914400" rtl="0" eaLnBrk="1" latinLnBrk="0" hangingPunct="1">
+      <a:lvl1pPr marL="0" algn="l" defTabSz="457200" rtl="0" eaLnBrk="1" latinLnBrk="0" hangingPunct="1">
         <a:defRPr sz="1800" kern="1200">
           <a:solidFill>
             <a:schemeClr val="tx1"/>
@@ -2677,7 +5128,7 @@
           <a:cs typeface="+mn-cs"/>
         </a:defRPr>
       </a:lvl1pPr>
-      <a:lvl2pPr marL="457200" algn="l" defTabSz="914400" rtl="0" eaLnBrk="1" latinLnBrk="0" hangingPunct="1">
+      <a:lvl2pPr marL="457200" algn="l" defTabSz="457200" rtl="0" eaLnBrk="1" latinLnBrk="0" hangingPunct="1">
         <a:defRPr sz="1800" kern="1200">
           <a:solidFill>
             <a:schemeClr val="tx1"/>
@@ -2687,7 +5138,7 @@
           <a:cs typeface="+mn-cs"/>
         </a:defRPr>
       </a:lvl2pPr>
-      <a:lvl3pPr marL="914400" algn="l" defTabSz="914400" rtl="0" eaLnBrk="1" latinLnBrk="0" hangingPunct="1">
+      <a:lvl3pPr marL="914400" algn="l" defTabSz="457200" rtl="0" eaLnBrk="1" latinLnBrk="0" hangingPunct="1">
         <a:defRPr sz="1800" kern="1200">
           <a:solidFill>
             <a:schemeClr val="tx1"/>
@@ -2697,7 +5148,7 @@
           <a:cs typeface="+mn-cs"/>
         </a:defRPr>
       </a:lvl3pPr>
-      <a:lvl4pPr marL="1371600" algn="l" defTabSz="914400" rtl="0" eaLnBrk="1" latinLnBrk="0" hangingPunct="1">
+      <a:lvl4pPr marL="1371600" algn="l" defTabSz="457200" rtl="0" eaLnBrk="1" latinLnBrk="0" hangingPunct="1">
         <a:defRPr sz="1800" kern="1200">
           <a:solidFill>
             <a:schemeClr val="tx1"/>
@@ -2707,7 +5158,7 @@
           <a:cs typeface="+mn-cs"/>
         </a:defRPr>
       </a:lvl4pPr>
-      <a:lvl5pPr marL="1828800" algn="l" defTabSz="914400" rtl="0" eaLnBrk="1" latinLnBrk="0" hangingPunct="1">
+      <a:lvl5pPr marL="1828800" algn="l" defTabSz="457200" rtl="0" eaLnBrk="1" latinLnBrk="0" hangingPunct="1">
         <a:defRPr sz="1800" kern="1200">
           <a:solidFill>
             <a:schemeClr val="tx1"/>
@@ -2717,7 +5168,7 @@
           <a:cs typeface="+mn-cs"/>
         </a:defRPr>
       </a:lvl5pPr>
-      <a:lvl6pPr marL="2286000" algn="l" defTabSz="914400" rtl="0" eaLnBrk="1" latinLnBrk="0" hangingPunct="1">
+      <a:lvl6pPr marL="2286000" algn="l" defTabSz="457200" rtl="0" eaLnBrk="1" latinLnBrk="0" hangingPunct="1">
         <a:defRPr sz="1800" kern="1200">
           <a:solidFill>
             <a:schemeClr val="tx1"/>
@@ -2727,7 +5178,7 @@
           <a:cs typeface="+mn-cs"/>
         </a:defRPr>
       </a:lvl6pPr>
-      <a:lvl7pPr marL="2743200" algn="l" defTabSz="914400" rtl="0" eaLnBrk="1" latinLnBrk="0" hangingPunct="1">
+      <a:lvl7pPr marL="2743200" algn="l" defTabSz="457200" rtl="0" eaLnBrk="1" latinLnBrk="0" hangingPunct="1">
         <a:defRPr sz="1800" kern="1200">
           <a:solidFill>
             <a:schemeClr val="tx1"/>
@@ -2737,7 +5188,7 @@
           <a:cs typeface="+mn-cs"/>
         </a:defRPr>
       </a:lvl7pPr>
-      <a:lvl8pPr marL="3200400" algn="l" defTabSz="914400" rtl="0" eaLnBrk="1" latinLnBrk="0" hangingPunct="1">
+      <a:lvl8pPr marL="3200400" algn="l" defTabSz="457200" rtl="0" eaLnBrk="1" latinLnBrk="0" hangingPunct="1">
         <a:defRPr sz="1800" kern="1200">
           <a:solidFill>
             <a:schemeClr val="tx1"/>
@@ -2747,7 +5198,7 @@
           <a:cs typeface="+mn-cs"/>
         </a:defRPr>
       </a:lvl8pPr>
-      <a:lvl9pPr marL="3657600" algn="l" defTabSz="914400" rtl="0" eaLnBrk="1" latinLnBrk="0" hangingPunct="1">
+      <a:lvl9pPr marL="3657600" algn="l" defTabSz="457200" rtl="0" eaLnBrk="1" latinLnBrk="0" hangingPunct="1">
         <a:defRPr sz="1800" kern="1200">
           <a:solidFill>
             <a:schemeClr val="tx1"/>
@@ -2763,32 +5214,25 @@
 </file>
 
 <file path=ppt/slides/slide1.xml><?xml version="1.0" encoding="utf-8"?>
-<p:sld xmlns:a="http://schemas.openxmlformats.org/drawingml/2006/main" xmlns:r="http://schemas.openxmlformats.org/officeDocument/2006/relationships" xmlns:p="http://schemas.openxmlformats.org/presentationml/2006/main">
-  <p:cSld name="Slide 1">
+<p:sld xmlns:a="http://schemas.openxmlformats.org/drawingml/2006/main" xmlns:p="http://schemas.openxmlformats.org/presentationml/2006/main" xmlns:r="http://schemas.openxmlformats.org/officeDocument/2006/relationships">
+  <p:cSld>
     <p:spTree>
       <p:nvGrpSpPr>
         <p:cNvPr id="1" name=""/>
         <p:cNvGrpSpPr/>
         <p:nvPr/>
       </p:nvGrpSpPr>
-      <p:grpSpPr>
-        <a:xfrm>
-          <a:off x="0" y="0"/>
-          <a:ext cx="0" cy="0"/>
-          <a:chOff x="0" y="0"/>
-          <a:chExt cx="0" cy="0"/>
-        </a:xfrm>
-      </p:grpSpPr>
+      <p:grpSpPr/>
       <p:pic>
         <p:nvPicPr>
-          <p:cNvPr id="2" name="Image 0" descr="preencoded.png">    </p:cNvPr>
+          <p:cNvPr id="2" name="Picture 1" descr="p01.png"/>
           <p:cNvPicPr>
             <a:picLocks noChangeAspect="1"/>
           </p:cNvPicPr>
           <p:nvPr/>
         </p:nvPicPr>
         <p:blipFill>
-          <a:blip r:embed="rId1"/>
+          <a:blip r:embed="rId2"/>
           <a:stretch>
             <a:fillRect/>
           </a:stretch>
@@ -2796,7 +5240,7 @@
         <p:spPr>
           <a:xfrm>
             <a:off x="0" y="0"/>
-            <a:ext cx="12191695" cy="6858000"/>
+            <a:ext cx="12191969" cy="6858000"/>
           </a:xfrm>
           <a:prstGeom prst="rect">
             <a:avLst/>
@@ -2824,32 +5268,25 @@
 </file>
 
 <file path=ppt/slides/slide10.xml><?xml version="1.0" encoding="utf-8"?>
-<p:sld xmlns:a="http://schemas.openxmlformats.org/drawingml/2006/main" xmlns:r="http://schemas.openxmlformats.org/officeDocument/2006/relationships" xmlns:p="http://schemas.openxmlformats.org/presentationml/2006/main">
-  <p:cSld name="Slide 10">
+<p:sld xmlns:a="http://schemas.openxmlformats.org/drawingml/2006/main" xmlns:p="http://schemas.openxmlformats.org/presentationml/2006/main" xmlns:r="http://schemas.openxmlformats.org/officeDocument/2006/relationships">
+  <p:cSld>
     <p:spTree>
       <p:nvGrpSpPr>
         <p:cNvPr id="1" name=""/>
         <p:cNvGrpSpPr/>
         <p:nvPr/>
       </p:nvGrpSpPr>
-      <p:grpSpPr>
-        <a:xfrm>
-          <a:off x="0" y="0"/>
-          <a:ext cx="0" cy="0"/>
-          <a:chOff x="0" y="0"/>
-          <a:chExt cx="0" cy="0"/>
-        </a:xfrm>
-      </p:grpSpPr>
+      <p:grpSpPr/>
       <p:pic>
         <p:nvPicPr>
-          <p:cNvPr id="2" name="Image 0" descr="preencoded.png">    </p:cNvPr>
+          <p:cNvPr id="2" name="Picture 1" descr="p10.png"/>
           <p:cNvPicPr>
             <a:picLocks noChangeAspect="1"/>
           </p:cNvPicPr>
           <p:nvPr/>
         </p:nvPicPr>
         <p:blipFill>
-          <a:blip r:embed="rId1"/>
+          <a:blip r:embed="rId2"/>
           <a:stretch>
             <a:fillRect/>
           </a:stretch>
@@ -2857,7 +5294,7 @@
         <p:spPr>
           <a:xfrm>
             <a:off x="0" y="0"/>
-            <a:ext cx="12191695" cy="6858000"/>
+            <a:ext cx="12191969" cy="6858000"/>
           </a:xfrm>
           <a:prstGeom prst="rect">
             <a:avLst/>
@@ -2885,32 +5322,25 @@
 </file>
 
 <file path=ppt/slides/slide11.xml><?xml version="1.0" encoding="utf-8"?>
-<p:sld xmlns:a="http://schemas.openxmlformats.org/drawingml/2006/main" xmlns:r="http://schemas.openxmlformats.org/officeDocument/2006/relationships" xmlns:p="http://schemas.openxmlformats.org/presentationml/2006/main">
-  <p:cSld name="Slide 11">
+<p:sld xmlns:a="http://schemas.openxmlformats.org/drawingml/2006/main" xmlns:p="http://schemas.openxmlformats.org/presentationml/2006/main" xmlns:r="http://schemas.openxmlformats.org/officeDocument/2006/relationships">
+  <p:cSld>
     <p:spTree>
       <p:nvGrpSpPr>
         <p:cNvPr id="1" name=""/>
         <p:cNvGrpSpPr/>
         <p:nvPr/>
       </p:nvGrpSpPr>
-      <p:grpSpPr>
-        <a:xfrm>
-          <a:off x="0" y="0"/>
-          <a:ext cx="0" cy="0"/>
-          <a:chOff x="0" y="0"/>
-          <a:chExt cx="0" cy="0"/>
-        </a:xfrm>
-      </p:grpSpPr>
+      <p:grpSpPr/>
       <p:pic>
         <p:nvPicPr>
-          <p:cNvPr id="2" name="Image 0" descr="preencoded.png">    </p:cNvPr>
+          <p:cNvPr id="2" name="Picture 1" descr="p11.png"/>
           <p:cNvPicPr>
             <a:picLocks noChangeAspect="1"/>
           </p:cNvPicPr>
           <p:nvPr/>
         </p:nvPicPr>
         <p:blipFill>
-          <a:blip r:embed="rId1"/>
+          <a:blip r:embed="rId2"/>
           <a:stretch>
             <a:fillRect/>
           </a:stretch>
@@ -2918,7 +5348,7 @@
         <p:spPr>
           <a:xfrm>
             <a:off x="0" y="0"/>
-            <a:ext cx="12191695" cy="6858000"/>
+            <a:ext cx="12191969" cy="6858000"/>
           </a:xfrm>
           <a:prstGeom prst="rect">
             <a:avLst/>
@@ -2946,32 +5376,25 @@
 </file>
 
 <file path=ppt/slides/slide12.xml><?xml version="1.0" encoding="utf-8"?>
-<p:sld xmlns:a="http://schemas.openxmlformats.org/drawingml/2006/main" xmlns:r="http://schemas.openxmlformats.org/officeDocument/2006/relationships" xmlns:p="http://schemas.openxmlformats.org/presentationml/2006/main">
-  <p:cSld name="Slide 12">
+<p:sld xmlns:a="http://schemas.openxmlformats.org/drawingml/2006/main" xmlns:p="http://schemas.openxmlformats.org/presentationml/2006/main" xmlns:r="http://schemas.openxmlformats.org/officeDocument/2006/relationships">
+  <p:cSld>
     <p:spTree>
       <p:nvGrpSpPr>
         <p:cNvPr id="1" name=""/>
         <p:cNvGrpSpPr/>
         <p:nvPr/>
       </p:nvGrpSpPr>
-      <p:grpSpPr>
-        <a:xfrm>
-          <a:off x="0" y="0"/>
-          <a:ext cx="0" cy="0"/>
-          <a:chOff x="0" y="0"/>
-          <a:chExt cx="0" cy="0"/>
-        </a:xfrm>
-      </p:grpSpPr>
+      <p:grpSpPr/>
       <p:pic>
         <p:nvPicPr>
-          <p:cNvPr id="2" name="Image 0" descr="preencoded.png">    </p:cNvPr>
+          <p:cNvPr id="2" name="Picture 1" descr="p12.png"/>
           <p:cNvPicPr>
             <a:picLocks noChangeAspect="1"/>
           </p:cNvPicPr>
           <p:nvPr/>
         </p:nvPicPr>
         <p:blipFill>
-          <a:blip r:embed="rId1"/>
+          <a:blip r:embed="rId2"/>
           <a:stretch>
             <a:fillRect/>
           </a:stretch>
@@ -2979,7 +5402,7 @@
         <p:spPr>
           <a:xfrm>
             <a:off x="0" y="0"/>
-            <a:ext cx="12191695" cy="6858000"/>
+            <a:ext cx="12191969" cy="6858000"/>
           </a:xfrm>
           <a:prstGeom prst="rect">
             <a:avLst/>
@@ -3007,32 +5430,25 @@
 </file>
 
 <file path=ppt/slides/slide13.xml><?xml version="1.0" encoding="utf-8"?>
-<p:sld xmlns:a="http://schemas.openxmlformats.org/drawingml/2006/main" xmlns:r="http://schemas.openxmlformats.org/officeDocument/2006/relationships" xmlns:p="http://schemas.openxmlformats.org/presentationml/2006/main">
-  <p:cSld name="Slide 13">
+<p:sld xmlns:a="http://schemas.openxmlformats.org/drawingml/2006/main" xmlns:p="http://schemas.openxmlformats.org/presentationml/2006/main" xmlns:r="http://schemas.openxmlformats.org/officeDocument/2006/relationships">
+  <p:cSld>
     <p:spTree>
       <p:nvGrpSpPr>
         <p:cNvPr id="1" name=""/>
         <p:cNvGrpSpPr/>
         <p:nvPr/>
       </p:nvGrpSpPr>
-      <p:grpSpPr>
-        <a:xfrm>
-          <a:off x="0" y="0"/>
-          <a:ext cx="0" cy="0"/>
-          <a:chOff x="0" y="0"/>
-          <a:chExt cx="0" cy="0"/>
-        </a:xfrm>
-      </p:grpSpPr>
+      <p:grpSpPr/>
       <p:pic>
         <p:nvPicPr>
-          <p:cNvPr id="2" name="Image 0" descr="preencoded.png">    </p:cNvPr>
+          <p:cNvPr id="2" name="Picture 1" descr="p13.png"/>
           <p:cNvPicPr>
             <a:picLocks noChangeAspect="1"/>
           </p:cNvPicPr>
           <p:nvPr/>
         </p:nvPicPr>
         <p:blipFill>
-          <a:blip r:embed="rId1"/>
+          <a:blip r:embed="rId2"/>
           <a:stretch>
             <a:fillRect/>
           </a:stretch>
@@ -3040,7 +5456,7 @@
         <p:spPr>
           <a:xfrm>
             <a:off x="0" y="0"/>
-            <a:ext cx="12191695" cy="6858000"/>
+            <a:ext cx="12191969" cy="6858000"/>
           </a:xfrm>
           <a:prstGeom prst="rect">
             <a:avLst/>
@@ -3068,32 +5484,25 @@
 </file>
 
 <file path=ppt/slides/slide14.xml><?xml version="1.0" encoding="utf-8"?>
-<p:sld xmlns:a="http://schemas.openxmlformats.org/drawingml/2006/main" xmlns:r="http://schemas.openxmlformats.org/officeDocument/2006/relationships" xmlns:p="http://schemas.openxmlformats.org/presentationml/2006/main">
-  <p:cSld name="Slide 14">
+<p:sld xmlns:a="http://schemas.openxmlformats.org/drawingml/2006/main" xmlns:p="http://schemas.openxmlformats.org/presentationml/2006/main" xmlns:r="http://schemas.openxmlformats.org/officeDocument/2006/relationships">
+  <p:cSld>
     <p:spTree>
       <p:nvGrpSpPr>
         <p:cNvPr id="1" name=""/>
         <p:cNvGrpSpPr/>
         <p:nvPr/>
       </p:nvGrpSpPr>
-      <p:grpSpPr>
-        <a:xfrm>
-          <a:off x="0" y="0"/>
-          <a:ext cx="0" cy="0"/>
-          <a:chOff x="0" y="0"/>
-          <a:chExt cx="0" cy="0"/>
-        </a:xfrm>
-      </p:grpSpPr>
+      <p:grpSpPr/>
       <p:pic>
         <p:nvPicPr>
-          <p:cNvPr id="2" name="Image 0" descr="preencoded.png">    </p:cNvPr>
+          <p:cNvPr id="2" name="Picture 1" descr="p14.png"/>
           <p:cNvPicPr>
             <a:picLocks noChangeAspect="1"/>
           </p:cNvPicPr>
           <p:nvPr/>
         </p:nvPicPr>
         <p:blipFill>
-          <a:blip r:embed="rId1"/>
+          <a:blip r:embed="rId2"/>
           <a:stretch>
             <a:fillRect/>
           </a:stretch>
@@ -3101,7 +5510,7 @@
         <p:spPr>
           <a:xfrm>
             <a:off x="0" y="0"/>
-            <a:ext cx="12191695" cy="6858000"/>
+            <a:ext cx="12191969" cy="6858000"/>
           </a:xfrm>
           <a:prstGeom prst="rect">
             <a:avLst/>
@@ -3129,32 +5538,25 @@
 </file>
 
 <file path=ppt/slides/slide2.xml><?xml version="1.0" encoding="utf-8"?>
-<p:sld xmlns:a="http://schemas.openxmlformats.org/drawingml/2006/main" xmlns:r="http://schemas.openxmlformats.org/officeDocument/2006/relationships" xmlns:p="http://schemas.openxmlformats.org/presentationml/2006/main">
-  <p:cSld name="Slide 2">
+<p:sld xmlns:a="http://schemas.openxmlformats.org/drawingml/2006/main" xmlns:p="http://schemas.openxmlformats.org/presentationml/2006/main" xmlns:r="http://schemas.openxmlformats.org/officeDocument/2006/relationships">
+  <p:cSld>
     <p:spTree>
       <p:nvGrpSpPr>
         <p:cNvPr id="1" name=""/>
         <p:cNvGrpSpPr/>
         <p:nvPr/>
       </p:nvGrpSpPr>
-      <p:grpSpPr>
-        <a:xfrm>
-          <a:off x="0" y="0"/>
-          <a:ext cx="0" cy="0"/>
-          <a:chOff x="0" y="0"/>
-          <a:chExt cx="0" cy="0"/>
-        </a:xfrm>
-      </p:grpSpPr>
+      <p:grpSpPr/>
       <p:pic>
         <p:nvPicPr>
-          <p:cNvPr id="2" name="Image 0" descr="preencoded.png">    </p:cNvPr>
+          <p:cNvPr id="2" name="Picture 1" descr="p02.png"/>
           <p:cNvPicPr>
             <a:picLocks noChangeAspect="1"/>
           </p:cNvPicPr>
           <p:nvPr/>
         </p:nvPicPr>
         <p:blipFill>
-          <a:blip r:embed="rId1"/>
+          <a:blip r:embed="rId2"/>
           <a:stretch>
             <a:fillRect/>
           </a:stretch>
@@ -3162,7 +5564,7 @@
         <p:spPr>
           <a:xfrm>
             <a:off x="0" y="0"/>
-            <a:ext cx="12191695" cy="6858000"/>
+            <a:ext cx="12191969" cy="6858000"/>
           </a:xfrm>
           <a:prstGeom prst="rect">
             <a:avLst/>
@@ -3190,32 +5592,25 @@
 </file>
 
 <file path=ppt/slides/slide3.xml><?xml version="1.0" encoding="utf-8"?>
-<p:sld xmlns:a="http://schemas.openxmlformats.org/drawingml/2006/main" xmlns:r="http://schemas.openxmlformats.org/officeDocument/2006/relationships" xmlns:p="http://schemas.openxmlformats.org/presentationml/2006/main">
-  <p:cSld name="Slide 3">
+<p:sld xmlns:a="http://schemas.openxmlformats.org/drawingml/2006/main" xmlns:p="http://schemas.openxmlformats.org/presentationml/2006/main" xmlns:r="http://schemas.openxmlformats.org/officeDocument/2006/relationships">
+  <p:cSld>
     <p:spTree>
       <p:nvGrpSpPr>
         <p:cNvPr id="1" name=""/>
         <p:cNvGrpSpPr/>
         <p:nvPr/>
       </p:nvGrpSpPr>
-      <p:grpSpPr>
-        <a:xfrm>
-          <a:off x="0" y="0"/>
-          <a:ext cx="0" cy="0"/>
-          <a:chOff x="0" y="0"/>
-          <a:chExt cx="0" cy="0"/>
-        </a:xfrm>
-      </p:grpSpPr>
+      <p:grpSpPr/>
       <p:pic>
         <p:nvPicPr>
-          <p:cNvPr id="2" name="Image 0" descr="preencoded.png">    </p:cNvPr>
+          <p:cNvPr id="2" name="Picture 1" descr="p03.png"/>
           <p:cNvPicPr>
             <a:picLocks noChangeAspect="1"/>
           </p:cNvPicPr>
           <p:nvPr/>
         </p:nvPicPr>
         <p:blipFill>
-          <a:blip r:embed="rId1"/>
+          <a:blip r:embed="rId2"/>
           <a:stretch>
             <a:fillRect/>
           </a:stretch>
@@ -3223,7 +5618,7 @@
         <p:spPr>
           <a:xfrm>
             <a:off x="0" y="0"/>
-            <a:ext cx="12191695" cy="6858000"/>
+            <a:ext cx="12191969" cy="6858000"/>
           </a:xfrm>
           <a:prstGeom prst="rect">
             <a:avLst/>
@@ -3251,32 +5646,25 @@
 </file>
 
 <file path=ppt/slides/slide4.xml><?xml version="1.0" encoding="utf-8"?>
-<p:sld xmlns:a="http://schemas.openxmlformats.org/drawingml/2006/main" xmlns:r="http://schemas.openxmlformats.org/officeDocument/2006/relationships" xmlns:p="http://schemas.openxmlformats.org/presentationml/2006/main">
-  <p:cSld name="Slide 4">
+<p:sld xmlns:a="http://schemas.openxmlformats.org/drawingml/2006/main" xmlns:p="http://schemas.openxmlformats.org/presentationml/2006/main" xmlns:r="http://schemas.openxmlformats.org/officeDocument/2006/relationships">
+  <p:cSld>
     <p:spTree>
       <p:nvGrpSpPr>
         <p:cNvPr id="1" name=""/>
         <p:cNvGrpSpPr/>
         <p:nvPr/>
       </p:nvGrpSpPr>
-      <p:grpSpPr>
-        <a:xfrm>
-          <a:off x="0" y="0"/>
-          <a:ext cx="0" cy="0"/>
-          <a:chOff x="0" y="0"/>
-          <a:chExt cx="0" cy="0"/>
-        </a:xfrm>
-      </p:grpSpPr>
+      <p:grpSpPr/>
       <p:pic>
         <p:nvPicPr>
-          <p:cNvPr id="2" name="Image 0" descr="preencoded.png">    </p:cNvPr>
+          <p:cNvPr id="2" name="Picture 1" descr="p04.png"/>
           <p:cNvPicPr>
             <a:picLocks noChangeAspect="1"/>
           </p:cNvPicPr>
           <p:nvPr/>
         </p:nvPicPr>
         <p:blipFill>
-          <a:blip r:embed="rId1"/>
+          <a:blip r:embed="rId2"/>
           <a:stretch>
             <a:fillRect/>
           </a:stretch>
@@ -3284,7 +5672,7 @@
         <p:spPr>
           <a:xfrm>
             <a:off x="0" y="0"/>
-            <a:ext cx="12191695" cy="6858000"/>
+            <a:ext cx="12191969" cy="6858000"/>
           </a:xfrm>
           <a:prstGeom prst="rect">
             <a:avLst/>
@@ -3312,32 +5700,25 @@
 </file>
 
 <file path=ppt/slides/slide5.xml><?xml version="1.0" encoding="utf-8"?>
-<p:sld xmlns:a="http://schemas.openxmlformats.org/drawingml/2006/main" xmlns:r="http://schemas.openxmlformats.org/officeDocument/2006/relationships" xmlns:p="http://schemas.openxmlformats.org/presentationml/2006/main">
-  <p:cSld name="Slide 5">
+<p:sld xmlns:a="http://schemas.openxmlformats.org/drawingml/2006/main" xmlns:p="http://schemas.openxmlformats.org/presentationml/2006/main" xmlns:r="http://schemas.openxmlformats.org/officeDocument/2006/relationships">
+  <p:cSld>
     <p:spTree>
       <p:nvGrpSpPr>
         <p:cNvPr id="1" name=""/>
         <p:cNvGrpSpPr/>
         <p:nvPr/>
       </p:nvGrpSpPr>
-      <p:grpSpPr>
-        <a:xfrm>
-          <a:off x="0" y="0"/>
-          <a:ext cx="0" cy="0"/>
-          <a:chOff x="0" y="0"/>
-          <a:chExt cx="0" cy="0"/>
-        </a:xfrm>
-      </p:grpSpPr>
+      <p:grpSpPr/>
       <p:pic>
         <p:nvPicPr>
-          <p:cNvPr id="2" name="Image 0" descr="preencoded.png">    </p:cNvPr>
+          <p:cNvPr id="2" name="Picture 1" descr="p05.png"/>
           <p:cNvPicPr>
             <a:picLocks noChangeAspect="1"/>
           </p:cNvPicPr>
           <p:nvPr/>
         </p:nvPicPr>
         <p:blipFill>
-          <a:blip r:embed="rId1"/>
+          <a:blip r:embed="rId2"/>
           <a:stretch>
             <a:fillRect/>
           </a:stretch>
@@ -3345,7 +5726,7 @@
         <p:spPr>
           <a:xfrm>
             <a:off x="0" y="0"/>
-            <a:ext cx="12191695" cy="6858000"/>
+            <a:ext cx="12191969" cy="6858000"/>
           </a:xfrm>
           <a:prstGeom prst="rect">
             <a:avLst/>
@@ -3373,32 +5754,25 @@
 </file>
 
 <file path=ppt/slides/slide6.xml><?xml version="1.0" encoding="utf-8"?>
-<p:sld xmlns:a="http://schemas.openxmlformats.org/drawingml/2006/main" xmlns:r="http://schemas.openxmlformats.org/officeDocument/2006/relationships" xmlns:p="http://schemas.openxmlformats.org/presentationml/2006/main">
-  <p:cSld name="Slide 6">
+<p:sld xmlns:a="http://schemas.openxmlformats.org/drawingml/2006/main" xmlns:p="http://schemas.openxmlformats.org/presentationml/2006/main" xmlns:r="http://schemas.openxmlformats.org/officeDocument/2006/relationships">
+  <p:cSld>
     <p:spTree>
       <p:nvGrpSpPr>
         <p:cNvPr id="1" name=""/>
         <p:cNvGrpSpPr/>
         <p:nvPr/>
       </p:nvGrpSpPr>
-      <p:grpSpPr>
-        <a:xfrm>
-          <a:off x="0" y="0"/>
-          <a:ext cx="0" cy="0"/>
-          <a:chOff x="0" y="0"/>
-          <a:chExt cx="0" cy="0"/>
-        </a:xfrm>
-      </p:grpSpPr>
+      <p:grpSpPr/>
       <p:pic>
         <p:nvPicPr>
-          <p:cNvPr id="2" name="Image 0" descr="preencoded.png">    </p:cNvPr>
+          <p:cNvPr id="2" name="Picture 1" descr="p06.png"/>
           <p:cNvPicPr>
             <a:picLocks noChangeAspect="1"/>
           </p:cNvPicPr>
           <p:nvPr/>
         </p:nvPicPr>
         <p:blipFill>
-          <a:blip r:embed="rId1"/>
+          <a:blip r:embed="rId2"/>
           <a:stretch>
             <a:fillRect/>
           </a:stretch>
@@ -3406,7 +5780,7 @@
         <p:spPr>
           <a:xfrm>
             <a:off x="0" y="0"/>
-            <a:ext cx="12191695" cy="6858000"/>
+            <a:ext cx="12191969" cy="6858000"/>
           </a:xfrm>
           <a:prstGeom prst="rect">
             <a:avLst/>
@@ -3434,32 +5808,25 @@
 </file>
 
 <file path=ppt/slides/slide7.xml><?xml version="1.0" encoding="utf-8"?>
-<p:sld xmlns:a="http://schemas.openxmlformats.org/drawingml/2006/main" xmlns:r="http://schemas.openxmlformats.org/officeDocument/2006/relationships" xmlns:p="http://schemas.openxmlformats.org/presentationml/2006/main">
-  <p:cSld name="Slide 7">
+<p:sld xmlns:a="http://schemas.openxmlformats.org/drawingml/2006/main" xmlns:p="http://schemas.openxmlformats.org/presentationml/2006/main" xmlns:r="http://schemas.openxmlformats.org/officeDocument/2006/relationships">
+  <p:cSld>
     <p:spTree>
       <p:nvGrpSpPr>
         <p:cNvPr id="1" name=""/>
         <p:cNvGrpSpPr/>
         <p:nvPr/>
       </p:nvGrpSpPr>
-      <p:grpSpPr>
-        <a:xfrm>
-          <a:off x="0" y="0"/>
-          <a:ext cx="0" cy="0"/>
-          <a:chOff x="0" y="0"/>
-          <a:chExt cx="0" cy="0"/>
-        </a:xfrm>
-      </p:grpSpPr>
+      <p:grpSpPr/>
       <p:pic>
         <p:nvPicPr>
-          <p:cNvPr id="2" name="Image 0" descr="preencoded.png">    </p:cNvPr>
+          <p:cNvPr id="2" name="Picture 1" descr="p07.png"/>
           <p:cNvPicPr>
             <a:picLocks noChangeAspect="1"/>
           </p:cNvPicPr>
           <p:nvPr/>
         </p:nvPicPr>
         <p:blipFill>
-          <a:blip r:embed="rId1"/>
+          <a:blip r:embed="rId2"/>
           <a:stretch>
             <a:fillRect/>
           </a:stretch>
@@ -3467,7 +5834,7 @@
         <p:spPr>
           <a:xfrm>
             <a:off x="0" y="0"/>
-            <a:ext cx="12191695" cy="6858000"/>
+            <a:ext cx="12191969" cy="6858000"/>
           </a:xfrm>
           <a:prstGeom prst="rect">
             <a:avLst/>
@@ -3495,32 +5862,25 @@
 </file>
 
 <file path=ppt/slides/slide8.xml><?xml version="1.0" encoding="utf-8"?>
-<p:sld xmlns:a="http://schemas.openxmlformats.org/drawingml/2006/main" xmlns:r="http://schemas.openxmlformats.org/officeDocument/2006/relationships" xmlns:p="http://schemas.openxmlformats.org/presentationml/2006/main">
-  <p:cSld name="Slide 8">
+<p:sld xmlns:a="http://schemas.openxmlformats.org/drawingml/2006/main" xmlns:p="http://schemas.openxmlformats.org/presentationml/2006/main" xmlns:r="http://schemas.openxmlformats.org/officeDocument/2006/relationships">
+  <p:cSld>
     <p:spTree>
       <p:nvGrpSpPr>
         <p:cNvPr id="1" name=""/>
         <p:cNvGrpSpPr/>
         <p:nvPr/>
       </p:nvGrpSpPr>
-      <p:grpSpPr>
-        <a:xfrm>
-          <a:off x="0" y="0"/>
-          <a:ext cx="0" cy="0"/>
-          <a:chOff x="0" y="0"/>
-          <a:chExt cx="0" cy="0"/>
-        </a:xfrm>
-      </p:grpSpPr>
+      <p:grpSpPr/>
       <p:pic>
         <p:nvPicPr>
-          <p:cNvPr id="2" name="Image 0" descr="preencoded.png">    </p:cNvPr>
+          <p:cNvPr id="2" name="Picture 1" descr="p08.png"/>
           <p:cNvPicPr>
             <a:picLocks noChangeAspect="1"/>
           </p:cNvPicPr>
           <p:nvPr/>
         </p:nvPicPr>
         <p:blipFill>
-          <a:blip r:embed="rId1"/>
+          <a:blip r:embed="rId2"/>
           <a:stretch>
             <a:fillRect/>
           </a:stretch>
@@ -3528,7 +5888,7 @@
         <p:spPr>
           <a:xfrm>
             <a:off x="0" y="0"/>
-            <a:ext cx="12191695" cy="6858000"/>
+            <a:ext cx="12191969" cy="6858000"/>
           </a:xfrm>
           <a:prstGeom prst="rect">
             <a:avLst/>
@@ -3556,32 +5916,25 @@
 </file>
 
 <file path=ppt/slides/slide9.xml><?xml version="1.0" encoding="utf-8"?>
-<p:sld xmlns:a="http://schemas.openxmlformats.org/drawingml/2006/main" xmlns:r="http://schemas.openxmlformats.org/officeDocument/2006/relationships" xmlns:p="http://schemas.openxmlformats.org/presentationml/2006/main">
-  <p:cSld name="Slide 9">
+<p:sld xmlns:a="http://schemas.openxmlformats.org/drawingml/2006/main" xmlns:p="http://schemas.openxmlformats.org/presentationml/2006/main" xmlns:r="http://schemas.openxmlformats.org/officeDocument/2006/relationships">
+  <p:cSld>
     <p:spTree>
       <p:nvGrpSpPr>
         <p:cNvPr id="1" name=""/>
         <p:cNvGrpSpPr/>
         <p:nvPr/>
       </p:nvGrpSpPr>
-      <p:grpSpPr>
-        <a:xfrm>
-          <a:off x="0" y="0"/>
-          <a:ext cx="0" cy="0"/>
-          <a:chOff x="0" y="0"/>
-          <a:chExt cx="0" cy="0"/>
-        </a:xfrm>
-      </p:grpSpPr>
+      <p:grpSpPr/>
       <p:pic>
         <p:nvPicPr>
-          <p:cNvPr id="2" name="Image 0" descr="preencoded.png">    </p:cNvPr>
+          <p:cNvPr id="2" name="Picture 1" descr="p09.png"/>
           <p:cNvPicPr>
             <a:picLocks noChangeAspect="1"/>
           </p:cNvPicPr>
           <p:nvPr/>
         </p:nvPicPr>
         <p:blipFill>
-          <a:blip r:embed="rId1"/>
+          <a:blip r:embed="rId2"/>
           <a:stretch>
             <a:fillRect/>
           </a:stretch>
@@ -3589,7 +5942,7 @@
         <p:spPr>
           <a:xfrm>
             <a:off x="0" y="0"/>
-            <a:ext cx="12191695" cy="6858000"/>
+            <a:ext cx="12191969" cy="6858000"/>
           </a:xfrm>
           <a:prstGeom prst="rect">
             <a:avLst/>
@@ -3627,44 +5980,44 @@
         <a:sysClr val="window" lastClr="FFFFFF"/>
       </a:lt1>
       <a:dk2>
-        <a:srgbClr val="44546A"/>
+        <a:srgbClr val="1F497D"/>
       </a:dk2>
       <a:lt2>
-        <a:srgbClr val="E7E6E6"/>
+        <a:srgbClr val="EEECE1"/>
       </a:lt2>
       <a:accent1>
-        <a:srgbClr val="4472C4"/>
+        <a:srgbClr val="4F81BD"/>
       </a:accent1>
       <a:accent2>
-        <a:srgbClr val="ED7D31"/>
+        <a:srgbClr val="C0504D"/>
       </a:accent2>
       <a:accent3>
-        <a:srgbClr val="A5A5A5"/>
+        <a:srgbClr val="9BBB59"/>
       </a:accent3>
       <a:accent4>
-        <a:srgbClr val="FFC000"/>
+        <a:srgbClr val="8064A2"/>
       </a:accent4>
       <a:accent5>
-        <a:srgbClr val="5B9BD5"/>
+        <a:srgbClr val="4BACC6"/>
       </a:accent5>
       <a:accent6>
-        <a:srgbClr val="70AD47"/>
+        <a:srgbClr val="F79646"/>
       </a:accent6>
       <a:hlink>
-        <a:srgbClr val="0563C1"/>
+        <a:srgbClr val="0000FF"/>
       </a:hlink>
       <a:folHlink>
-        <a:srgbClr val="954F72"/>
+        <a:srgbClr val="800080"/>
       </a:folHlink>
     </a:clrScheme>
     <a:fontScheme name="Office">
       <a:majorFont>
-        <a:latin typeface="Calibri Light" panose="020F0302020204030204"/>
+        <a:latin typeface="Calibri"/>
         <a:ea typeface=""/>
         <a:cs typeface=""/>
-        <a:font script="Jpan" typeface="游ゴシック Light"/>
+        <a:font script="Jpan" typeface="ＭＳ Ｐゴシック"/>
         <a:font script="Hang" typeface="맑은 고딕"/>
-        <a:font script="Hans" typeface="等线 Light"/>
+        <a:font script="Hans" typeface="宋体"/>
         <a:font script="Hant" typeface="新細明體"/>
         <a:font script="Arab" typeface="Times New Roman"/>
         <a:font script="Hebr" typeface="Times New Roman"/>
@@ -3692,31 +6045,14 @@
         <a:font script="Viet" typeface="Times New Roman"/>
         <a:font script="Uigh" typeface="Microsoft Uighur"/>
         <a:font script="Geor" typeface="Sylfaen"/>
-        <a:font script="Armn" typeface="Arial"/>
-        <a:font script="Bugi" typeface="Leelawadee UI"/>
-        <a:font script="Bopo" typeface="Microsoft JhengHei"/>
-        <a:font script="Java" typeface="Javanese Text"/>
-        <a:font script="Lisu" typeface="Segoe UI"/>
-        <a:font script="Mymr" typeface="Myanmar Text"/>
-        <a:font script="Nkoo" typeface="Ebrima"/>
-        <a:font script="Olck" typeface="Nirmala UI"/>
-        <a:font script="Osma" typeface="Ebrima"/>
-        <a:font script="Phag" typeface="Phagspa"/>
-        <a:font script="Syrn" typeface="Estrangelo Edessa"/>
-        <a:font script="Syrj" typeface="Estrangelo Edessa"/>
-        <a:font script="Syre" typeface="Estrangelo Edessa"/>
-        <a:font script="Sora" typeface="Nirmala UI"/>
-        <a:font script="Tale" typeface="Microsoft Tai Le"/>
-        <a:font script="Talu" typeface="Microsoft New Tai Lue"/>
-        <a:font script="Tfng" typeface="Ebrima"/>
       </a:majorFont>
       <a:minorFont>
-        <a:latin typeface="Calibri" panose="020F0502020204030204"/>
+        <a:latin typeface="Calibri"/>
         <a:ea typeface=""/>
         <a:cs typeface=""/>
-        <a:font script="Jpan" typeface="游ゴシック"/>
+        <a:font script="Jpan" typeface="ＭＳ Ｐゴシック"/>
         <a:font script="Hang" typeface="맑은 고딕"/>
-        <a:font script="Hans" typeface="等线"/>
+        <a:font script="Hans" typeface="宋体"/>
         <a:font script="Hant" typeface="新細明體"/>
         <a:font script="Arab" typeface="Arial"/>
         <a:font script="Hebr" typeface="Arial"/>
@@ -3744,23 +6080,6 @@
         <a:font script="Viet" typeface="Arial"/>
         <a:font script="Uigh" typeface="Microsoft Uighur"/>
         <a:font script="Geor" typeface="Sylfaen"/>
-        <a:font script="Armn" typeface="Arial"/>
-        <a:font script="Bugi" typeface="Leelawadee UI"/>
-        <a:font script="Bopo" typeface="Microsoft JhengHei"/>
-        <a:font script="Java" typeface="Javanese Text"/>
-        <a:font script="Lisu" typeface="Segoe UI"/>
-        <a:font script="Mymr" typeface="Myanmar Text"/>
-        <a:font script="Nkoo" typeface="Ebrima"/>
-        <a:font script="Olck" typeface="Nirmala UI"/>
-        <a:font script="Osma" typeface="Ebrima"/>
-        <a:font script="Phag" typeface="Phagspa"/>
-        <a:font script="Syrn" typeface="Estrangelo Edessa"/>
-        <a:font script="Syrj" typeface="Estrangelo Edessa"/>
-        <a:font script="Syre" typeface="Estrangelo Edessa"/>
-        <a:font script="Sora" typeface="Nirmala UI"/>
-        <a:font script="Tale" typeface="Microsoft Tai Le"/>
-        <a:font script="Talu" typeface="Microsoft New Tai Lue"/>
-        <a:font script="Tfng" typeface="Ebrima"/>
       </a:minorFont>
     </a:fontScheme>
     <a:fmtScheme name="Office">
@@ -3772,141 +6091,520 @@
           <a:gsLst>
             <a:gs pos="0">
               <a:schemeClr val="phClr">
-                <a:lumMod val="110000"/>
-                <a:satMod val="105000"/>
-                <a:tint val="67000"/>
+                <a:tint val="50000"/>
+                <a:satMod val="300000"/>
               </a:schemeClr>
             </a:gs>
-            <a:gs pos="50000">
+            <a:gs pos="35000">
               <a:schemeClr val="phClr">
-                <a:lumMod val="105000"/>
-                <a:satMod val="103000"/>
-                <a:tint val="73000"/>
+                <a:tint val="37000"/>
+                <a:satMod val="300000"/>
               </a:schemeClr>
             </a:gs>
             <a:gs pos="100000">
               <a:schemeClr val="phClr">
-                <a:lumMod val="105000"/>
-                <a:satMod val="109000"/>
-                <a:tint val="81000"/>
+                <a:tint val="15000"/>
+                <a:satMod val="350000"/>
               </a:schemeClr>
             </a:gs>
           </a:gsLst>
-          <a:lin ang="5400000" scaled="0"/>
+          <a:lin ang="16200000" scaled="1"/>
         </a:gradFill>
         <a:gradFill rotWithShape="1">
           <a:gsLst>
             <a:gs pos="0">
               <a:schemeClr val="phClr">
-                <a:satMod val="103000"/>
-                <a:lumMod val="102000"/>
-                <a:tint val="94000"/>
-              </a:schemeClr>
-            </a:gs>
-            <a:gs pos="50000">
-              <a:schemeClr val="phClr">
-                <a:satMod val="110000"/>
-                <a:lumMod val="100000"/>
+                <a:tint val="100000"/>
                 <a:shade val="100000"/>
+                <a:satMod val="130000"/>
               </a:schemeClr>
             </a:gs>
             <a:gs pos="100000">
               <a:schemeClr val="phClr">
-                <a:lumMod val="99000"/>
-                <a:satMod val="120000"/>
-                <a:shade val="78000"/>
+                <a:tint val="50000"/>
+                <a:shade val="100000"/>
+                <a:satMod val="350000"/>
               </a:schemeClr>
             </a:gs>
           </a:gsLst>
-          <a:lin ang="5400000" scaled="0"/>
+          <a:lin ang="16200000" scaled="0"/>
         </a:gradFill>
       </a:fillStyleLst>
       <a:lnStyleLst>
-        <a:ln w="6350" cap="flat" cmpd="sng" algn="ctr">
+        <a:ln w="9525" cap="flat" cmpd="sng" algn="ctr">
+          <a:solidFill>
+            <a:schemeClr val="phClr">
+              <a:shade val="95000"/>
+              <a:satMod val="105000"/>
+            </a:schemeClr>
+          </a:solidFill>
+          <a:prstDash val="solid"/>
+        </a:ln>
+        <a:ln w="25400" cap="flat" cmpd="sng" algn="ctr">
           <a:solidFill>
             <a:schemeClr val="phClr"/>
           </a:solidFill>
           <a:prstDash val="solid"/>
-          <a:miter lim="800000"/>
         </a:ln>
-        <a:ln w="12700" cap="flat" cmpd="sng" algn="ctr">
+        <a:ln w="38100" cap="flat" cmpd="sng" algn="ctr">
           <a:solidFill>
             <a:schemeClr val="phClr"/>
           </a:solidFill>
           <a:prstDash val="solid"/>
-          <a:miter lim="800000"/>
-        </a:ln>
-        <a:ln w="19050" cap="flat" cmpd="sng" algn="ctr">
-          <a:solidFill>
-            <a:schemeClr val="phClr"/>
-          </a:solidFill>
-          <a:prstDash val="solid"/>
-          <a:miter lim="800000"/>
         </a:ln>
       </a:lnStyleLst>
       <a:effectStyleLst>
         <a:effectStyle>
-          <a:effectLst/>
-        </a:effectStyle>
-        <a:effectStyle>
-          <a:effectLst/>
+          <a:effectLst>
+            <a:outerShdw blurRad="40000" dist="20000" dir="5400000" rotWithShape="0">
+              <a:srgbClr val="000000">
+                <a:alpha val="38000"/>
+              </a:srgbClr>
+            </a:outerShdw>
+          </a:effectLst>
         </a:effectStyle>
         <a:effectStyle>
           <a:effectLst>
-            <a:outerShdw blurRad="57150" dist="19050" dir="5400000" algn="ctr" rotWithShape="0">
+            <a:outerShdw blurRad="40000" dist="23000" dir="5400000" rotWithShape="0">
               <a:srgbClr val="000000">
-                <a:alpha val="63000"/>
+                <a:alpha val="35000"/>
               </a:srgbClr>
             </a:outerShdw>
           </a:effectLst>
+        </a:effectStyle>
+        <a:effectStyle>
+          <a:effectLst>
+            <a:outerShdw blurRad="40000" dist="23000" dir="5400000" rotWithShape="0">
+              <a:srgbClr val="000000">
+                <a:alpha val="35000"/>
+              </a:srgbClr>
+            </a:outerShdw>
+          </a:effectLst>
+          <a:scene3d>
+            <a:camera prst="orthographicFront">
+              <a:rot lat="0" lon="0" rev="0"/>
+            </a:camera>
+            <a:lightRig rig="threePt" dir="t">
+              <a:rot lat="0" lon="0" rev="1200000"/>
+            </a:lightRig>
+          </a:scene3d>
+          <a:sp3d>
+            <a:bevelT w="63500" h="25400"/>
+          </a:sp3d>
         </a:effectStyle>
       </a:effectStyleLst>
       <a:bgFillStyleLst>
         <a:solidFill>
           <a:schemeClr val="phClr"/>
         </a:solidFill>
+        <a:gradFill rotWithShape="1">
+          <a:gsLst>
+            <a:gs pos="0">
+              <a:schemeClr val="phClr">
+                <a:tint val="40000"/>
+                <a:satMod val="350000"/>
+              </a:schemeClr>
+            </a:gs>
+            <a:gs pos="40000">
+              <a:schemeClr val="phClr">
+                <a:tint val="45000"/>
+                <a:shade val="99000"/>
+                <a:satMod val="350000"/>
+              </a:schemeClr>
+            </a:gs>
+            <a:gs pos="100000">
+              <a:schemeClr val="phClr">
+                <a:shade val="20000"/>
+                <a:satMod val="255000"/>
+              </a:schemeClr>
+            </a:gs>
+          </a:gsLst>
+          <a:path path="circle">
+            <a:fillToRect l="50000" t="-80000" r="50000" b="180000"/>
+          </a:path>
+        </a:gradFill>
+        <a:gradFill rotWithShape="1">
+          <a:gsLst>
+            <a:gs pos="0">
+              <a:schemeClr val="phClr">
+                <a:tint val="80000"/>
+                <a:satMod val="300000"/>
+              </a:schemeClr>
+            </a:gs>
+            <a:gs pos="100000">
+              <a:schemeClr val="phClr">
+                <a:shade val="30000"/>
+                <a:satMod val="200000"/>
+              </a:schemeClr>
+            </a:gs>
+          </a:gsLst>
+          <a:path path="circle">
+            <a:fillToRect l="50000" t="50000" r="50000" b="50000"/>
+          </a:path>
+        </a:gradFill>
+      </a:bgFillStyleLst>
+    </a:fmtScheme>
+  </a:themeElements>
+  <a:objectDefaults>
+    <a:spDef>
+      <a:spPr/>
+      <a:bodyPr/>
+      <a:lstStyle/>
+      <a:style>
+        <a:lnRef idx="1">
+          <a:schemeClr val="accent1"/>
+        </a:lnRef>
+        <a:fillRef idx="3">
+          <a:schemeClr val="accent1"/>
+        </a:fillRef>
+        <a:effectRef idx="2">
+          <a:schemeClr val="accent1"/>
+        </a:effectRef>
+        <a:fontRef idx="minor">
+          <a:schemeClr val="lt1"/>
+        </a:fontRef>
+      </a:style>
+    </a:spDef>
+    <a:lnDef>
+      <a:spPr/>
+      <a:bodyPr/>
+      <a:lstStyle/>
+      <a:style>
+        <a:lnRef idx="2">
+          <a:schemeClr val="accent1"/>
+        </a:lnRef>
+        <a:fillRef idx="0">
+          <a:schemeClr val="accent1"/>
+        </a:fillRef>
+        <a:effectRef idx="1">
+          <a:schemeClr val="accent1"/>
+        </a:effectRef>
+        <a:fontRef idx="minor">
+          <a:schemeClr val="tx1"/>
+        </a:fontRef>
+      </a:style>
+    </a:lnDef>
+  </a:objectDefaults>
+  <a:extraClrSchemeLst/>
+</a:theme>
+</file>
+
+<file path=ppt/theme/theme2.xml><?xml version="1.0" encoding="utf-8"?>
+<a:theme xmlns:a="http://schemas.openxmlformats.org/drawingml/2006/main" name="Office Theme">
+  <a:themeElements>
+    <a:clrScheme name="Office">
+      <a:dk1>
+        <a:sysClr val="windowText" lastClr="000000"/>
+      </a:dk1>
+      <a:lt1>
+        <a:sysClr val="window" lastClr="FFFFFF"/>
+      </a:lt1>
+      <a:dk2>
+        <a:srgbClr val="1F497D"/>
+      </a:dk2>
+      <a:lt2>
+        <a:srgbClr val="EEECE1"/>
+      </a:lt2>
+      <a:accent1>
+        <a:srgbClr val="4F81BD"/>
+      </a:accent1>
+      <a:accent2>
+        <a:srgbClr val="C0504D"/>
+      </a:accent2>
+      <a:accent3>
+        <a:srgbClr val="9BBB59"/>
+      </a:accent3>
+      <a:accent4>
+        <a:srgbClr val="8064A2"/>
+      </a:accent4>
+      <a:accent5>
+        <a:srgbClr val="4BACC6"/>
+      </a:accent5>
+      <a:accent6>
+        <a:srgbClr val="F79646"/>
+      </a:accent6>
+      <a:hlink>
+        <a:srgbClr val="0000FF"/>
+      </a:hlink>
+      <a:folHlink>
+        <a:srgbClr val="800080"/>
+      </a:folHlink>
+    </a:clrScheme>
+    <a:fontScheme name="Office">
+      <a:majorFont>
+        <a:latin typeface="Calibri"/>
+        <a:ea typeface=""/>
+        <a:cs typeface=""/>
+        <a:font script="Jpan" typeface="ＭＳ Ｐゴシック"/>
+        <a:font script="Hang" typeface="맑은 고딕"/>
+        <a:font script="Hans" typeface="宋体"/>
+        <a:font script="Hant" typeface="新細明體"/>
+        <a:font script="Arab" typeface="Times New Roman"/>
+        <a:font script="Hebr" typeface="Times New Roman"/>
+        <a:font script="Thai" typeface="Angsana New"/>
+        <a:font script="Ethi" typeface="Nyala"/>
+        <a:font script="Beng" typeface="Vrinda"/>
+        <a:font script="Gujr" typeface="Shruti"/>
+        <a:font script="Khmr" typeface="MoolBoran"/>
+        <a:font script="Knda" typeface="Tunga"/>
+        <a:font script="Guru" typeface="Raavi"/>
+        <a:font script="Cans" typeface="Euphemia"/>
+        <a:font script="Cher" typeface="Plantagenet Cherokee"/>
+        <a:font script="Yiii" typeface="Microsoft Yi Baiti"/>
+        <a:font script="Tibt" typeface="Microsoft Himalaya"/>
+        <a:font script="Thaa" typeface="MV Boli"/>
+        <a:font script="Deva" typeface="Mangal"/>
+        <a:font script="Telu" typeface="Gautami"/>
+        <a:font script="Taml" typeface="Latha"/>
+        <a:font script="Syrc" typeface="Estrangelo Edessa"/>
+        <a:font script="Orya" typeface="Kalinga"/>
+        <a:font script="Mlym" typeface="Kartika"/>
+        <a:font script="Laoo" typeface="DokChampa"/>
+        <a:font script="Sinh" typeface="Iskoola Pota"/>
+        <a:font script="Mong" typeface="Mongolian Baiti"/>
+        <a:font script="Viet" typeface="Times New Roman"/>
+        <a:font script="Uigh" typeface="Microsoft Uighur"/>
+        <a:font script="Geor" typeface="Sylfaen"/>
+      </a:majorFont>
+      <a:minorFont>
+        <a:latin typeface="Calibri"/>
+        <a:ea typeface=""/>
+        <a:cs typeface=""/>
+        <a:font script="Jpan" typeface="ＭＳ Ｐゴシック"/>
+        <a:font script="Hang" typeface="맑은 고딕"/>
+        <a:font script="Hans" typeface="宋体"/>
+        <a:font script="Hant" typeface="新細明體"/>
+        <a:font script="Arab" typeface="Arial"/>
+        <a:font script="Hebr" typeface="Arial"/>
+        <a:font script="Thai" typeface="Cordia New"/>
+        <a:font script="Ethi" typeface="Nyala"/>
+        <a:font script="Beng" typeface="Vrinda"/>
+        <a:font script="Gujr" typeface="Shruti"/>
+        <a:font script="Khmr" typeface="DaunPenh"/>
+        <a:font script="Knda" typeface="Tunga"/>
+        <a:font script="Guru" typeface="Raavi"/>
+        <a:font script="Cans" typeface="Euphemia"/>
+        <a:font script="Cher" typeface="Plantagenet Cherokee"/>
+        <a:font script="Yiii" typeface="Microsoft Yi Baiti"/>
+        <a:font script="Tibt" typeface="Microsoft Himalaya"/>
+        <a:font script="Thaa" typeface="MV Boli"/>
+        <a:font script="Deva" typeface="Mangal"/>
+        <a:font script="Telu" typeface="Gautami"/>
+        <a:font script="Taml" typeface="Latha"/>
+        <a:font script="Syrc" typeface="Estrangelo Edessa"/>
+        <a:font script="Orya" typeface="Kalinga"/>
+        <a:font script="Mlym" typeface="Kartika"/>
+        <a:font script="Laoo" typeface="DokChampa"/>
+        <a:font script="Sinh" typeface="Iskoola Pota"/>
+        <a:font script="Mong" typeface="Mongolian Baiti"/>
+        <a:font script="Viet" typeface="Arial"/>
+        <a:font script="Uigh" typeface="Microsoft Uighur"/>
+        <a:font script="Geor" typeface="Sylfaen"/>
+      </a:minorFont>
+    </a:fontScheme>
+    <a:fmtScheme name="Office">
+      <a:fillStyleLst>
         <a:solidFill>
-          <a:schemeClr val="phClr">
-            <a:tint val="95000"/>
-            <a:satMod val="170000"/>
-          </a:schemeClr>
+          <a:schemeClr val="phClr"/>
         </a:solidFill>
         <a:gradFill rotWithShape="1">
           <a:gsLst>
             <a:gs pos="0">
               <a:schemeClr val="phClr">
-                <a:tint val="93000"/>
-                <a:satMod val="150000"/>
-                <a:shade val="98000"/>
-                <a:lumMod val="102000"/>
+                <a:tint val="50000"/>
+                <a:satMod val="300000"/>
               </a:schemeClr>
             </a:gs>
-            <a:gs pos="50000">
+            <a:gs pos="35000">
               <a:schemeClr val="phClr">
-                <a:tint val="98000"/>
-                <a:satMod val="130000"/>
-                <a:shade val="90000"/>
-                <a:lumMod val="103000"/>
+                <a:tint val="37000"/>
+                <a:satMod val="300000"/>
               </a:schemeClr>
             </a:gs>
             <a:gs pos="100000">
               <a:schemeClr val="phClr">
-                <a:shade val="63000"/>
-                <a:satMod val="120000"/>
+                <a:tint val="15000"/>
+                <a:satMod val="350000"/>
               </a:schemeClr>
             </a:gs>
           </a:gsLst>
-          <a:lin ang="5400000" scaled="0"/>
+          <a:lin ang="16200000" scaled="1"/>
+        </a:gradFill>
+        <a:gradFill rotWithShape="1">
+          <a:gsLst>
+            <a:gs pos="0">
+              <a:schemeClr val="phClr">
+                <a:tint val="100000"/>
+                <a:shade val="100000"/>
+                <a:satMod val="130000"/>
+              </a:schemeClr>
+            </a:gs>
+            <a:gs pos="100000">
+              <a:schemeClr val="phClr">
+                <a:tint val="50000"/>
+                <a:shade val="100000"/>
+                <a:satMod val="350000"/>
+              </a:schemeClr>
+            </a:gs>
+          </a:gsLst>
+          <a:lin ang="16200000" scaled="0"/>
+        </a:gradFill>
+      </a:fillStyleLst>
+      <a:lnStyleLst>
+        <a:ln w="9525" cap="flat" cmpd="sng" algn="ctr">
+          <a:solidFill>
+            <a:schemeClr val="phClr">
+              <a:shade val="95000"/>
+              <a:satMod val="105000"/>
+            </a:schemeClr>
+          </a:solidFill>
+          <a:prstDash val="solid"/>
+        </a:ln>
+        <a:ln w="25400" cap="flat" cmpd="sng" algn="ctr">
+          <a:solidFill>
+            <a:schemeClr val="phClr"/>
+          </a:solidFill>
+          <a:prstDash val="solid"/>
+        </a:ln>
+        <a:ln w="38100" cap="flat" cmpd="sng" algn="ctr">
+          <a:solidFill>
+            <a:schemeClr val="phClr"/>
+          </a:solidFill>
+          <a:prstDash val="solid"/>
+        </a:ln>
+      </a:lnStyleLst>
+      <a:effectStyleLst>
+        <a:effectStyle>
+          <a:effectLst>
+            <a:outerShdw blurRad="40000" dist="20000" dir="5400000" rotWithShape="0">
+              <a:srgbClr val="000000">
+                <a:alpha val="38000"/>
+              </a:srgbClr>
+            </a:outerShdw>
+          </a:effectLst>
+        </a:effectStyle>
+        <a:effectStyle>
+          <a:effectLst>
+            <a:outerShdw blurRad="40000" dist="23000" dir="5400000" rotWithShape="0">
+              <a:srgbClr val="000000">
+                <a:alpha val="35000"/>
+              </a:srgbClr>
+            </a:outerShdw>
+          </a:effectLst>
+        </a:effectStyle>
+        <a:effectStyle>
+          <a:effectLst>
+            <a:outerShdw blurRad="40000" dist="23000" dir="5400000" rotWithShape="0">
+              <a:srgbClr val="000000">
+                <a:alpha val="35000"/>
+              </a:srgbClr>
+            </a:outerShdw>
+          </a:effectLst>
+          <a:scene3d>
+            <a:camera prst="orthographicFront">
+              <a:rot lat="0" lon="0" rev="0"/>
+            </a:camera>
+            <a:lightRig rig="threePt" dir="t">
+              <a:rot lat="0" lon="0" rev="1200000"/>
+            </a:lightRig>
+          </a:scene3d>
+          <a:sp3d>
+            <a:bevelT w="63500" h="25400"/>
+          </a:sp3d>
+        </a:effectStyle>
+      </a:effectStyleLst>
+      <a:bgFillStyleLst>
+        <a:solidFill>
+          <a:schemeClr val="phClr"/>
+        </a:solidFill>
+        <a:gradFill rotWithShape="1">
+          <a:gsLst>
+            <a:gs pos="0">
+              <a:schemeClr val="phClr">
+                <a:tint val="40000"/>
+                <a:satMod val="350000"/>
+              </a:schemeClr>
+            </a:gs>
+            <a:gs pos="40000">
+              <a:schemeClr val="phClr">
+                <a:tint val="45000"/>
+                <a:shade val="99000"/>
+                <a:satMod val="350000"/>
+              </a:schemeClr>
+            </a:gs>
+            <a:gs pos="100000">
+              <a:schemeClr val="phClr">
+                <a:shade val="20000"/>
+                <a:satMod val="255000"/>
+              </a:schemeClr>
+            </a:gs>
+          </a:gsLst>
+          <a:path path="circle">
+            <a:fillToRect l="50000" t="-80000" r="50000" b="180000"/>
+          </a:path>
+        </a:gradFill>
+        <a:gradFill rotWithShape="1">
+          <a:gsLst>
+            <a:gs pos="0">
+              <a:schemeClr val="phClr">
+                <a:tint val="80000"/>
+                <a:satMod val="300000"/>
+              </a:schemeClr>
+            </a:gs>
+            <a:gs pos="100000">
+              <a:schemeClr val="phClr">
+                <a:shade val="30000"/>
+                <a:satMod val="200000"/>
+              </a:schemeClr>
+            </a:gs>
+          </a:gsLst>
+          <a:path path="circle">
+            <a:fillToRect l="50000" t="50000" r="50000" b="50000"/>
+          </a:path>
         </a:gradFill>
       </a:bgFillStyleLst>
     </a:fmtScheme>
   </a:themeElements>
-  <a:objectDefaults/>
+  <a:objectDefaults>
+    <a:spDef>
+      <a:spPr/>
+      <a:bodyPr/>
+      <a:lstStyle/>
+      <a:style>
+        <a:lnRef idx="1">
+          <a:schemeClr val="accent1"/>
+        </a:lnRef>
+        <a:fillRef idx="3">
+          <a:schemeClr val="accent1"/>
+        </a:fillRef>
+        <a:effectRef idx="2">
+          <a:schemeClr val="accent1"/>
+        </a:effectRef>
+        <a:fontRef idx="minor">
+          <a:schemeClr val="lt1"/>
+        </a:fontRef>
+      </a:style>
+    </a:spDef>
+    <a:lnDef>
+      <a:spPr/>
+      <a:bodyPr/>
+      <a:lstStyle/>
+      <a:style>
+        <a:lnRef idx="2">
+          <a:schemeClr val="accent1"/>
+        </a:lnRef>
+        <a:fillRef idx="0">
+          <a:schemeClr val="accent1"/>
+        </a:fillRef>
+        <a:effectRef idx="1">
+          <a:schemeClr val="accent1"/>
+        </a:effectRef>
+        <a:fontRef idx="minor">
+          <a:schemeClr val="tx1"/>
+        </a:fontRef>
+      </a:style>
+    </a:lnDef>
+  </a:objectDefaults>
   <a:extraClrSchemeLst/>
-  <a:extLst>
-    <a:ext uri="{05A4C25C-085E-4340-85A3-A5531E510DB2}">
-      <thm15:themeFamily xmlns:thm15="http://schemas.microsoft.com/office/thememl/2012/main" name="Office Theme" id="{62F939B6-93AF-4DB8-9C6B-D6C7DFDC589F}" vid="{4A3C46E8-61CC-4603-A589-7422A47A8E4A}"/>
-    </a:ext>
-  </a:extLst>
 </a:theme>
 </file>